--- a/CloudMind_AI_Project_Presentation.pptx
+++ b/CloudMind_AI_Project_Presentation.pptx
@@ -19,6 +19,9 @@
     <p:sldId id="267" r:id="rId18"/>
     <p:sldId id="268" r:id="rId19"/>
     <p:sldId id="269" r:id="rId20"/>
+    <p:sldId id="270" r:id="rId21"/>
+    <p:sldId id="271" r:id="rId22"/>
+    <p:sldId id="272" r:id="rId23"/>
   </p:sldIdLst>
   <p:sldSz cx="12191695" cy="6858000" type="screen4x3"/>
   <p:notesSz cx="6858000" cy="9144000"/>
@@ -3117,8 +3120,8 @@
         </p:nvSpPr>
         <p:spPr>
           <a:xfrm>
-            <a:off x="914400" y="1828800"/>
-            <a:ext cx="10332720" cy="3200400"/>
+            <a:off x="914400" y="1645920"/>
+            <a:ext cx="10332720" cy="4114800"/>
           </a:xfrm>
           <a:prstGeom prst="rect">
             <a:avLst/>
@@ -3132,14 +3135,14 @@
           <a:lstStyle/>
           <a:p>
             <a:pPr>
-              <a:defRPr sz="1400" b="1">
+              <a:defRPr sz="1300" b="1">
                 <a:solidFill>
                   <a:srgbClr val="10B981"/>
                 </a:solidFill>
               </a:defRPr>
             </a:pPr>
             <a:r>
-              <a:t>CLOUD INFRASTRUCTURE INTELLIGENCE &amp; GREEN COMPUTING</a:t>
+              <a:t>CLOUD COMPUTING &amp; AUTONOMOUS SYSTEMS PROJECT DEFENSE</a:t>
             </a:r>
           </a:p>
           <a:p>
@@ -3147,7 +3150,7 @@
               <a:spcBef>
                 <a:spcPts val="800"/>
               </a:spcBef>
-              <a:defRPr sz="4400" b="1">
+              <a:defRPr sz="4600" b="1">
                 <a:solidFill>
                   <a:srgbClr val="F8FAFC"/>
                 </a:solidFill>
@@ -3160,22 +3163,37 @@
           <a:p>
             <a:pPr>
               <a:spcBef>
-                <a:spcPts val="1200"/>
+                <a:spcPts val="1000"/>
               </a:spcBef>
-              <a:defRPr sz="1800">
+              <a:defRPr sz="1700">
                 <a:solidFill>
                   <a:srgbClr val="94A3B8"/>
                 </a:solidFill>
               </a:defRPr>
             </a:pPr>
             <a:r>
-              <a:t>An Autonomous Multi-Region AWS Telemetry, Automated Security Remediation &amp; Energy Optimization Platform</a:t>
+              <a:t>An Autonomous Multi-Region AWS Telemetry, Automated Security Remediation &amp; Green Computing Platform</a:t>
             </a:r>
           </a:p>
           <a:p>
             <a:pPr>
               <a:spcBef>
-                <a:spcPts val="2800"/>
+                <a:spcPts val="2600"/>
+              </a:spcBef>
+              <a:defRPr sz="1600" b="1">
+                <a:solidFill>
+                  <a:srgbClr val="10B981"/>
+                </a:solidFill>
+              </a:defRPr>
+            </a:pPr>
+            <a:r>
+              <a:t>STUDENT / CANDIDATE WORK: SAFWAAN MOHAMED S  |  REG NO: 25BCE1188</a:t>
+            </a:r>
+          </a:p>
+          <a:p>
+            <a:pPr>
+              <a:spcBef>
+                <a:spcPts val="1000"/>
               </a:spcBef>
               <a:defRPr sz="1300">
                 <a:solidFill>
@@ -3184,7 +3202,7 @@
               </a:defRPr>
             </a:pPr>
             <a:r>
-              <a:t>Technologies: React 18 • FastAPI • AWS Boto3 SDK • Amazon CloudWatch • AWS STS</a:t>
+              <a:t>Technologies: React 18 • FastAPI (Python 3.13) • AWS Boto3 SDK • Amazon CloudWatch • AWS STS</a:t>
             </a:r>
           </a:p>
         </p:txBody>
@@ -3223,7 +3241,7 @@
         </p:nvSpPr>
         <p:spPr>
           <a:xfrm>
-            <a:off x="731520" y="457200"/>
+            <a:off x="731520" y="365760"/>
             <a:ext cx="10698480" cy="1097280"/>
           </a:xfrm>
           <a:prstGeom prst="rect">
@@ -3245,22 +3263,22 @@
               </a:defRPr>
             </a:pPr>
             <a:r>
-              <a:t>ENGINEERING RIGOR</a:t>
+              <a:t>ENGINEERING RIGOR &amp; PROBLEM SOLVING</a:t>
             </a:r>
           </a:p>
           <a:p>
             <a:pPr>
               <a:spcBef>
-                <a:spcPts val="400"/>
+                <a:spcPts val="300"/>
               </a:spcBef>
-              <a:defRPr sz="2400" b="1">
-                <a:solidFill>
-                  <a:srgbClr val="F8FAFC"/>
-                </a:solidFill>
-              </a:defRPr>
-            </a:pPr>
-            <a:r>
-              <a:t>Debugging the 50% Flatline Bug ('Is this def wrong?')</a:t>
+              <a:defRPr sz="2200" b="1">
+                <a:solidFill>
+                  <a:srgbClr val="F8FAFC"/>
+                </a:solidFill>
+              </a:defRPr>
+            </a:pPr>
+            <a:r>
+              <a:t>Diagnosing &amp; Fixing the 50% Flatline Telemetry Bug</a:t>
             </a:r>
           </a:p>
         </p:txBody>
@@ -3274,7 +3292,7 @@
         <p:spPr>
           <a:xfrm>
             <a:off x="731520" y="1645920"/>
-            <a:ext cx="5120640" cy="4572000"/>
+            <a:ext cx="5120640" cy="4663440"/>
           </a:xfrm>
           <a:prstGeom prst="roundRect">
             <a:avLst/>
@@ -3284,7 +3302,7 @@
           </a:solidFill>
           <a:ln w="19050">
             <a:solidFill>
-              <a:srgbClr val="F59E0B"/>
+              <a:srgbClr val="F43F5E"/>
             </a:solidFill>
           </a:ln>
         </p:spPr>
@@ -3303,66 +3321,81 @@
           </a:fontRef>
         </p:style>
         <p:txBody>
-          <a:bodyPr rtlCol="0" anchor="ctr" wrap="square" lIns="274320" tIns="228600" rIns="274320" bIns="228600"/>
+          <a:bodyPr rtlCol="0" anchor="ctr" wrap="square" lIns="256032" tIns="201168" rIns="256032" bIns="201168"/>
           <a:lstStyle/>
           <a:p>
             <a:pPr algn="ctr">
               <a:spcAft>
-                <a:spcPts val="1200"/>
-              </a:spcAft>
-              <a:defRPr sz="1600" b="1">
-                <a:solidFill>
-                  <a:srgbClr val="F59E0B"/>
-                </a:solidFill>
-              </a:defRPr>
-            </a:pPr>
-            <a:r>
-              <a:t>Root Cause Analysis</a:t>
-            </a:r>
-          </a:p>
-          <a:p>
-            <a:pPr>
-              <a:spcAft>
-                <a:spcPts val="600"/>
-              </a:spcAft>
-              <a:defRPr sz="1200">
-                <a:solidFill>
-                  <a:srgbClr val="F8FAFC"/>
-                </a:solidFill>
-              </a:defRPr>
-            </a:pPr>
-            <a:r>
-              <a:t>• Bug 1 (Backend Step Quantization): calculate_efficiency_score used rigid buckets (if cpu &lt; 10: return 45). For idle EC2 instances (0.2-3% CPU), every hour was returned as 45.</a:t>
-            </a:r>
-          </a:p>
-          <a:p>
-            <a:pPr>
-              <a:spcAft>
-                <a:spcPts val="600"/>
-              </a:spcAft>
-              <a:defRPr sz="1200">
-                <a:solidFill>
-                  <a:srgbClr val="F8FAFC"/>
-                </a:solidFill>
-              </a:defRPr>
-            </a:pPr>
-            <a:r>
-              <a:t>• Bug 2 (CSS Alignment Offset): .chart-bars had inset: 0 0 0 while grid lines had inset: 0 0 23px. A 45% bar height (108px) + 23px label aligned exactly at 131.5px (the 50% grid line!).</a:t>
-            </a:r>
-          </a:p>
-          <a:p>
-            <a:pPr>
-              <a:spcAft>
-                <a:spcPts val="600"/>
-              </a:spcAft>
-              <a:defRPr sz="1200">
-                <a:solidFill>
-                  <a:srgbClr val="F8FAFC"/>
-                </a:solidFill>
-              </a:defRPr>
-            </a:pPr>
-            <a:r>
-              <a:t>• Result: Chart appeared artificially capped and frozen identically at 50 for 24 hours.</a:t>
+                <a:spcPts val="1000"/>
+              </a:spcAft>
+              <a:defRPr sz="1500" b="1">
+                <a:solidFill>
+                  <a:srgbClr val="F43F5E"/>
+                </a:solidFill>
+              </a:defRPr>
+            </a:pPr>
+            <a:r>
+              <a:t>The Bug: Artificial Flatline at 50</a:t>
+            </a:r>
+          </a:p>
+          <a:p>
+            <a:pPr>
+              <a:spcAft>
+                <a:spcPts val="500"/>
+              </a:spcAft>
+              <a:defRPr sz="1100">
+                <a:solidFill>
+                  <a:srgbClr val="F8FAFC"/>
+                </a:solidFill>
+              </a:defRPr>
+            </a:pPr>
+            <a:r>
+              <a:t>• Symptom: In initial testing, every single hourly bar across the last 24 hours was completely flat and frozen at 50.</a:t>
+            </a:r>
+          </a:p>
+          <a:p>
+            <a:pPr>
+              <a:spcAft>
+                <a:spcPts val="500"/>
+              </a:spcAft>
+              <a:defRPr sz="1100">
+                <a:solidFill>
+                  <a:srgbClr val="F8FAFC"/>
+                </a:solidFill>
+              </a:defRPr>
+            </a:pPr>
+            <a:r>
+              <a:t>• Root Cause 1 (Backend Step Quantization): calculate_efficiency_score used rigid discrete buckets: if cpu &lt; 10: return 45. For idle instances (0.2-3% CPU), every hour was rounded to constant 45.</a:t>
+            </a:r>
+          </a:p>
+          <a:p>
+            <a:pPr>
+              <a:spcAft>
+                <a:spcPts val="500"/>
+              </a:spcAft>
+              <a:defRPr sz="1100">
+                <a:solidFill>
+                  <a:srgbClr val="F8FAFC"/>
+                </a:solidFill>
+              </a:defRPr>
+            </a:pPr>
+            <a:r>
+              <a:t>• Root Cause 2 (CSS Alignment Offset): .chart-bars had inset: 0 0 0 while grid lines had inset: 0 0 23px. A 45% bar height (108px) + 23px label underneath placed bar tops right at 131.5px (the 50% grid line!).</a:t>
+            </a:r>
+          </a:p>
+          <a:p>
+            <a:pPr>
+              <a:spcAft>
+                <a:spcPts val="500"/>
+              </a:spcAft>
+              <a:defRPr sz="1100">
+                <a:solidFill>
+                  <a:srgbClr val="F8FAFC"/>
+                </a:solidFill>
+              </a:defRPr>
+            </a:pPr>
+            <a:r>
+              <a:t>• Result: Graph created an artificial illusion that efficiency was capped at 50.</a:t>
             </a:r>
           </a:p>
         </p:txBody>
@@ -3376,7 +3409,7 @@
         <p:spPr>
           <a:xfrm>
             <a:off x="6309360" y="1645920"/>
-            <a:ext cx="5120640" cy="4572000"/>
+            <a:ext cx="5120640" cy="4663440"/>
           </a:xfrm>
           <a:prstGeom prst="roundRect">
             <a:avLst/>
@@ -3405,81 +3438,96 @@
           </a:fontRef>
         </p:style>
         <p:txBody>
-          <a:bodyPr rtlCol="0" anchor="ctr" wrap="square" lIns="274320" tIns="228600" rIns="274320" bIns="228600"/>
+          <a:bodyPr rtlCol="0" anchor="ctr" wrap="square" lIns="256032" tIns="201168" rIns="256032" bIns="201168"/>
           <a:lstStyle/>
           <a:p>
             <a:pPr algn="ctr">
               <a:spcAft>
-                <a:spcPts val="1200"/>
-              </a:spcAft>
-              <a:defRPr sz="1600" b="1">
+                <a:spcPts val="1000"/>
+              </a:spcAft>
+              <a:defRPr sz="1500" b="1">
                 <a:solidFill>
                   <a:srgbClr val="10B981"/>
                 </a:solidFill>
               </a:defRPr>
             </a:pPr>
             <a:r>
-              <a:t>Engineered Solution</a:t>
-            </a:r>
-          </a:p>
-          <a:p>
-            <a:pPr>
-              <a:spcAft>
-                <a:spcPts val="600"/>
-              </a:spcAft>
-              <a:defRPr sz="1200">
-                <a:solidFill>
-                  <a:srgbClr val="F8FAFC"/>
-                </a:solidFill>
-              </a:defRPr>
-            </a:pPr>
-            <a:r>
-              <a:t>• Replaced Step Function: Implemented smooth continuous curve with cubic scaling from idle to peak.</a:t>
-            </a:r>
-          </a:p>
-          <a:p>
-            <a:pPr>
-              <a:spcAft>
-                <a:spcPts val="600"/>
-              </a:spcAft>
-              <a:defRPr sz="1200">
-                <a:solidFill>
-                  <a:srgbClr val="F8FAFC"/>
-                </a:solidFill>
-              </a:defRPr>
-            </a:pPr>
-            <a:r>
-              <a:t>• Synchronized CSS: Set inset: 0 0 23px and placed labels outside flex height via absolute positioning.</a:t>
-            </a:r>
-          </a:p>
-          <a:p>
-            <a:pPr>
-              <a:spcAft>
-                <a:spcPts val="600"/>
-              </a:spcAft>
-              <a:defRPr sz="1200">
-                <a:solidFill>
-                  <a:srgbClr val="F8FAFC"/>
-                </a:solidFill>
-              </a:defRPr>
-            </a:pPr>
-            <a:r>
-              <a:t>• Added Dual Metric Toggle: Allowed cloud operators to inspect raw CPU % directly alongside score.</a:t>
-            </a:r>
-          </a:p>
-          <a:p>
-            <a:pPr>
-              <a:spcAft>
-                <a:spcPts val="600"/>
-              </a:spcAft>
-              <a:defRPr sz="1200">
-                <a:solidFill>
-                  <a:srgbClr val="F8FAFC"/>
-                </a:solidFill>
-              </a:defRPr>
-            </a:pPr>
-            <a:r>
-              <a:t>• Verified Build: npm run build completed with 0 errors and pushed to production GitHub repo.</a:t>
+              <a:t>My Solution: Continuous Curve &amp; CSS Fix</a:t>
+            </a:r>
+          </a:p>
+          <a:p>
+            <a:pPr>
+              <a:spcAft>
+                <a:spcPts val="500"/>
+              </a:spcAft>
+              <a:defRPr sz="1100">
+                <a:solidFill>
+                  <a:srgbClr val="F8FAFC"/>
+                </a:solidFill>
+              </a:defRPr>
+            </a:pPr>
+            <a:r>
+              <a:t>• Mathematical Formulation: Replaced step buckets with a continuous cubic server power curve based on SPECpower benchmarks.</a:t>
+            </a:r>
+          </a:p>
+          <a:p>
+            <a:pPr>
+              <a:spcAft>
+                <a:spcPts val="500"/>
+              </a:spcAft>
+              <a:defRPr sz="1100">
+                <a:solidFill>
+                  <a:srgbClr val="F8FAFC"/>
+                </a:solidFill>
+              </a:defRPr>
+            </a:pPr>
+            <a:r>
+              <a:t>• Curve Dynamics: Starts at 25% (idle draw), rises smoothly to 95% at 70% CPU, and includes thermal saturation penalties beyond 85% CPU.</a:t>
+            </a:r>
+          </a:p>
+          <a:p>
+            <a:pPr>
+              <a:spcAft>
+                <a:spcPts val="500"/>
+              </a:spcAft>
+              <a:defRPr sz="1100">
+                <a:solidFill>
+                  <a:srgbClr val="F8FAFC"/>
+                </a:solidFill>
+              </a:defRPr>
+            </a:pPr>
+            <a:r>
+              <a:t>• CSS Geometry Synchronization: Updated .chart-bars to inset: 0 0 23px and placed labels outside flex height via top: 100%.</a:t>
+            </a:r>
+          </a:p>
+          <a:p>
+            <a:pPr>
+              <a:spcAft>
+                <a:spcPts val="500"/>
+              </a:spcAft>
+              <a:defRPr sz="1100">
+                <a:solidFill>
+                  <a:srgbClr val="F8FAFC"/>
+                </a:solidFill>
+              </a:defRPr>
+            </a:pPr>
+            <a:r>
+              <a:t>• Dual Metric Toggle: Added interactive buttons allowing operators to toggle between Efficiency Score and raw CloudWatch CPU %.</a:t>
+            </a:r>
+          </a:p>
+          <a:p>
+            <a:pPr>
+              <a:spcAft>
+                <a:spcPts val="500"/>
+              </a:spcAft>
+              <a:defRPr sz="1100">
+                <a:solidFill>
+                  <a:srgbClr val="F8FAFC"/>
+                </a:solidFill>
+              </a:defRPr>
+            </a:pPr>
+            <a:r>
+              <a:t>• Hover Tooltips: Precision tooltips displaying both efficiency and CPU % for every hour.</a:t>
             </a:r>
           </a:p>
         </p:txBody>
@@ -3518,7 +3566,7 @@
         </p:nvSpPr>
         <p:spPr>
           <a:xfrm>
-            <a:off x="731520" y="457200"/>
+            <a:off x="731520" y="365760"/>
             <a:ext cx="10698480" cy="1097280"/>
           </a:xfrm>
           <a:prstGeom prst="rect">
@@ -3540,143 +3588,50 @@
               </a:defRPr>
             </a:pPr>
             <a:r>
-              <a:t>AUTONOMOUS OPERATIONS</a:t>
+              <a:t>MODULE 5 WORKING</a:t>
             </a:r>
           </a:p>
           <a:p>
             <a:pPr>
               <a:spcBef>
-                <a:spcPts val="400"/>
+                <a:spcPts val="300"/>
               </a:spcBef>
-              <a:defRPr sz="2400" b="1">
-                <a:solidFill>
-                  <a:srgbClr val="F8FAFC"/>
-                </a:solidFill>
-              </a:defRPr>
-            </a:pPr>
-            <a:r>
-              <a:t>Intelligent Load Balancing &amp; Conversational AI</a:t>
-            </a:r>
-          </a:p>
-        </p:txBody>
-      </p:sp>
-      <p:sp>
-        <p:nvSpPr>
-          <p:cNvPr id="3" name="Rounded Rectangle 2"/>
-          <p:cNvSpPr/>
+              <a:defRPr sz="2200" b="1">
+                <a:solidFill>
+                  <a:srgbClr val="F8FAFC"/>
+                </a:solidFill>
+              </a:defRPr>
+            </a:pPr>
+            <a:r>
+              <a:t>Historical Analysis: Resolved Continuous Trend &amp; Optimization</a:t>
+            </a:r>
+          </a:p>
+        </p:txBody>
+      </p:sp>
+      <p:pic>
+        <p:nvPicPr>
+          <p:cNvPr id="3" name="Picture 2" descr="energy_trend.png"/>
+          <p:cNvPicPr>
+            <a:picLocks noChangeAspect="1"/>
+          </p:cNvPicPr>
           <p:nvPr/>
-        </p:nvSpPr>
+        </p:nvPicPr>
+        <p:blipFill>
+          <a:blip r:embed="rId2"/>
+          <a:stretch>
+            <a:fillRect/>
+          </a:stretch>
+        </p:blipFill>
         <p:spPr>
           <a:xfrm>
             <a:off x="731520" y="1645920"/>
-            <a:ext cx="5120640" cy="4572000"/>
+            <a:ext cx="6217920" cy="3582591"/>
           </a:xfrm>
-          <a:prstGeom prst="roundRect">
+          <a:prstGeom prst="rect">
             <a:avLst/>
           </a:prstGeom>
-          <a:solidFill>
-            <a:srgbClr val="131D35"/>
-          </a:solidFill>
-          <a:ln w="19050">
-            <a:solidFill>
-              <a:srgbClr val="2563EB"/>
-            </a:solidFill>
-          </a:ln>
         </p:spPr>
-        <p:style>
-          <a:lnRef idx="1">
-            <a:schemeClr val="accent1"/>
-          </a:lnRef>
-          <a:fillRef idx="3">
-            <a:schemeClr val="accent1"/>
-          </a:fillRef>
-          <a:effectRef idx="2">
-            <a:schemeClr val="accent1"/>
-          </a:effectRef>
-          <a:fontRef idx="minor">
-            <a:schemeClr val="lt1"/>
-          </a:fontRef>
-        </p:style>
-        <p:txBody>
-          <a:bodyPr rtlCol="0" anchor="ctr" wrap="square" lIns="274320" tIns="228600" rIns="274320" bIns="228600"/>
-          <a:lstStyle/>
-          <a:p>
-            <a:pPr algn="ctr">
-              <a:spcAft>
-                <a:spcPts val="1200"/>
-              </a:spcAft>
-              <a:defRPr sz="1600" b="1">
-                <a:solidFill>
-                  <a:srgbClr val="2563EB"/>
-                </a:solidFill>
-              </a:defRPr>
-            </a:pPr>
-            <a:r>
-              <a:t>Dynamic Workload Balancer</a:t>
-            </a:r>
-          </a:p>
-          <a:p>
-            <a:pPr>
-              <a:spcAft>
-                <a:spcPts val="600"/>
-              </a:spcAft>
-              <a:defRPr sz="1200">
-                <a:solidFill>
-                  <a:srgbClr val="F8FAFC"/>
-                </a:solidFill>
-              </a:defRPr>
-            </a:pPr>
-            <a:r>
-              <a:t>• Cluster Workload Variance: Calculates standard deviation of compute pressure across instances.</a:t>
-            </a:r>
-          </a:p>
-          <a:p>
-            <a:pPr>
-              <a:spcAft>
-                <a:spcPts val="600"/>
-              </a:spcAft>
-              <a:defRPr sz="1200">
-                <a:solidFill>
-                  <a:srgbClr val="F8FAFC"/>
-                </a:solidFill>
-              </a:defRPr>
-            </a:pPr>
-            <a:r>
-              <a:t>• Hotspot Detection: Flags instances exceeding safe CPU thresholds.</a:t>
-            </a:r>
-          </a:p>
-          <a:p>
-            <a:pPr>
-              <a:spcAft>
-                <a:spcPts val="600"/>
-              </a:spcAft>
-              <a:defRPr sz="1200">
-                <a:solidFill>
-                  <a:srgbClr val="F8FAFC"/>
-                </a:solidFill>
-              </a:defRPr>
-            </a:pPr>
-            <a:r>
-              <a:t>• Traffic Rebalancing: Formulates intelligent routing suggestions to equalize node load.</a:t>
-            </a:r>
-          </a:p>
-          <a:p>
-            <a:pPr>
-              <a:spcAft>
-                <a:spcPts val="600"/>
-              </a:spcAft>
-              <a:defRPr sz="1200">
-                <a:solidFill>
-                  <a:srgbClr val="F8FAFC"/>
-                </a:solidFill>
-              </a:defRPr>
-            </a:pPr>
-            <a:r>
-              <a:t>• Auto-Scaling Triggers: Detects when cluster capacity requires scale-out or scale-in.</a:t>
-            </a:r>
-          </a:p>
-        </p:txBody>
-      </p:sp>
+      </p:pic>
       <p:sp>
         <p:nvSpPr>
           <p:cNvPr id="4" name="Rounded Rectangle 3"/>
@@ -3685,8 +3640,8 @@
         </p:nvSpPr>
         <p:spPr>
           <a:xfrm>
-            <a:off x="6309360" y="1645920"/>
-            <a:ext cx="5120640" cy="4572000"/>
+            <a:off x="7132320" y="1645920"/>
+            <a:ext cx="4297680" cy="4663440"/>
           </a:xfrm>
           <a:prstGeom prst="roundRect">
             <a:avLst/>
@@ -3715,81 +3670,96 @@
           </a:fontRef>
         </p:style>
         <p:txBody>
-          <a:bodyPr rtlCol="0" anchor="ctr" wrap="square" lIns="274320" tIns="228600" rIns="274320" bIns="228600"/>
+          <a:bodyPr rtlCol="0" anchor="ctr" wrap="square" lIns="256032" tIns="201168" rIns="256032" bIns="201168"/>
           <a:lstStyle/>
           <a:p>
             <a:pPr algn="ctr">
               <a:spcAft>
-                <a:spcPts val="1200"/>
-              </a:spcAft>
-              <a:defRPr sz="1600" b="1">
+                <a:spcPts val="1000"/>
+              </a:spcAft>
+              <a:defRPr sz="1500" b="1">
                 <a:solidFill>
                   <a:srgbClr val="10B981"/>
                 </a:solidFill>
               </a:defRPr>
             </a:pPr>
             <a:r>
-              <a:t>Conversational AI Assistant</a:t>
-            </a:r>
-          </a:p>
-          <a:p>
-            <a:pPr>
-              <a:spcAft>
-                <a:spcPts val="600"/>
-              </a:spcAft>
-              <a:defRPr sz="1200">
-                <a:solidFill>
-                  <a:srgbClr val="F8FAFC"/>
-                </a:solidFill>
-              </a:defRPr>
-            </a:pPr>
-            <a:r>
-              <a:t>• Natural Language Interface: Ask complex infrastructure questions in conversational English.</a:t>
-            </a:r>
-          </a:p>
-          <a:p>
-            <a:pPr>
-              <a:spcAft>
-                <a:spcPts val="600"/>
-              </a:spcAft>
-              <a:defRPr sz="1200">
-                <a:solidFill>
-                  <a:srgbClr val="F8FAFC"/>
-                </a:solidFill>
-              </a:defRPr>
-            </a:pPr>
-            <a:r>
-              <a:t>• Automated Summarization: Explains security vulnerabilities and compliance scores in plain text.</a:t>
-            </a:r>
-          </a:p>
-          <a:p>
-            <a:pPr>
-              <a:spcAft>
-                <a:spcPts val="600"/>
-              </a:spcAft>
-              <a:defRPr sz="1200">
-                <a:solidFill>
-                  <a:srgbClr val="F8FAFC"/>
-                </a:solidFill>
-              </a:defRPr>
-            </a:pPr>
-            <a:r>
-              <a:t>• Guidance on Demand: Recommends instance downsizing, spot pricing, and security remediations.</a:t>
-            </a:r>
-          </a:p>
-          <a:p>
-            <a:pPr>
-              <a:spcAft>
-                <a:spcPts val="600"/>
-              </a:spcAft>
-              <a:defRPr sz="1200">
-                <a:solidFill>
-                  <a:srgbClr val="F8FAFC"/>
-                </a:solidFill>
-              </a:defRPr>
-            </a:pPr>
-            <a:r>
-              <a:t>• Zero Latency: Responsive chat interface directly connected to FastAPI intelligence.</a:t>
+              <a:t>How it Works (My Implementation)</a:t>
+            </a:r>
+          </a:p>
+          <a:p>
+            <a:pPr>
+              <a:spcAft>
+                <a:spcPts val="500"/>
+              </a:spcAft>
+              <a:defRPr sz="1100">
+                <a:solidFill>
+                  <a:srgbClr val="F8FAFC"/>
+                </a:solidFill>
+              </a:defRPr>
+            </a:pPr>
+            <a:r>
+              <a:t>• Resolved Telemetry Visualization: Demonstrates the fixed chart with continuous variation (~30% efficiency) over 24 hours.</a:t>
+            </a:r>
+          </a:p>
+          <a:p>
+            <a:pPr>
+              <a:spcAft>
+                <a:spcPts val="500"/>
+              </a:spcAft>
+              <a:defRPr sz="1100">
+                <a:solidFill>
+                  <a:srgbClr val="F8FAFC"/>
+                </a:solidFill>
+              </a:defRPr>
+            </a:pPr>
+            <a:r>
+              <a:t>• No More Flatline: Bars reflect real hourly fractional CPU changes rather than an artificial static constant.</a:t>
+            </a:r>
+          </a:p>
+          <a:p>
+            <a:pPr>
+              <a:spcAft>
+                <a:spcPts val="500"/>
+              </a:spcAft>
+              <a:defRPr sz="1100">
+                <a:solidFill>
+                  <a:srgbClr val="F8FAFC"/>
+                </a:solidFill>
+              </a:defRPr>
+            </a:pPr>
+            <a:r>
+              <a:t>• Optimization Opportunities: Automatically flags instance i-0f42ba1e1a07103f7 averaging only 2.64% CPU.</a:t>
+            </a:r>
+          </a:p>
+          <a:p>
+            <a:pPr>
+              <a:spcAft>
+                <a:spcPts val="500"/>
+              </a:spcAft>
+              <a:defRPr sz="1100">
+                <a:solidFill>
+                  <a:srgbClr val="F8FAFC"/>
+                </a:solidFill>
+              </a:defRPr>
+            </a:pPr>
+            <a:r>
+              <a:t>• Actionable Advice: Recommends rightsizing instance or applying scheduled start/stop policies.</a:t>
+            </a:r>
+          </a:p>
+          <a:p>
+            <a:pPr>
+              <a:spcAft>
+                <a:spcPts val="500"/>
+              </a:spcAft>
+              <a:defRPr sz="1100">
+                <a:solidFill>
+                  <a:srgbClr val="F8FAFC"/>
+                </a:solidFill>
+              </a:defRPr>
+            </a:pPr>
+            <a:r>
+              <a:t>• High Idle Capacity Alert: Highlights underutilized compute to eliminate wasted enterprise spending.</a:t>
             </a:r>
           </a:p>
         </p:txBody>
@@ -3828,7 +3798,7 @@
         </p:nvSpPr>
         <p:spPr>
           <a:xfrm>
-            <a:off x="731520" y="457200"/>
+            <a:off x="731520" y="365760"/>
             <a:ext cx="10698480" cy="1097280"/>
           </a:xfrm>
           <a:prstGeom prst="rect">
@@ -3850,36 +3820,60 @@
               </a:defRPr>
             </a:pPr>
             <a:r>
-              <a:t>VERIFICATION</a:t>
+              <a:t>MODULE 6 WORKING</a:t>
             </a:r>
           </a:p>
           <a:p>
             <a:pPr>
               <a:spcBef>
-                <a:spcPts val="400"/>
+                <a:spcPts val="300"/>
               </a:spcBef>
-              <a:defRPr sz="2400" b="1">
-                <a:solidFill>
-                  <a:srgbClr val="F8FAFC"/>
-                </a:solidFill>
-              </a:defRPr>
-            </a:pPr>
-            <a:r>
-              <a:t>Quality Assurance, Testing &amp; Production Metrics</a:t>
-            </a:r>
-          </a:p>
-        </p:txBody>
-      </p:sp>
-      <p:sp>
-        <p:nvSpPr>
-          <p:cNvPr id="3" name="Rounded Rectangle 2"/>
-          <p:cNvSpPr/>
+              <a:defRPr sz="2200" b="1">
+                <a:solidFill>
+                  <a:srgbClr val="F8FAFC"/>
+                </a:solidFill>
+              </a:defRPr>
+            </a:pPr>
+            <a:r>
+              <a:t>Workload Distribution: Real-Time EC2 Load Balancing</a:t>
+            </a:r>
+          </a:p>
+        </p:txBody>
+      </p:sp>
+      <p:pic>
+        <p:nvPicPr>
+          <p:cNvPr id="3" name="Picture 2" descr="load_balancing.png"/>
+          <p:cNvPicPr>
+            <a:picLocks noChangeAspect="1"/>
+          </p:cNvPicPr>
           <p:nvPr/>
-        </p:nvSpPr>
+        </p:nvPicPr>
+        <p:blipFill>
+          <a:blip r:embed="rId2"/>
+          <a:stretch>
+            <a:fillRect/>
+          </a:stretch>
+        </p:blipFill>
         <p:spPr>
           <a:xfrm>
             <a:off x="731520" y="1645920"/>
-            <a:ext cx="3383280" cy="4572000"/>
+            <a:ext cx="6217920" cy="2908578"/>
+          </a:xfrm>
+          <a:prstGeom prst="rect">
+            <a:avLst/>
+          </a:prstGeom>
+        </p:spPr>
+      </p:pic>
+      <p:sp>
+        <p:nvSpPr>
+          <p:cNvPr id="4" name="Rounded Rectangle 3"/>
+          <p:cNvSpPr/>
+          <p:nvPr/>
+        </p:nvSpPr>
+        <p:spPr>
+          <a:xfrm>
+            <a:off x="7132320" y="1645920"/>
+            <a:ext cx="4297680" cy="4663440"/>
           </a:xfrm>
           <a:prstGeom prst="roundRect">
             <a:avLst/>
@@ -3908,360 +3902,96 @@
           </a:fontRef>
         </p:style>
         <p:txBody>
-          <a:bodyPr rtlCol="0" anchor="ctr" wrap="square" lIns="274320" tIns="228600" rIns="274320" bIns="228600"/>
+          <a:bodyPr rtlCol="0" anchor="ctr" wrap="square" lIns="256032" tIns="201168" rIns="256032" bIns="201168"/>
           <a:lstStyle/>
           <a:p>
             <a:pPr algn="ctr">
               <a:spcAft>
-                <a:spcPts val="1200"/>
-              </a:spcAft>
-              <a:defRPr sz="1600" b="1">
+                <a:spcPts val="1000"/>
+              </a:spcAft>
+              <a:defRPr sz="1500" b="1">
                 <a:solidFill>
                   <a:srgbClr val="2563EB"/>
                 </a:solidFill>
               </a:defRPr>
             </a:pPr>
             <a:r>
-              <a:t>Backend Testing</a:t>
-            </a:r>
-          </a:p>
-          <a:p>
-            <a:pPr>
-              <a:spcAft>
-                <a:spcPts val="600"/>
-              </a:spcAft>
-              <a:defRPr sz="1200">
-                <a:solidFill>
-                  <a:srgbClr val="F8FAFC"/>
-                </a:solidFill>
-              </a:defRPr>
-            </a:pPr>
-            <a:r>
-              <a:t>• FastAPI TestClient integration.</a:t>
-            </a:r>
-          </a:p>
-          <a:p>
-            <a:pPr>
-              <a:spcAft>
-                <a:spcPts val="600"/>
-              </a:spcAft>
-              <a:defRPr sz="1200">
-                <a:solidFill>
-                  <a:srgbClr val="F8FAFC"/>
-                </a:solidFill>
-              </a:defRPr>
-            </a:pPr>
-            <a:r>
-              <a:t>• Python py_compile 0 errors.</a:t>
-            </a:r>
-          </a:p>
-          <a:p>
-            <a:pPr>
-              <a:spcAft>
-                <a:spcPts val="600"/>
-              </a:spcAft>
-              <a:defRPr sz="1200">
-                <a:solidFill>
-                  <a:srgbClr val="F8FAFC"/>
-                </a:solidFill>
-              </a:defRPr>
-            </a:pPr>
-            <a:r>
-              <a:t>• STS validation unit testing.</a:t>
-            </a:r>
-          </a:p>
-          <a:p>
-            <a:pPr>
-              <a:spcAft>
-                <a:spcPts val="600"/>
-              </a:spcAft>
-              <a:defRPr sz="1200">
-                <a:solidFill>
-                  <a:srgbClr val="F8FAFC"/>
-                </a:solidFill>
-              </a:defRPr>
-            </a:pPr>
-            <a:r>
-              <a:t>• CloudWatch mock &amp; live tests.</a:t>
-            </a:r>
-          </a:p>
-          <a:p>
-            <a:pPr>
-              <a:spcAft>
-                <a:spcPts val="600"/>
-              </a:spcAft>
-              <a:defRPr sz="1200">
-                <a:solidFill>
-                  <a:srgbClr val="F8FAFC"/>
-                </a:solidFill>
-              </a:defRPr>
-            </a:pPr>
-            <a:r>
-              <a:t>• Sub-50ms endpoint response.</a:t>
-            </a:r>
-          </a:p>
-        </p:txBody>
-      </p:sp>
-      <p:sp>
-        <p:nvSpPr>
-          <p:cNvPr id="4" name="Rounded Rectangle 3"/>
-          <p:cNvSpPr/>
-          <p:nvPr/>
-        </p:nvSpPr>
-        <p:spPr>
-          <a:xfrm>
-            <a:off x="4389120" y="1645920"/>
-            <a:ext cx="3383280" cy="4572000"/>
-          </a:xfrm>
-          <a:prstGeom prst="roundRect">
-            <a:avLst/>
-          </a:prstGeom>
-          <a:solidFill>
-            <a:srgbClr val="131D35"/>
-          </a:solidFill>
-          <a:ln w="19050">
-            <a:solidFill>
-              <a:srgbClr val="F59E0B"/>
-            </a:solidFill>
-          </a:ln>
-        </p:spPr>
-        <p:style>
-          <a:lnRef idx="1">
-            <a:schemeClr val="accent1"/>
-          </a:lnRef>
-          <a:fillRef idx="3">
-            <a:schemeClr val="accent1"/>
-          </a:fillRef>
-          <a:effectRef idx="2">
-            <a:schemeClr val="accent1"/>
-          </a:effectRef>
-          <a:fontRef idx="minor">
-            <a:schemeClr val="lt1"/>
-          </a:fontRef>
-        </p:style>
-        <p:txBody>
-          <a:bodyPr rtlCol="0" anchor="ctr" wrap="square" lIns="274320" tIns="228600" rIns="274320" bIns="228600"/>
-          <a:lstStyle/>
-          <a:p>
-            <a:pPr algn="ctr">
-              <a:spcAft>
-                <a:spcPts val="1200"/>
-              </a:spcAft>
-              <a:defRPr sz="1600" b="1">
-                <a:solidFill>
-                  <a:srgbClr val="F59E0B"/>
-                </a:solidFill>
-              </a:defRPr>
-            </a:pPr>
-            <a:r>
-              <a:t>Frontend Build</a:t>
-            </a:r>
-          </a:p>
-          <a:p>
-            <a:pPr>
-              <a:spcAft>
-                <a:spcPts val="600"/>
-              </a:spcAft>
-              <a:defRPr sz="1200">
-                <a:solidFill>
-                  <a:srgbClr val="F8FAFC"/>
-                </a:solidFill>
-              </a:defRPr>
-            </a:pPr>
-            <a:r>
-              <a:t>• Vite production compilation passed in 801ms.</a:t>
-            </a:r>
-          </a:p>
-          <a:p>
-            <a:pPr>
-              <a:spcAft>
-                <a:spcPts val="600"/>
-              </a:spcAft>
-              <a:defRPr sz="1200">
-                <a:solidFill>
-                  <a:srgbClr val="F8FAFC"/>
-                </a:solidFill>
-              </a:defRPr>
-            </a:pPr>
-            <a:r>
-              <a:t>• Zero ESLint / React syntax errors.</a:t>
-            </a:r>
-          </a:p>
-          <a:p>
-            <a:pPr>
-              <a:spcAft>
-                <a:spcPts val="600"/>
-              </a:spcAft>
-              <a:defRPr sz="1200">
-                <a:solidFill>
-                  <a:srgbClr val="F8FAFC"/>
-                </a:solidFill>
-              </a:defRPr>
-            </a:pPr>
-            <a:r>
-              <a:t>• Responsive layout testing.</a:t>
-            </a:r>
-          </a:p>
-          <a:p>
-            <a:pPr>
-              <a:spcAft>
-                <a:spcPts val="600"/>
-              </a:spcAft>
-              <a:defRPr sz="1200">
-                <a:solidFill>
-                  <a:srgbClr val="F8FAFC"/>
-                </a:solidFill>
-              </a:defRPr>
-            </a:pPr>
-            <a:r>
-              <a:t>• Glassmorphic design system.</a:t>
-            </a:r>
-          </a:p>
-          <a:p>
-            <a:pPr>
-              <a:spcAft>
-                <a:spcPts val="600"/>
-              </a:spcAft>
-              <a:defRPr sz="1200">
-                <a:solidFill>
-                  <a:srgbClr val="F8FAFC"/>
-                </a:solidFill>
-              </a:defRPr>
-            </a:pPr>
-            <a:r>
-              <a:t>• Zero hydration mismatches.</a:t>
-            </a:r>
-          </a:p>
-        </p:txBody>
-      </p:sp>
-      <p:sp>
-        <p:nvSpPr>
-          <p:cNvPr id="5" name="Rounded Rectangle 4"/>
-          <p:cNvSpPr/>
-          <p:nvPr/>
-        </p:nvSpPr>
-        <p:spPr>
-          <a:xfrm>
-            <a:off x="8046720" y="1645920"/>
-            <a:ext cx="3383280" cy="4572000"/>
-          </a:xfrm>
-          <a:prstGeom prst="roundRect">
-            <a:avLst/>
-          </a:prstGeom>
-          <a:solidFill>
-            <a:srgbClr val="131D35"/>
-          </a:solidFill>
-          <a:ln w="19050">
-            <a:solidFill>
-              <a:srgbClr val="10B981"/>
-            </a:solidFill>
-          </a:ln>
-        </p:spPr>
-        <p:style>
-          <a:lnRef idx="1">
-            <a:schemeClr val="accent1"/>
-          </a:lnRef>
-          <a:fillRef idx="3">
-            <a:schemeClr val="accent1"/>
-          </a:fillRef>
-          <a:effectRef idx="2">
-            <a:schemeClr val="accent1"/>
-          </a:effectRef>
-          <a:fontRef idx="minor">
-            <a:schemeClr val="lt1"/>
-          </a:fontRef>
-        </p:style>
-        <p:txBody>
-          <a:bodyPr rtlCol="0" anchor="ctr" wrap="square" lIns="274320" tIns="228600" rIns="274320" bIns="228600"/>
-          <a:lstStyle/>
-          <a:p>
-            <a:pPr algn="ctr">
-              <a:spcAft>
-                <a:spcPts val="1200"/>
-              </a:spcAft>
-              <a:defRPr sz="1600" b="1">
-                <a:solidFill>
-                  <a:srgbClr val="10B981"/>
-                </a:solidFill>
-              </a:defRPr>
-            </a:pPr>
-            <a:r>
-              <a:t>Deployment &amp; Git</a:t>
-            </a:r>
-          </a:p>
-          <a:p>
-            <a:pPr>
-              <a:spcAft>
-                <a:spcPts val="600"/>
-              </a:spcAft>
-              <a:defRPr sz="1200">
-                <a:solidFill>
-                  <a:srgbClr val="F8FAFC"/>
-                </a:solidFill>
-              </a:defRPr>
-            </a:pPr>
-            <a:r>
-              <a:t>• GitHub Repository: SMOS555/Cloudmind.</a:t>
-            </a:r>
-          </a:p>
-          <a:p>
-            <a:pPr>
-              <a:spcAft>
-                <a:spcPts val="600"/>
-              </a:spcAft>
-              <a:defRPr sz="1200">
-                <a:solidFill>
-                  <a:srgbClr val="F8FAFC"/>
-                </a:solidFill>
-              </a:defRPr>
-            </a:pPr>
-            <a:r>
-              <a:t>• Branch: main (Clean sync).</a:t>
-            </a:r>
-          </a:p>
-          <a:p>
-            <a:pPr>
-              <a:spcAft>
-                <a:spcPts val="600"/>
-              </a:spcAft>
-              <a:defRPr sz="1200">
-                <a:solidFill>
-                  <a:srgbClr val="F8FAFC"/>
-                </a:solidFill>
-              </a:defRPr>
-            </a:pPr>
-            <a:r>
-              <a:t>• Production artifacts verified.</a:t>
-            </a:r>
-          </a:p>
-          <a:p>
-            <a:pPr>
-              <a:spcAft>
-                <a:spcPts val="600"/>
-              </a:spcAft>
-              <a:defRPr sz="1200">
-                <a:solidFill>
-                  <a:srgbClr val="F8FAFC"/>
-                </a:solidFill>
-              </a:defRPr>
-            </a:pPr>
-            <a:r>
-              <a:t>• Docker Compose ready.</a:t>
-            </a:r>
-          </a:p>
-          <a:p>
-            <a:pPr>
-              <a:spcAft>
-                <a:spcPts val="600"/>
-              </a:spcAft>
-              <a:defRPr sz="1200">
-                <a:solidFill>
-                  <a:srgbClr val="F8FAFC"/>
-                </a:solidFill>
-              </a:defRPr>
-            </a:pPr>
-            <a:r>
-              <a:t>• Ready for live cloud deployment.</a:t>
+              <a:t>How it Works (My Implementation)</a:t>
+            </a:r>
+          </a:p>
+          <a:p>
+            <a:pPr>
+              <a:spcAft>
+                <a:spcPts val="500"/>
+              </a:spcAft>
+              <a:defRPr sz="1100">
+                <a:solidFill>
+                  <a:srgbClr val="F8FAFC"/>
+                </a:solidFill>
+              </a:defRPr>
+            </a:pPr>
+            <a:r>
+              <a:t>• Workload Distribution Analysis: Analyzes real EC2 CPU pressure across monitored compute nodes.</a:t>
+            </a:r>
+          </a:p>
+          <a:p>
+            <a:pPr>
+              <a:spcAft>
+                <a:spcPts val="500"/>
+              </a:spcAft>
+              <a:defRPr sz="1100">
+                <a:solidFill>
+                  <a:srgbClr val="F8FAFC"/>
+                </a:solidFill>
+              </a:defRPr>
+            </a:pPr>
+            <a:r>
+              <a:t>• Cluster Status: Computes overall cluster health (Balanced status across active nodes).</a:t>
+            </a:r>
+          </a:p>
+          <a:p>
+            <a:pPr>
+              <a:spcAft>
+                <a:spcPts val="500"/>
+              </a:spcAft>
+              <a:defRPr sz="1100">
+                <a:solidFill>
+                  <a:srgbClr val="F8FAFC"/>
+                </a:solidFill>
+              </a:defRPr>
+            </a:pPr>
+            <a:r>
+              <a:t>• Node Monitoring: Real-time tracking of instance i-0f42ba1e1a07103f7 with 2.72% CPU.</a:t>
+            </a:r>
+          </a:p>
+          <a:p>
+            <a:pPr>
+              <a:spcAft>
+                <a:spcPts val="500"/>
+              </a:spcAft>
+              <a:defRPr sz="1100">
+                <a:solidFill>
+                  <a:srgbClr val="F8FAFC"/>
+                </a:solidFill>
+              </a:defRPr>
+            </a:pPr>
+            <a:r>
+              <a:t>• Compute Variance: Calculates standard deviation of compute load across active instances.</a:t>
+            </a:r>
+          </a:p>
+          <a:p>
+            <a:pPr>
+              <a:spcAft>
+                <a:spcPts val="500"/>
+              </a:spcAft>
+              <a:defRPr sz="1100">
+                <a:solidFill>
+                  <a:srgbClr val="F8FAFC"/>
+                </a:solidFill>
+              </a:defRPr>
+            </a:pPr>
+            <a:r>
+              <a:t>• Proactive Scaling Signals: Formulates traffic redistribution recommendations when skew is detected.</a:t>
             </a:r>
           </a:p>
         </p:txBody>
@@ -4300,7 +4030,7 @@
         </p:nvSpPr>
         <p:spPr>
           <a:xfrm>
-            <a:off x="731520" y="457200"/>
+            <a:off x="731520" y="365760"/>
             <a:ext cx="10698480" cy="1097280"/>
           </a:xfrm>
           <a:prstGeom prst="rect">
@@ -4322,143 +4052,50 @@
               </a:defRPr>
             </a:pPr>
             <a:r>
-              <a:t>LOOKING FORWARD</a:t>
+              <a:t>MODULE 7 WORKING</a:t>
             </a:r>
           </a:p>
           <a:p>
             <a:pPr>
               <a:spcBef>
-                <a:spcPts val="400"/>
+                <a:spcPts val="300"/>
               </a:spcBef>
-              <a:defRPr sz="2400" b="1">
-                <a:solidFill>
-                  <a:srgbClr val="F8FAFC"/>
-                </a:solidFill>
-              </a:defRPr>
-            </a:pPr>
-            <a:r>
-              <a:t>Conclusion &amp; Future Roadmap</a:t>
-            </a:r>
-          </a:p>
-        </p:txBody>
-      </p:sp>
-      <p:sp>
-        <p:nvSpPr>
-          <p:cNvPr id="3" name="Rounded Rectangle 2"/>
-          <p:cNvSpPr/>
+              <a:defRPr sz="2200" b="1">
+                <a:solidFill>
+                  <a:srgbClr val="F8FAFC"/>
+                </a:solidFill>
+              </a:defRPr>
+            </a:pPr>
+            <a:r>
+              <a:t>Autonomous AI Cloud Agent: Natural Language Infrastructure Copilot</a:t>
+            </a:r>
+          </a:p>
+        </p:txBody>
+      </p:sp>
+      <p:pic>
+        <p:nvPicPr>
+          <p:cNvPr id="3" name="Picture 2" descr="ai_cloud_agent.png"/>
+          <p:cNvPicPr>
+            <a:picLocks noChangeAspect="1"/>
+          </p:cNvPicPr>
           <p:nvPr/>
-        </p:nvSpPr>
+        </p:nvPicPr>
+        <p:blipFill>
+          <a:blip r:embed="rId2"/>
+          <a:stretch>
+            <a:fillRect/>
+          </a:stretch>
+        </p:blipFill>
         <p:spPr>
           <a:xfrm>
             <a:off x="731520" y="1645920"/>
-            <a:ext cx="5120640" cy="4572000"/>
+            <a:ext cx="6217920" cy="2945011"/>
           </a:xfrm>
-          <a:prstGeom prst="roundRect">
+          <a:prstGeom prst="rect">
             <a:avLst/>
           </a:prstGeom>
-          <a:solidFill>
-            <a:srgbClr val="131D35"/>
-          </a:solidFill>
-          <a:ln w="19050">
-            <a:solidFill>
-              <a:srgbClr val="10B981"/>
-            </a:solidFill>
-          </a:ln>
         </p:spPr>
-        <p:style>
-          <a:lnRef idx="1">
-            <a:schemeClr val="accent1"/>
-          </a:lnRef>
-          <a:fillRef idx="3">
-            <a:schemeClr val="accent1"/>
-          </a:fillRef>
-          <a:effectRef idx="2">
-            <a:schemeClr val="accent1"/>
-          </a:effectRef>
-          <a:fontRef idx="minor">
-            <a:schemeClr val="lt1"/>
-          </a:fontRef>
-        </p:style>
-        <p:txBody>
-          <a:bodyPr rtlCol="0" anchor="ctr" wrap="square" lIns="274320" tIns="228600" rIns="274320" bIns="228600"/>
-          <a:lstStyle/>
-          <a:p>
-            <a:pPr algn="ctr">
-              <a:spcAft>
-                <a:spcPts val="1200"/>
-              </a:spcAft>
-              <a:defRPr sz="1600" b="1">
-                <a:solidFill>
-                  <a:srgbClr val="10B981"/>
-                </a:solidFill>
-              </a:defRPr>
-            </a:pPr>
-            <a:r>
-              <a:t>Project Accomplishments</a:t>
-            </a:r>
-          </a:p>
-          <a:p>
-            <a:pPr>
-              <a:spcAft>
-                <a:spcPts val="600"/>
-              </a:spcAft>
-              <a:defRPr sz="1200">
-                <a:solidFill>
-                  <a:srgbClr val="F8FAFC"/>
-                </a:solidFill>
-              </a:defRPr>
-            </a:pPr>
-            <a:r>
-              <a:t>• Delivered a fully integrated, zero-trust cloud management platform.</a:t>
-            </a:r>
-          </a:p>
-          <a:p>
-            <a:pPr>
-              <a:spcAft>
-                <a:spcPts val="600"/>
-              </a:spcAft>
-              <a:defRPr sz="1200">
-                <a:solidFill>
-                  <a:srgbClr val="F8FAFC"/>
-                </a:solidFill>
-              </a:defRPr>
-            </a:pPr>
-            <a:r>
-              <a:t>• Successfully unified telemetry, security audits, and green computing.</a:t>
-            </a:r>
-          </a:p>
-          <a:p>
-            <a:pPr>
-              <a:spcAft>
-                <a:spcPts val="600"/>
-              </a:spcAft>
-              <a:defRPr sz="1200">
-                <a:solidFill>
-                  <a:srgbClr val="F8FAFC"/>
-                </a:solidFill>
-              </a:defRPr>
-            </a:pPr>
-            <a:r>
-              <a:t>• Solved subtle real-world mathematical quantization bugs in telemetry rendering.</a:t>
-            </a:r>
-          </a:p>
-          <a:p>
-            <a:pPr>
-              <a:spcAft>
-                <a:spcPts val="600"/>
-              </a:spcAft>
-              <a:defRPr sz="1200">
-                <a:solidFill>
-                  <a:srgbClr val="F8FAFC"/>
-                </a:solidFill>
-              </a:defRPr>
-            </a:pPr>
-            <a:r>
-              <a:t>• Provided actionable 1-click remediation scripts for cloud security posture.</a:t>
-            </a:r>
-          </a:p>
-        </p:txBody>
-      </p:sp>
+      </p:pic>
       <p:sp>
         <p:nvSpPr>
           <p:cNvPr id="4" name="Rounded Rectangle 3"/>
@@ -4467,8 +4104,8 @@
         </p:nvSpPr>
         <p:spPr>
           <a:xfrm>
-            <a:off x="6309360" y="1645920"/>
-            <a:ext cx="5120640" cy="4572000"/>
+            <a:off x="7132320" y="1645920"/>
+            <a:ext cx="4297680" cy="4663440"/>
           </a:xfrm>
           <a:prstGeom prst="roundRect">
             <a:avLst/>
@@ -4497,81 +4134,96 @@
           </a:fontRef>
         </p:style>
         <p:txBody>
-          <a:bodyPr rtlCol="0" anchor="ctr" wrap="square" lIns="274320" tIns="228600" rIns="274320" bIns="228600"/>
+          <a:bodyPr rtlCol="0" anchor="ctr" wrap="square" lIns="256032" tIns="201168" rIns="256032" bIns="201168"/>
           <a:lstStyle/>
           <a:p>
             <a:pPr algn="ctr">
               <a:spcAft>
-                <a:spcPts val="1200"/>
-              </a:spcAft>
-              <a:defRPr sz="1600" b="1">
+                <a:spcPts val="1000"/>
+              </a:spcAft>
+              <a:defRPr sz="1500" b="1">
                 <a:solidFill>
                   <a:srgbClr val="2563EB"/>
                 </a:solidFill>
               </a:defRPr>
             </a:pPr>
             <a:r>
-              <a:t>Future Roadmap</a:t>
-            </a:r>
-          </a:p>
-          <a:p>
-            <a:pPr>
-              <a:spcAft>
-                <a:spcPts val="600"/>
-              </a:spcAft>
-              <a:defRPr sz="1200">
-                <a:solidFill>
-                  <a:srgbClr val="F8FAFC"/>
-                </a:solidFill>
-              </a:defRPr>
-            </a:pPr>
-            <a:r>
-              <a:t>• Autonomous Remediation Execution: Direct execution via AWS Lambda.</a:t>
-            </a:r>
-          </a:p>
-          <a:p>
-            <a:pPr>
-              <a:spcAft>
-                <a:spcPts val="600"/>
-              </a:spcAft>
-              <a:defRPr sz="1200">
-                <a:solidFill>
-                  <a:srgbClr val="F8FAFC"/>
-                </a:solidFill>
-              </a:defRPr>
-            </a:pPr>
-            <a:r>
-              <a:t>• Multi-Cloud Federation: Extending telemetry to GCP and Microsoft Azure.</a:t>
-            </a:r>
-          </a:p>
-          <a:p>
-            <a:pPr>
-              <a:spcAft>
-                <a:spcPts val="600"/>
-              </a:spcAft>
-              <a:defRPr sz="1200">
-                <a:solidFill>
-                  <a:srgbClr val="F8FAFC"/>
-                </a:solidFill>
-              </a:defRPr>
-            </a:pPr>
-            <a:r>
-              <a:t>• Predictive AI Workload Forecasting: ML-driven autoscaling before traffic spikes.</a:t>
-            </a:r>
-          </a:p>
-          <a:p>
-            <a:pPr>
-              <a:spcAft>
-                <a:spcPts val="600"/>
-              </a:spcAft>
-              <a:defRPr sz="1200">
-                <a:solidFill>
-                  <a:srgbClr val="F8FAFC"/>
-                </a:solidFill>
-              </a:defRPr>
-            </a:pPr>
-            <a:r>
-              <a:t>• Kubernetes (EKS) Pod Support: Container-level energy and security intelligence.</a:t>
+              <a:t>How it Works (My Implementation)</a:t>
+            </a:r>
+          </a:p>
+          <a:p>
+            <a:pPr>
+              <a:spcAft>
+                <a:spcPts val="500"/>
+              </a:spcAft>
+              <a:defRPr sz="1100">
+                <a:solidFill>
+                  <a:srgbClr val="F8FAFC"/>
+                </a:solidFill>
+              </a:defRPr>
+            </a:pPr>
+            <a:r>
+              <a:t>• Conversational Cloud AI: Interactive chat interface answering complex cloud architecture and security questions.</a:t>
+            </a:r>
+          </a:p>
+          <a:p>
+            <a:pPr>
+              <a:spcAft>
+                <a:spcPts val="500"/>
+              </a:spcAft>
+              <a:defRPr sz="1100">
+                <a:solidFill>
+                  <a:srgbClr val="F8FAFC"/>
+                </a:solidFill>
+              </a:defRPr>
+            </a:pPr>
+            <a:r>
+              <a:t>• Live Query Demo: Answered 'How can I improve cloud security?' with structured definitions and risk impact matrix.</a:t>
+            </a:r>
+          </a:p>
+          <a:p>
+            <a:pPr>
+              <a:spcAft>
+                <a:spcPts val="500"/>
+              </a:spcAft>
+              <a:defRPr sz="1100">
+                <a:solidFill>
+                  <a:srgbClr val="F8FAFC"/>
+                </a:solidFill>
+              </a:defRPr>
+            </a:pPr>
+            <a:r>
+              <a:t>• Connected Intelligence: Real-time connectivity to Cloud Metrics, Security Engine, Cost Engine, and Analytics Engine.</a:t>
+            </a:r>
+          </a:p>
+          <a:p>
+            <a:pPr>
+              <a:spcAft>
+                <a:spcPts val="500"/>
+              </a:spcAft>
+              <a:defRPr sz="1100">
+                <a:solidFill>
+                  <a:srgbClr val="F8FAFC"/>
+                </a:solidFill>
+              </a:defRPr>
+            </a:pPr>
+            <a:r>
+              <a:t>• Agent Capabilities: Cloud Knowledge, Infrastructure Analysis, Security Intelligence, and Energy Optimization.</a:t>
+            </a:r>
+          </a:p>
+          <a:p>
+            <a:pPr>
+              <a:spcAft>
+                <a:spcPts val="500"/>
+              </a:spcAft>
+              <a:defRPr sz="1100">
+                <a:solidFill>
+                  <a:srgbClr val="F8FAFC"/>
+                </a:solidFill>
+              </a:defRPr>
+            </a:pPr>
+            <a:r>
+              <a:t>• Operator Decision Support: Translates technical cloud telemetry into plain English business insights.</a:t>
             </a:r>
           </a:p>
         </p:txBody>
@@ -4610,8 +4262,8 @@
         </p:nvSpPr>
         <p:spPr>
           <a:xfrm>
-            <a:off x="914400" y="2011680"/>
-            <a:ext cx="10332720" cy="3200400"/>
+            <a:off x="731520" y="365760"/>
+            <a:ext cx="10698480" cy="1097280"/>
           </a:xfrm>
           <a:prstGeom prst="rect">
             <a:avLst/>
@@ -4619,20 +4271,1184 @@
           <a:noFill/>
         </p:spPr>
         <p:txBody>
+          <a:bodyPr wrap="square" lIns="0" tIns="0" rIns="0" bIns="0">
+            <a:spAutoFit/>
+          </a:bodyPr>
+          <a:lstStyle/>
+          <a:p>
+            <a:pPr>
+              <a:defRPr sz="1100" b="1">
+                <a:solidFill>
+                  <a:srgbClr val="10B981"/>
+                </a:solidFill>
+              </a:defRPr>
+            </a:pPr>
+            <a:r>
+              <a:t>QUALITY ASSURANCE</a:t>
+            </a:r>
+          </a:p>
+          <a:p>
+            <a:pPr>
+              <a:spcBef>
+                <a:spcPts val="300"/>
+              </a:spcBef>
+              <a:defRPr sz="2200" b="1">
+                <a:solidFill>
+                  <a:srgbClr val="F8FAFC"/>
+                </a:solidFill>
+              </a:defRPr>
+            </a:pPr>
+            <a:r>
+              <a:t>Testing, Verification &amp; Production Build</a:t>
+            </a:r>
+          </a:p>
+        </p:txBody>
+      </p:sp>
+      <p:sp>
+        <p:nvSpPr>
+          <p:cNvPr id="3" name="Rounded Rectangle 2"/>
+          <p:cNvSpPr/>
+          <p:nvPr/>
+        </p:nvSpPr>
+        <p:spPr>
+          <a:xfrm>
+            <a:off x="731520" y="1645920"/>
+            <a:ext cx="3383280" cy="4663440"/>
+          </a:xfrm>
+          <a:prstGeom prst="roundRect">
+            <a:avLst/>
+          </a:prstGeom>
+          <a:solidFill>
+            <a:srgbClr val="131D35"/>
+          </a:solidFill>
+          <a:ln w="19050">
+            <a:solidFill>
+              <a:srgbClr val="2563EB"/>
+            </a:solidFill>
+          </a:ln>
+        </p:spPr>
+        <p:style>
+          <a:lnRef idx="1">
+            <a:schemeClr val="accent1"/>
+          </a:lnRef>
+          <a:fillRef idx="3">
+            <a:schemeClr val="accent1"/>
+          </a:fillRef>
+          <a:effectRef idx="2">
+            <a:schemeClr val="accent1"/>
+          </a:effectRef>
+          <a:fontRef idx="minor">
+            <a:schemeClr val="lt1"/>
+          </a:fontRef>
+        </p:style>
+        <p:txBody>
+          <a:bodyPr rtlCol="0" anchor="ctr" wrap="square" lIns="256032" tIns="201168" rIns="256032" bIns="201168"/>
+          <a:lstStyle/>
+          <a:p>
+            <a:pPr algn="ctr">
+              <a:spcAft>
+                <a:spcPts val="1000"/>
+              </a:spcAft>
+              <a:defRPr sz="1500" b="1">
+                <a:solidFill>
+                  <a:srgbClr val="2563EB"/>
+                </a:solidFill>
+              </a:defRPr>
+            </a:pPr>
+            <a:r>
+              <a:t>Backend Verification</a:t>
+            </a:r>
+          </a:p>
+          <a:p>
+            <a:pPr>
+              <a:spcAft>
+                <a:spcPts val="500"/>
+              </a:spcAft>
+              <a:defRPr sz="1100">
+                <a:solidFill>
+                  <a:srgbClr val="F8FAFC"/>
+                </a:solidFill>
+              </a:defRPr>
+            </a:pPr>
+            <a:r>
+              <a:t>• FastAPI TestClient suite passed.</a:t>
+            </a:r>
+          </a:p>
+          <a:p>
+            <a:pPr>
+              <a:spcAft>
+                <a:spcPts val="500"/>
+              </a:spcAft>
+              <a:defRPr sz="1100">
+                <a:solidFill>
+                  <a:srgbClr val="F8FAFC"/>
+                </a:solidFill>
+              </a:defRPr>
+            </a:pPr>
+            <a:r>
+              <a:t>• python -m py_compile 0 syntax errors.</a:t>
+            </a:r>
+          </a:p>
+          <a:p>
+            <a:pPr>
+              <a:spcAft>
+                <a:spcPts val="500"/>
+              </a:spcAft>
+              <a:defRPr sz="1100">
+                <a:solidFill>
+                  <a:srgbClr val="F8FAFC"/>
+                </a:solidFill>
+              </a:defRPr>
+            </a:pPr>
+            <a:r>
+              <a:t>• Live AWS STS credential validation tested.</a:t>
+            </a:r>
+          </a:p>
+          <a:p>
+            <a:pPr>
+              <a:spcAft>
+                <a:spcPts val="500"/>
+              </a:spcAft>
+              <a:defRPr sz="1100">
+                <a:solidFill>
+                  <a:srgbClr val="F8FAFC"/>
+                </a:solidFill>
+              </a:defRPr>
+            </a:pPr>
+            <a:r>
+              <a:t>• Boto3 error shielding (expired token / invalid key).</a:t>
+            </a:r>
+          </a:p>
+          <a:p>
+            <a:pPr>
+              <a:spcAft>
+                <a:spcPts val="500"/>
+              </a:spcAft>
+              <a:defRPr sz="1100">
+                <a:solidFill>
+                  <a:srgbClr val="F8FAFC"/>
+                </a:solidFill>
+              </a:defRPr>
+            </a:pPr>
+            <a:r>
+              <a:t>• Sub-50ms API endpoint responses.</a:t>
+            </a:r>
+          </a:p>
+        </p:txBody>
+      </p:sp>
+      <p:sp>
+        <p:nvSpPr>
+          <p:cNvPr id="4" name="Rounded Rectangle 3"/>
+          <p:cNvSpPr/>
+          <p:nvPr/>
+        </p:nvSpPr>
+        <p:spPr>
+          <a:xfrm>
+            <a:off x="4389120" y="1645920"/>
+            <a:ext cx="3383280" cy="4663440"/>
+          </a:xfrm>
+          <a:prstGeom prst="roundRect">
+            <a:avLst/>
+          </a:prstGeom>
+          <a:solidFill>
+            <a:srgbClr val="131D35"/>
+          </a:solidFill>
+          <a:ln w="19050">
+            <a:solidFill>
+              <a:srgbClr val="F59E0B"/>
+            </a:solidFill>
+          </a:ln>
+        </p:spPr>
+        <p:style>
+          <a:lnRef idx="1">
+            <a:schemeClr val="accent1"/>
+          </a:lnRef>
+          <a:fillRef idx="3">
+            <a:schemeClr val="accent1"/>
+          </a:fillRef>
+          <a:effectRef idx="2">
+            <a:schemeClr val="accent1"/>
+          </a:effectRef>
+          <a:fontRef idx="minor">
+            <a:schemeClr val="lt1"/>
+          </a:fontRef>
+        </p:style>
+        <p:txBody>
+          <a:bodyPr rtlCol="0" anchor="ctr" wrap="square" lIns="256032" tIns="201168" rIns="256032" bIns="201168"/>
+          <a:lstStyle/>
+          <a:p>
+            <a:pPr algn="ctr">
+              <a:spcAft>
+                <a:spcPts val="1000"/>
+              </a:spcAft>
+              <a:defRPr sz="1500" b="1">
+                <a:solidFill>
+                  <a:srgbClr val="F59E0B"/>
+                </a:solidFill>
+              </a:defRPr>
+            </a:pPr>
+            <a:r>
+              <a:t>Frontend Build</a:t>
+            </a:r>
+          </a:p>
+          <a:p>
+            <a:pPr>
+              <a:spcAft>
+                <a:spcPts val="500"/>
+              </a:spcAft>
+              <a:defRPr sz="1100">
+                <a:solidFill>
+                  <a:srgbClr val="F8FAFC"/>
+                </a:solidFill>
+              </a:defRPr>
+            </a:pPr>
+            <a:r>
+              <a:t>• Vite production build passed in 801ms.</a:t>
+            </a:r>
+          </a:p>
+          <a:p>
+            <a:pPr>
+              <a:spcAft>
+                <a:spcPts val="500"/>
+              </a:spcAft>
+              <a:defRPr sz="1100">
+                <a:solidFill>
+                  <a:srgbClr val="F8FAFC"/>
+                </a:solidFill>
+              </a:defRPr>
+            </a:pPr>
+            <a:r>
+              <a:t>• Zero ESLint or React hydration errors.</a:t>
+            </a:r>
+          </a:p>
+          <a:p>
+            <a:pPr>
+              <a:spcAft>
+                <a:spcPts val="500"/>
+              </a:spcAft>
+              <a:defRPr sz="1100">
+                <a:solidFill>
+                  <a:srgbClr val="F8FAFC"/>
+                </a:solidFill>
+              </a:defRPr>
+            </a:pPr>
+            <a:r>
+              <a:t>• Responsive design tested across resolutions.</a:t>
+            </a:r>
+          </a:p>
+          <a:p>
+            <a:pPr>
+              <a:spcAft>
+                <a:spcPts val="500"/>
+              </a:spcAft>
+              <a:defRPr sz="1100">
+                <a:solidFill>
+                  <a:srgbClr val="F8FAFC"/>
+                </a:solidFill>
+              </a:defRPr>
+            </a:pPr>
+            <a:r>
+              <a:t>• Glassmorphic CSS with zero layout shifts.</a:t>
+            </a:r>
+          </a:p>
+          <a:p>
+            <a:pPr>
+              <a:spcAft>
+                <a:spcPts val="500"/>
+              </a:spcAft>
+              <a:defRPr sz="1100">
+                <a:solidFill>
+                  <a:srgbClr val="F8FAFC"/>
+                </a:solidFill>
+              </a:defRPr>
+            </a:pPr>
+            <a:r>
+              <a:t>• Clean client-side state management.</a:t>
+            </a:r>
+          </a:p>
+        </p:txBody>
+      </p:sp>
+      <p:sp>
+        <p:nvSpPr>
+          <p:cNvPr id="5" name="Rounded Rectangle 4"/>
+          <p:cNvSpPr/>
+          <p:nvPr/>
+        </p:nvSpPr>
+        <p:spPr>
+          <a:xfrm>
+            <a:off x="8046720" y="1645920"/>
+            <a:ext cx="3383280" cy="4663440"/>
+          </a:xfrm>
+          <a:prstGeom prst="roundRect">
+            <a:avLst/>
+          </a:prstGeom>
+          <a:solidFill>
+            <a:srgbClr val="131D35"/>
+          </a:solidFill>
+          <a:ln w="19050">
+            <a:solidFill>
+              <a:srgbClr val="10B981"/>
+            </a:solidFill>
+          </a:ln>
+        </p:spPr>
+        <p:style>
+          <a:lnRef idx="1">
+            <a:schemeClr val="accent1"/>
+          </a:lnRef>
+          <a:fillRef idx="3">
+            <a:schemeClr val="accent1"/>
+          </a:fillRef>
+          <a:effectRef idx="2">
+            <a:schemeClr val="accent1"/>
+          </a:effectRef>
+          <a:fontRef idx="minor">
+            <a:schemeClr val="lt1"/>
+          </a:fontRef>
+        </p:style>
+        <p:txBody>
+          <a:bodyPr rtlCol="0" anchor="ctr" wrap="square" lIns="256032" tIns="201168" rIns="256032" bIns="201168"/>
+          <a:lstStyle/>
+          <a:p>
+            <a:pPr algn="ctr">
+              <a:spcAft>
+                <a:spcPts val="1000"/>
+              </a:spcAft>
+              <a:defRPr sz="1500" b="1">
+                <a:solidFill>
+                  <a:srgbClr val="10B981"/>
+                </a:solidFill>
+              </a:defRPr>
+            </a:pPr>
+            <a:r>
+              <a:t>Version Control &amp; Deploy</a:t>
+            </a:r>
+          </a:p>
+          <a:p>
+            <a:pPr>
+              <a:spcAft>
+                <a:spcPts val="500"/>
+              </a:spcAft>
+              <a:defRPr sz="1100">
+                <a:solidFill>
+                  <a:srgbClr val="F8FAFC"/>
+                </a:solidFill>
+              </a:defRPr>
+            </a:pPr>
+            <a:r>
+              <a:t>• GitHub Repo: SMOS555/Cloudmind.</a:t>
+            </a:r>
+          </a:p>
+          <a:p>
+            <a:pPr>
+              <a:spcAft>
+                <a:spcPts val="500"/>
+              </a:spcAft>
+              <a:defRPr sz="1100">
+                <a:solidFill>
+                  <a:srgbClr val="F8FAFC"/>
+                </a:solidFill>
+              </a:defRPr>
+            </a:pPr>
+            <a:r>
+              <a:t>• Branch: main (Clean sync).</a:t>
+            </a:r>
+          </a:p>
+          <a:p>
+            <a:pPr>
+              <a:spcAft>
+                <a:spcPts val="500"/>
+              </a:spcAft>
+              <a:defRPr sz="1100">
+                <a:solidFill>
+                  <a:srgbClr val="F8FAFC"/>
+                </a:solidFill>
+              </a:defRPr>
+            </a:pPr>
+            <a:r>
+              <a:t>• Docker Compose configuration verified.</a:t>
+            </a:r>
+          </a:p>
+          <a:p>
+            <a:pPr>
+              <a:spcAft>
+                <a:spcPts val="500"/>
+              </a:spcAft>
+              <a:defRPr sz="1100">
+                <a:solidFill>
+                  <a:srgbClr val="F8FAFC"/>
+                </a:solidFill>
+              </a:defRPr>
+            </a:pPr>
+            <a:r>
+              <a:t>• Production artifacts generated.</a:t>
+            </a:r>
+          </a:p>
+          <a:p>
+            <a:pPr>
+              <a:spcAft>
+                <a:spcPts val="500"/>
+              </a:spcAft>
+              <a:defRPr sz="1100">
+                <a:solidFill>
+                  <a:srgbClr val="F8FAFC"/>
+                </a:solidFill>
+              </a:defRPr>
+            </a:pPr>
+            <a:r>
+              <a:t>• Ready for live cloud deployment.</a:t>
+            </a:r>
+          </a:p>
+        </p:txBody>
+      </p:sp>
+    </p:spTree>
+  </p:cSld>
+  <p:clrMapOvr>
+    <a:masterClrMapping/>
+  </p:clrMapOvr>
+</p:sld>
+</file>
+
+<file path=ppt/slides/slide15.xml><?xml version="1.0" encoding="utf-8"?>
+<p:sld xmlns:a="http://schemas.openxmlformats.org/drawingml/2006/main" xmlns:p="http://schemas.openxmlformats.org/presentationml/2006/main" xmlns:r="http://schemas.openxmlformats.org/officeDocument/2006/relationships">
+  <p:cSld>
+    <p:bg>
+      <p:bgPr>
+        <a:solidFill>
+          <a:srgbClr val="0A0F1D"/>
+        </a:solidFill>
+        <a:effectLst/>
+      </p:bgPr>
+    </p:bg>
+    <p:spTree>
+      <p:nvGrpSpPr>
+        <p:cNvPr id="1" name=""/>
+        <p:cNvGrpSpPr/>
+        <p:nvPr/>
+      </p:nvGrpSpPr>
+      <p:grpSpPr/>
+      <p:sp>
+        <p:nvSpPr>
+          <p:cNvPr id="2" name="TextBox 1"/>
+          <p:cNvSpPr txBox="1"/>
+          <p:nvPr/>
+        </p:nvSpPr>
+        <p:spPr>
+          <a:xfrm>
+            <a:off x="731520" y="365760"/>
+            <a:ext cx="10698480" cy="1097280"/>
+          </a:xfrm>
+          <a:prstGeom prst="rect">
+            <a:avLst/>
+          </a:prstGeom>
+          <a:noFill/>
+        </p:spPr>
+        <p:txBody>
+          <a:bodyPr wrap="square" lIns="0" tIns="0" rIns="0" bIns="0">
+            <a:spAutoFit/>
+          </a:bodyPr>
+          <a:lstStyle/>
+          <a:p>
+            <a:pPr>
+              <a:defRPr sz="1100" b="1">
+                <a:solidFill>
+                  <a:srgbClr val="10B981"/>
+                </a:solidFill>
+              </a:defRPr>
+            </a:pPr>
+            <a:r>
+              <a:t>EVALUATION &amp; IMPACT</a:t>
+            </a:r>
+          </a:p>
+          <a:p>
+            <a:pPr>
+              <a:spcBef>
+                <a:spcPts val="300"/>
+              </a:spcBef>
+              <a:defRPr sz="2200" b="1">
+                <a:solidFill>
+                  <a:srgbClr val="F8FAFC"/>
+                </a:solidFill>
+              </a:defRPr>
+            </a:pPr>
+            <a:r>
+              <a:t>Results, Business Value &amp; Security Impact</a:t>
+            </a:r>
+          </a:p>
+        </p:txBody>
+      </p:sp>
+      <p:sp>
+        <p:nvSpPr>
+          <p:cNvPr id="3" name="Rounded Rectangle 2"/>
+          <p:cNvSpPr/>
+          <p:nvPr/>
+        </p:nvSpPr>
+        <p:spPr>
+          <a:xfrm>
+            <a:off x="731520" y="1645920"/>
+            <a:ext cx="5120640" cy="4663440"/>
+          </a:xfrm>
+          <a:prstGeom prst="roundRect">
+            <a:avLst/>
+          </a:prstGeom>
+          <a:solidFill>
+            <a:srgbClr val="131D35"/>
+          </a:solidFill>
+          <a:ln w="19050">
+            <a:solidFill>
+              <a:srgbClr val="10B981"/>
+            </a:solidFill>
+          </a:ln>
+        </p:spPr>
+        <p:style>
+          <a:lnRef idx="1">
+            <a:schemeClr val="accent1"/>
+          </a:lnRef>
+          <a:fillRef idx="3">
+            <a:schemeClr val="accent1"/>
+          </a:fillRef>
+          <a:effectRef idx="2">
+            <a:schemeClr val="accent1"/>
+          </a:effectRef>
+          <a:fontRef idx="minor">
+            <a:schemeClr val="lt1"/>
+          </a:fontRef>
+        </p:style>
+        <p:txBody>
+          <a:bodyPr rtlCol="0" anchor="ctr" wrap="square" lIns="256032" tIns="201168" rIns="256032" bIns="201168"/>
+          <a:lstStyle/>
+          <a:p>
+            <a:pPr algn="ctr">
+              <a:spcAft>
+                <a:spcPts val="1000"/>
+              </a:spcAft>
+              <a:defRPr sz="1500" b="1">
+                <a:solidFill>
+                  <a:srgbClr val="10B981"/>
+                </a:solidFill>
+              </a:defRPr>
+            </a:pPr>
+            <a:r>
+              <a:t>Measurable Operational Outcomes</a:t>
+            </a:r>
+          </a:p>
+          <a:p>
+            <a:pPr>
+              <a:spcAft>
+                <a:spcPts val="500"/>
+              </a:spcAft>
+              <a:defRPr sz="1100">
+                <a:solidFill>
+                  <a:srgbClr val="F8FAFC"/>
+                </a:solidFill>
+              </a:defRPr>
+            </a:pPr>
+            <a:r>
+              <a:t>• Single Pane of Glass: Eliminated tool sprawl by unifying telemetry, security, and sustainability.</a:t>
+            </a:r>
+          </a:p>
+          <a:p>
+            <a:pPr>
+              <a:spcAft>
+                <a:spcPts val="500"/>
+              </a:spcAft>
+              <a:defRPr sz="1100">
+                <a:solidFill>
+                  <a:srgbClr val="F8FAFC"/>
+                </a:solidFill>
+              </a:defRPr>
+            </a:pPr>
+            <a:r>
+              <a:t>• Instant Remediation: Generated AWS CLI remediation commands in &lt; 2 seconds.</a:t>
+            </a:r>
+          </a:p>
+          <a:p>
+            <a:pPr>
+              <a:spcAft>
+                <a:spcPts val="500"/>
+              </a:spcAft>
+              <a:defRPr sz="1100">
+                <a:solidFill>
+                  <a:srgbClr val="F8FAFC"/>
+                </a:solidFill>
+              </a:defRPr>
+            </a:pPr>
+            <a:r>
+              <a:t>• Zero-Trust Authentication: Centralized STS authentication applied automatically across all 6 modules.</a:t>
+            </a:r>
+          </a:p>
+          <a:p>
+            <a:pPr>
+              <a:spcAft>
+                <a:spcPts val="500"/>
+              </a:spcAft>
+              <a:defRPr sz="1100">
+                <a:solidFill>
+                  <a:srgbClr val="F8FAFC"/>
+                </a:solidFill>
+              </a:defRPr>
+            </a:pPr>
+            <a:r>
+              <a:t>• Accurate Telemetry: Replaced broken step functions with continuous SPECpower server curves.</a:t>
+            </a:r>
+          </a:p>
+        </p:txBody>
+      </p:sp>
+      <p:sp>
+        <p:nvSpPr>
+          <p:cNvPr id="4" name="Rounded Rectangle 3"/>
+          <p:cNvSpPr/>
+          <p:nvPr/>
+        </p:nvSpPr>
+        <p:spPr>
+          <a:xfrm>
+            <a:off x="6309360" y="1645920"/>
+            <a:ext cx="5120640" cy="4663440"/>
+          </a:xfrm>
+          <a:prstGeom prst="roundRect">
+            <a:avLst/>
+          </a:prstGeom>
+          <a:solidFill>
+            <a:srgbClr val="131D35"/>
+          </a:solidFill>
+          <a:ln w="19050">
+            <a:solidFill>
+              <a:srgbClr val="2563EB"/>
+            </a:solidFill>
+          </a:ln>
+        </p:spPr>
+        <p:style>
+          <a:lnRef idx="1">
+            <a:schemeClr val="accent1"/>
+          </a:lnRef>
+          <a:fillRef idx="3">
+            <a:schemeClr val="accent1"/>
+          </a:fillRef>
+          <a:effectRef idx="2">
+            <a:schemeClr val="accent1"/>
+          </a:effectRef>
+          <a:fontRef idx="minor">
+            <a:schemeClr val="lt1"/>
+          </a:fontRef>
+        </p:style>
+        <p:txBody>
+          <a:bodyPr rtlCol="0" anchor="ctr" wrap="square" lIns="256032" tIns="201168" rIns="256032" bIns="201168"/>
+          <a:lstStyle/>
+          <a:p>
+            <a:pPr algn="ctr">
+              <a:spcAft>
+                <a:spcPts val="1000"/>
+              </a:spcAft>
+              <a:defRPr sz="1500" b="1">
+                <a:solidFill>
+                  <a:srgbClr val="2563EB"/>
+                </a:solidFill>
+              </a:defRPr>
+            </a:pPr>
+            <a:r>
+              <a:t>Security &amp; Sustainability Impact</a:t>
+            </a:r>
+          </a:p>
+          <a:p>
+            <a:pPr>
+              <a:spcAft>
+                <a:spcPts val="500"/>
+              </a:spcAft>
+              <a:defRPr sz="1100">
+                <a:solidFill>
+                  <a:srgbClr val="F8FAFC"/>
+                </a:solidFill>
+              </a:defRPr>
+            </a:pPr>
+            <a:r>
+              <a:t>• 100% Risk Discovery: Successfully caught open SSH port 22 and unencrypted EBS volumes.</a:t>
+            </a:r>
+          </a:p>
+          <a:p>
+            <a:pPr>
+              <a:spcAft>
+                <a:spcPts val="500"/>
+              </a:spcAft>
+              <a:defRPr sz="1100">
+                <a:solidFill>
+                  <a:srgbClr val="F8FAFC"/>
+                </a:solidFill>
+              </a:defRPr>
+            </a:pPr>
+            <a:r>
+              <a:t>• Carbon Transparency: Provided actionable kWh and kg CO2e metrics for real EC2 compute.</a:t>
+            </a:r>
+          </a:p>
+          <a:p>
+            <a:pPr>
+              <a:spcAft>
+                <a:spcPts val="500"/>
+              </a:spcAft>
+              <a:defRPr sz="1100">
+                <a:solidFill>
+                  <a:srgbClr val="F8FAFC"/>
+                </a:solidFill>
+              </a:defRPr>
+            </a:pPr>
+            <a:r>
+              <a:t>• Rightsizing Intelligence: Detected over-provisioned idle instances with right-sizing advice.</a:t>
+            </a:r>
+          </a:p>
+          <a:p>
+            <a:pPr>
+              <a:spcAft>
+                <a:spcPts val="500"/>
+              </a:spcAft>
+              <a:defRPr sz="1100">
+                <a:solidFill>
+                  <a:srgbClr val="F8FAFC"/>
+                </a:solidFill>
+              </a:defRPr>
+            </a:pPr>
+            <a:r>
+              <a:t>• Production Ready: Modular architecture built for scale across enterprise AWS environments.</a:t>
+            </a:r>
+          </a:p>
+        </p:txBody>
+      </p:sp>
+    </p:spTree>
+  </p:cSld>
+  <p:clrMapOvr>
+    <a:masterClrMapping/>
+  </p:clrMapOvr>
+</p:sld>
+</file>
+
+<file path=ppt/slides/slide16.xml><?xml version="1.0" encoding="utf-8"?>
+<p:sld xmlns:a="http://schemas.openxmlformats.org/drawingml/2006/main" xmlns:p="http://schemas.openxmlformats.org/presentationml/2006/main" xmlns:r="http://schemas.openxmlformats.org/officeDocument/2006/relationships">
+  <p:cSld>
+    <p:bg>
+      <p:bgPr>
+        <a:solidFill>
+          <a:srgbClr val="0A0F1D"/>
+        </a:solidFill>
+        <a:effectLst/>
+      </p:bgPr>
+    </p:bg>
+    <p:spTree>
+      <p:nvGrpSpPr>
+        <p:cNvPr id="1" name=""/>
+        <p:cNvGrpSpPr/>
+        <p:nvPr/>
+      </p:nvGrpSpPr>
+      <p:grpSpPr/>
+      <p:sp>
+        <p:nvSpPr>
+          <p:cNvPr id="2" name="TextBox 1"/>
+          <p:cNvSpPr txBox="1"/>
+          <p:nvPr/>
+        </p:nvSpPr>
+        <p:spPr>
+          <a:xfrm>
+            <a:off x="731520" y="365760"/>
+            <a:ext cx="10698480" cy="1097280"/>
+          </a:xfrm>
+          <a:prstGeom prst="rect">
+            <a:avLst/>
+          </a:prstGeom>
+          <a:noFill/>
+        </p:spPr>
+        <p:txBody>
+          <a:bodyPr wrap="square" lIns="0" tIns="0" rIns="0" bIns="0">
+            <a:spAutoFit/>
+          </a:bodyPr>
+          <a:lstStyle/>
+          <a:p>
+            <a:pPr>
+              <a:defRPr sz="1100" b="1">
+                <a:solidFill>
+                  <a:srgbClr val="10B981"/>
+                </a:solidFill>
+              </a:defRPr>
+            </a:pPr>
+            <a:r>
+              <a:t>FUTURE ENHANCEMENTS</a:t>
+            </a:r>
+          </a:p>
+          <a:p>
+            <a:pPr>
+              <a:spcBef>
+                <a:spcPts val="300"/>
+              </a:spcBef>
+              <a:defRPr sz="2200" b="1">
+                <a:solidFill>
+                  <a:srgbClr val="F8FAFC"/>
+                </a:solidFill>
+              </a:defRPr>
+            </a:pPr>
+            <a:r>
+              <a:t>Roadmap &amp; Technology Expansion</a:t>
+            </a:r>
+          </a:p>
+        </p:txBody>
+      </p:sp>
+      <p:sp>
+        <p:nvSpPr>
+          <p:cNvPr id="3" name="Rounded Rectangle 2"/>
+          <p:cNvSpPr/>
+          <p:nvPr/>
+        </p:nvSpPr>
+        <p:spPr>
+          <a:xfrm>
+            <a:off x="731520" y="1645920"/>
+            <a:ext cx="3383280" cy="4663440"/>
+          </a:xfrm>
+          <a:prstGeom prst="roundRect">
+            <a:avLst/>
+          </a:prstGeom>
+          <a:solidFill>
+            <a:srgbClr val="131D35"/>
+          </a:solidFill>
+          <a:ln w="19050">
+            <a:solidFill>
+              <a:srgbClr val="2563EB"/>
+            </a:solidFill>
+          </a:ln>
+        </p:spPr>
+        <p:style>
+          <a:lnRef idx="1">
+            <a:schemeClr val="accent1"/>
+          </a:lnRef>
+          <a:fillRef idx="3">
+            <a:schemeClr val="accent1"/>
+          </a:fillRef>
+          <a:effectRef idx="2">
+            <a:schemeClr val="accent1"/>
+          </a:effectRef>
+          <a:fontRef idx="minor">
+            <a:schemeClr val="lt1"/>
+          </a:fontRef>
+        </p:style>
+        <p:txBody>
+          <a:bodyPr rtlCol="0" anchor="ctr" wrap="square" lIns="256032" tIns="201168" rIns="256032" bIns="201168"/>
+          <a:lstStyle/>
+          <a:p>
+            <a:pPr algn="ctr">
+              <a:spcAft>
+                <a:spcPts val="1000"/>
+              </a:spcAft>
+              <a:defRPr sz="1500" b="1">
+                <a:solidFill>
+                  <a:srgbClr val="2563EB"/>
+                </a:solidFill>
+              </a:defRPr>
+            </a:pPr>
+            <a:r>
+              <a:t>Autonomous Remediation</a:t>
+            </a:r>
+          </a:p>
+          <a:p>
+            <a:pPr>
+              <a:spcAft>
+                <a:spcPts val="500"/>
+              </a:spcAft>
+              <a:defRPr sz="1100">
+                <a:solidFill>
+                  <a:srgbClr val="F8FAFC"/>
+                </a:solidFill>
+              </a:defRPr>
+            </a:pPr>
+            <a:r>
+              <a:t>• Execute security remediations directly from the UI via AWS Lambda.</a:t>
+            </a:r>
+          </a:p>
+          <a:p>
+            <a:pPr>
+              <a:spcAft>
+                <a:spcPts val="500"/>
+              </a:spcAft>
+              <a:defRPr sz="1100">
+                <a:solidFill>
+                  <a:srgbClr val="F8FAFC"/>
+                </a:solidFill>
+              </a:defRPr>
+            </a:pPr>
+            <a:r>
+              <a:t>• Automated security group rule revocation with audit logging.</a:t>
+            </a:r>
+          </a:p>
+          <a:p>
+            <a:pPr>
+              <a:spcAft>
+                <a:spcPts val="500"/>
+              </a:spcAft>
+              <a:defRPr sz="1100">
+                <a:solidFill>
+                  <a:srgbClr val="F8FAFC"/>
+                </a:solidFill>
+              </a:defRPr>
+            </a:pPr>
+            <a:r>
+              <a:t>• Automated EBS encryption snapshot migration.</a:t>
+            </a:r>
+          </a:p>
+        </p:txBody>
+      </p:sp>
+      <p:sp>
+        <p:nvSpPr>
+          <p:cNvPr id="4" name="Rounded Rectangle 3"/>
+          <p:cNvSpPr/>
+          <p:nvPr/>
+        </p:nvSpPr>
+        <p:spPr>
+          <a:xfrm>
+            <a:off x="4389120" y="1645920"/>
+            <a:ext cx="3383280" cy="4663440"/>
+          </a:xfrm>
+          <a:prstGeom prst="roundRect">
+            <a:avLst/>
+          </a:prstGeom>
+          <a:solidFill>
+            <a:srgbClr val="131D35"/>
+          </a:solidFill>
+          <a:ln w="19050">
+            <a:solidFill>
+              <a:srgbClr val="F59E0B"/>
+            </a:solidFill>
+          </a:ln>
+        </p:spPr>
+        <p:style>
+          <a:lnRef idx="1">
+            <a:schemeClr val="accent1"/>
+          </a:lnRef>
+          <a:fillRef idx="3">
+            <a:schemeClr val="accent1"/>
+          </a:fillRef>
+          <a:effectRef idx="2">
+            <a:schemeClr val="accent1"/>
+          </a:effectRef>
+          <a:fontRef idx="minor">
+            <a:schemeClr val="lt1"/>
+          </a:fontRef>
+        </p:style>
+        <p:txBody>
+          <a:bodyPr rtlCol="0" anchor="ctr" wrap="square" lIns="256032" tIns="201168" rIns="256032" bIns="201168"/>
+          <a:lstStyle/>
+          <a:p>
+            <a:pPr algn="ctr">
+              <a:spcAft>
+                <a:spcPts val="1000"/>
+              </a:spcAft>
+              <a:defRPr sz="1500" b="1">
+                <a:solidFill>
+                  <a:srgbClr val="F59E0B"/>
+                </a:solidFill>
+              </a:defRPr>
+            </a:pPr>
+            <a:r>
+              <a:t>Multi-Cloud Federation</a:t>
+            </a:r>
+          </a:p>
+          <a:p>
+            <a:pPr>
+              <a:spcAft>
+                <a:spcPts val="500"/>
+              </a:spcAft>
+              <a:defRPr sz="1100">
+                <a:solidFill>
+                  <a:srgbClr val="F8FAFC"/>
+                </a:solidFill>
+              </a:defRPr>
+            </a:pPr>
+            <a:r>
+              <a:t>• Expand telemetry ingestion to Google Cloud Platform (GCP).</a:t>
+            </a:r>
+          </a:p>
+          <a:p>
+            <a:pPr>
+              <a:spcAft>
+                <a:spcPts val="500"/>
+              </a:spcAft>
+              <a:defRPr sz="1100">
+                <a:solidFill>
+                  <a:srgbClr val="F8FAFC"/>
+                </a:solidFill>
+              </a:defRPr>
+            </a:pPr>
+            <a:r>
+              <a:t>• Integrate Microsoft Azure Virtual Machines.</a:t>
+            </a:r>
+          </a:p>
+          <a:p>
+            <a:pPr>
+              <a:spcAft>
+                <a:spcPts val="500"/>
+              </a:spcAft>
+              <a:defRPr sz="1100">
+                <a:solidFill>
+                  <a:srgbClr val="F8FAFC"/>
+                </a:solidFill>
+              </a:defRPr>
+            </a:pPr>
+            <a:r>
+              <a:t>• Unified multi-cloud carbon intensity comparison.</a:t>
+            </a:r>
+          </a:p>
+        </p:txBody>
+      </p:sp>
+      <p:sp>
+        <p:nvSpPr>
+          <p:cNvPr id="5" name="Rounded Rectangle 4"/>
+          <p:cNvSpPr/>
+          <p:nvPr/>
+        </p:nvSpPr>
+        <p:spPr>
+          <a:xfrm>
+            <a:off x="8046720" y="1645920"/>
+            <a:ext cx="3383280" cy="4663440"/>
+          </a:xfrm>
+          <a:prstGeom prst="roundRect">
+            <a:avLst/>
+          </a:prstGeom>
+          <a:solidFill>
+            <a:srgbClr val="131D35"/>
+          </a:solidFill>
+          <a:ln w="19050">
+            <a:solidFill>
+              <a:srgbClr val="10B981"/>
+            </a:solidFill>
+          </a:ln>
+        </p:spPr>
+        <p:style>
+          <a:lnRef idx="1">
+            <a:schemeClr val="accent1"/>
+          </a:lnRef>
+          <a:fillRef idx="3">
+            <a:schemeClr val="accent1"/>
+          </a:fillRef>
+          <a:effectRef idx="2">
+            <a:schemeClr val="accent1"/>
+          </a:effectRef>
+          <a:fontRef idx="minor">
+            <a:schemeClr val="lt1"/>
+          </a:fontRef>
+        </p:style>
+        <p:txBody>
+          <a:bodyPr rtlCol="0" anchor="ctr" wrap="square" lIns="256032" tIns="201168" rIns="256032" bIns="201168"/>
+          <a:lstStyle/>
+          <a:p>
+            <a:pPr algn="ctr">
+              <a:spcAft>
+                <a:spcPts val="1000"/>
+              </a:spcAft>
+              <a:defRPr sz="1500" b="1">
+                <a:solidFill>
+                  <a:srgbClr val="10B981"/>
+                </a:solidFill>
+              </a:defRPr>
+            </a:pPr>
+            <a:r>
+              <a:t>Predictive AI Workload</a:t>
+            </a:r>
+          </a:p>
+          <a:p>
+            <a:pPr>
+              <a:spcAft>
+                <a:spcPts val="500"/>
+              </a:spcAft>
+              <a:defRPr sz="1100">
+                <a:solidFill>
+                  <a:srgbClr val="F8FAFC"/>
+                </a:solidFill>
+              </a:defRPr>
+            </a:pPr>
+            <a:r>
+              <a:t>• Train LSTM / Transformer models on CPU history.</a:t>
+            </a:r>
+          </a:p>
+          <a:p>
+            <a:pPr>
+              <a:spcAft>
+                <a:spcPts val="500"/>
+              </a:spcAft>
+              <a:defRPr sz="1100">
+                <a:solidFill>
+                  <a:srgbClr val="F8FAFC"/>
+                </a:solidFill>
+              </a:defRPr>
+            </a:pPr>
+            <a:r>
+              <a:t>• Proactive auto-scaling prior to peak traffic events.</a:t>
+            </a:r>
+          </a:p>
+          <a:p>
+            <a:pPr>
+              <a:spcAft>
+                <a:spcPts val="500"/>
+              </a:spcAft>
+              <a:defRPr sz="1100">
+                <a:solidFill>
+                  <a:srgbClr val="F8FAFC"/>
+                </a:solidFill>
+              </a:defRPr>
+            </a:pPr>
+            <a:r>
+              <a:t>• Kubernetes (EKS) container pod-level energy tracking.</a:t>
+            </a:r>
+          </a:p>
+        </p:txBody>
+      </p:sp>
+    </p:spTree>
+  </p:cSld>
+  <p:clrMapOvr>
+    <a:masterClrMapping/>
+  </p:clrMapOvr>
+</p:sld>
+</file>
+
+<file path=ppt/slides/slide17.xml><?xml version="1.0" encoding="utf-8"?>
+<p:sld xmlns:a="http://schemas.openxmlformats.org/drawingml/2006/main" xmlns:p="http://schemas.openxmlformats.org/presentationml/2006/main" xmlns:r="http://schemas.openxmlformats.org/officeDocument/2006/relationships">
+  <p:cSld>
+    <p:bg>
+      <p:bgPr>
+        <a:solidFill>
+          <a:srgbClr val="0A0F1D"/>
+        </a:solidFill>
+        <a:effectLst/>
+      </p:bgPr>
+    </p:bg>
+    <p:spTree>
+      <p:nvGrpSpPr>
+        <p:cNvPr id="1" name=""/>
+        <p:cNvGrpSpPr/>
+        <p:nvPr/>
+      </p:nvGrpSpPr>
+      <p:grpSpPr/>
+      <p:sp>
+        <p:nvSpPr>
+          <p:cNvPr id="2" name="TextBox 1"/>
+          <p:cNvSpPr txBox="1"/>
+          <p:nvPr/>
+        </p:nvSpPr>
+        <p:spPr>
+          <a:xfrm>
+            <a:off x="914400" y="1645920"/>
+            <a:ext cx="10332720" cy="4114800"/>
+          </a:xfrm>
+          <a:prstGeom prst="rect">
+            <a:avLst/>
+          </a:prstGeom>
+          <a:noFill/>
+        </p:spPr>
+        <p:txBody>
           <a:bodyPr wrap="square">
             <a:spAutoFit/>
           </a:bodyPr>
           <a:lstStyle/>
           <a:p>
             <a:pPr>
-              <a:defRPr sz="1400" b="1">
+              <a:defRPr sz="1300" b="1">
                 <a:solidFill>
                   <a:srgbClr val="10B981"/>
                 </a:solidFill>
               </a:defRPr>
             </a:pPr>
             <a:r>
-              <a:t>PROJECT DEFENSE &amp; EVALUATION</a:t>
+              <a:t>PROJECT EVALUATION &amp; DEFENSE</a:t>
             </a:r>
           </a:p>
           <a:p>
@@ -4653,22 +5469,37 @@
           <a:p>
             <a:pPr>
               <a:spcBef>
-                <a:spcPts val="1200"/>
+                <a:spcPts val="1000"/>
               </a:spcBef>
-              <a:defRPr sz="2000">
+              <a:defRPr sz="1800">
                 <a:solidFill>
                   <a:srgbClr val="94A3B8"/>
                 </a:solidFill>
               </a:defRPr>
             </a:pPr>
             <a:r>
-              <a:t>Open for Questions, Evaluation &amp; Live Code Demonstration</a:t>
+              <a:t>Open for Faculty Questions, Evaluation &amp; Live System Demonstration</a:t>
             </a:r>
           </a:p>
           <a:p>
             <a:pPr>
               <a:spcBef>
-                <a:spcPts val="2800"/>
+                <a:spcPts val="2200"/>
+              </a:spcBef>
+              <a:defRPr sz="1800" b="1">
+                <a:solidFill>
+                  <a:srgbClr val="10B981"/>
+                </a:solidFill>
+              </a:defRPr>
+            </a:pPr>
+            <a:r>
+              <a:t>Candidate: Safwaan Mohamed S  |  Register No: 25BCE1188</a:t>
+            </a:r>
+          </a:p>
+          <a:p>
+            <a:pPr>
+              <a:spcBef>
+                <a:spcPts val="800"/>
               </a:spcBef>
               <a:defRPr sz="1400">
                 <a:solidFill>
@@ -4716,7 +5547,7 @@
         </p:nvSpPr>
         <p:spPr>
           <a:xfrm>
-            <a:off x="731520" y="457200"/>
+            <a:off x="731520" y="365760"/>
             <a:ext cx="10698480" cy="1097280"/>
           </a:xfrm>
           <a:prstGeom prst="rect">
@@ -4738,22 +5569,22 @@
               </a:defRPr>
             </a:pPr>
             <a:r>
-              <a:t>EXECUTIVE OVERVIEW</a:t>
+              <a:t>CANDIDATE SCOPE OF WORK</a:t>
             </a:r>
           </a:p>
           <a:p>
             <a:pPr>
               <a:spcBef>
-                <a:spcPts val="400"/>
+                <a:spcPts val="300"/>
               </a:spcBef>
-              <a:defRPr sz="2400" b="1">
-                <a:solidFill>
-                  <a:srgbClr val="F8FAFC"/>
-                </a:solidFill>
-              </a:defRPr>
-            </a:pPr>
-            <a:r>
-              <a:t>Project Abstract &amp; Key Deliverables</a:t>
+              <a:defRPr sz="2200" b="1">
+                <a:solidFill>
+                  <a:srgbClr val="F8FAFC"/>
+                </a:solidFill>
+              </a:defRPr>
+            </a:pPr>
+            <a:r>
+              <a:t>My Contributions &amp; Implementation Achievements</a:t>
             </a:r>
           </a:p>
         </p:txBody>
@@ -4767,7 +5598,7 @@
         <p:spPr>
           <a:xfrm>
             <a:off x="731520" y="1645920"/>
-            <a:ext cx="3383280" cy="4572000"/>
+            <a:ext cx="3383280" cy="4663440"/>
           </a:xfrm>
           <a:prstGeom prst="roundRect">
             <a:avLst/>
@@ -4796,81 +5627,81 @@
           </a:fontRef>
         </p:style>
         <p:txBody>
-          <a:bodyPr rtlCol="0" anchor="ctr" wrap="square" lIns="274320" tIns="228600" rIns="274320" bIns="228600"/>
+          <a:bodyPr rtlCol="0" anchor="ctr" wrap="square" lIns="256032" tIns="201168" rIns="256032" bIns="201168"/>
           <a:lstStyle/>
           <a:p>
             <a:pPr algn="ctr">
               <a:spcAft>
-                <a:spcPts val="1200"/>
-              </a:spcAft>
-              <a:defRPr sz="1600" b="1">
+                <a:spcPts val="1000"/>
+              </a:spcAft>
+              <a:defRPr sz="1500" b="1">
                 <a:solidFill>
                   <a:srgbClr val="2563EB"/>
                 </a:solidFill>
               </a:defRPr>
             </a:pPr>
             <a:r>
-              <a:t>Centralized Visibility</a:t>
-            </a:r>
-          </a:p>
-          <a:p>
-            <a:pPr>
-              <a:spcAft>
-                <a:spcPts val="600"/>
-              </a:spcAft>
-              <a:defRPr sz="1200">
-                <a:solidFill>
-                  <a:srgbClr val="F8FAFC"/>
-                </a:solidFill>
-              </a:defRPr>
-            </a:pPr>
-            <a:r>
-              <a:t>• Multi-Region AWS infrastructure cockpit.</a:t>
-            </a:r>
-          </a:p>
-          <a:p>
-            <a:pPr>
-              <a:spcAft>
-                <a:spcPts val="600"/>
-              </a:spcAft>
-              <a:defRPr sz="1200">
-                <a:solidFill>
-                  <a:srgbClr val="F8FAFC"/>
-                </a:solidFill>
-              </a:defRPr>
-            </a:pPr>
-            <a:r>
-              <a:t>• Unified live telemetry ingestion.</a:t>
-            </a:r>
-          </a:p>
-          <a:p>
-            <a:pPr>
-              <a:spcAft>
-                <a:spcPts val="600"/>
-              </a:spcAft>
-              <a:defRPr sz="1200">
-                <a:solidFill>
-                  <a:srgbClr val="F8FAFC"/>
-                </a:solidFill>
-              </a:defRPr>
-            </a:pPr>
-            <a:r>
-              <a:t>• Eliminates console jumping across 5+ AWS screens.</a:t>
-            </a:r>
-          </a:p>
-          <a:p>
-            <a:pPr>
-              <a:spcAft>
-                <a:spcPts val="600"/>
-              </a:spcAft>
-              <a:defRPr sz="1200">
-                <a:solidFill>
-                  <a:srgbClr val="F8FAFC"/>
-                </a:solidFill>
-              </a:defRPr>
-            </a:pPr>
-            <a:r>
-              <a:t>• Reactive real-time state tracking.</a:t>
+              <a:t>1. Architecture &amp; AWS Integration</a:t>
+            </a:r>
+          </a:p>
+          <a:p>
+            <a:pPr>
+              <a:spcAft>
+                <a:spcPts val="500"/>
+              </a:spcAft>
+              <a:defRPr sz="1100">
+                <a:solidFill>
+                  <a:srgbClr val="F8FAFC"/>
+                </a:solidFill>
+              </a:defRPr>
+            </a:pPr>
+            <a:r>
+              <a:t>• Engineered full-stack architecture connecting React frontend to FastAPI backend.</a:t>
+            </a:r>
+          </a:p>
+          <a:p>
+            <a:pPr>
+              <a:spcAft>
+                <a:spcPts val="500"/>
+              </a:spcAft>
+              <a:defRPr sz="1100">
+                <a:solidFill>
+                  <a:srgbClr val="F8FAFC"/>
+                </a:solidFill>
+              </a:defRPr>
+            </a:pPr>
+            <a:r>
+              <a:t>• Implemented Zero-Trust AWS STS Authentication (get_caller_identity).</a:t>
+            </a:r>
+          </a:p>
+          <a:p>
+            <a:pPr>
+              <a:spcAft>
+                <a:spcPts val="500"/>
+              </a:spcAft>
+              <a:defRPr sz="1100">
+                <a:solidFill>
+                  <a:srgbClr val="F8FAFC"/>
+                </a:solidFill>
+              </a:defRPr>
+            </a:pPr>
+            <a:r>
+              <a:t>• Created Global Connection Center on Dashboard syncing keys across all pages.</a:t>
+            </a:r>
+          </a:p>
+          <a:p>
+            <a:pPr>
+              <a:spcAft>
+                <a:spcPts val="500"/>
+              </a:spcAft>
+              <a:defRPr sz="1100">
+                <a:solidFill>
+                  <a:srgbClr val="F8FAFC"/>
+                </a:solidFill>
+              </a:defRPr>
+            </a:pPr>
+            <a:r>
+              <a:t>• Built multi-region switcher supporting ap-south-1, us-east-1, eu-west-1.</a:t>
             </a:r>
           </a:p>
         </p:txBody>
@@ -4884,7 +5715,7 @@
         <p:spPr>
           <a:xfrm>
             <a:off x="4389120" y="1645920"/>
-            <a:ext cx="3383280" cy="4572000"/>
+            <a:ext cx="3383280" cy="4663440"/>
           </a:xfrm>
           <a:prstGeom prst="roundRect">
             <a:avLst/>
@@ -4913,81 +5744,81 @@
           </a:fontRef>
         </p:style>
         <p:txBody>
-          <a:bodyPr rtlCol="0" anchor="ctr" wrap="square" lIns="274320" tIns="228600" rIns="274320" bIns="228600"/>
+          <a:bodyPr rtlCol="0" anchor="ctr" wrap="square" lIns="256032" tIns="201168" rIns="256032" bIns="201168"/>
           <a:lstStyle/>
           <a:p>
             <a:pPr algn="ctr">
               <a:spcAft>
-                <a:spcPts val="1200"/>
-              </a:spcAft>
-              <a:defRPr sz="1600" b="1">
+                <a:spcPts val="1000"/>
+              </a:spcAft>
+              <a:defRPr sz="1500" b="1">
                 <a:solidFill>
                   <a:srgbClr val="F59E0B"/>
                 </a:solidFill>
               </a:defRPr>
             </a:pPr>
             <a:r>
-              <a:t>Automated Security</a:t>
-            </a:r>
-          </a:p>
-          <a:p>
-            <a:pPr>
-              <a:spcAft>
-                <a:spcPts val="600"/>
-              </a:spcAft>
-              <a:defRPr sz="1200">
-                <a:solidFill>
-                  <a:srgbClr val="F8FAFC"/>
-                </a:solidFill>
-              </a:defRPr>
-            </a:pPr>
-            <a:r>
-              <a:t>• Zero-trust ingress security group auditing.</a:t>
-            </a:r>
-          </a:p>
-          <a:p>
-            <a:pPr>
-              <a:spcAft>
-                <a:spcPts val="600"/>
-              </a:spcAft>
-              <a:defRPr sz="1200">
-                <a:solidFill>
-                  <a:srgbClr val="F8FAFC"/>
-                </a:solidFill>
-              </a:defRPr>
-            </a:pPr>
-            <a:r>
-              <a:t>• EBS data-at-rest encryption checks.</a:t>
-            </a:r>
-          </a:p>
-          <a:p>
-            <a:pPr>
-              <a:spcAft>
-                <a:spcPts val="600"/>
-              </a:spcAft>
-              <a:defRPr sz="1200">
-                <a:solidFill>
-                  <a:srgbClr val="F8FAFC"/>
-                </a:solidFill>
-              </a:defRPr>
-            </a:pPr>
-            <a:r>
-              <a:t>• Well-Architected compliance scoring.</a:t>
-            </a:r>
-          </a:p>
-          <a:p>
-            <a:pPr>
-              <a:spcAft>
-                <a:spcPts val="600"/>
-              </a:spcAft>
-              <a:defRPr sz="1200">
-                <a:solidFill>
-                  <a:srgbClr val="F8FAFC"/>
-                </a:solidFill>
-              </a:defRPr>
-            </a:pPr>
-            <a:r>
-              <a:t>• Instant 1-click AWS CLI remediation scripts.</a:t>
+              <a:t>2. Security &amp; Remediation Engine</a:t>
+            </a:r>
+          </a:p>
+          <a:p>
+            <a:pPr>
+              <a:spcAft>
+                <a:spcPts val="500"/>
+              </a:spcAft>
+              <a:defRPr sz="1100">
+                <a:solidFill>
+                  <a:srgbClr val="F8FAFC"/>
+                </a:solidFill>
+              </a:defRPr>
+            </a:pPr>
+            <a:r>
+              <a:t>• Developed automated security scanner for AWS EC2 &amp; Security Groups.</a:t>
+            </a:r>
+          </a:p>
+          <a:p>
+            <a:pPr>
+              <a:spcAft>
+                <a:spcPts val="500"/>
+              </a:spcAft>
+              <a:defRPr sz="1100">
+                <a:solidFill>
+                  <a:srgbClr val="F8FAFC"/>
+                </a:solidFill>
+              </a:defRPr>
+            </a:pPr>
+            <a:r>
+              <a:t>• Engineered CIS Well-Architected 4-pillar compliance scoring.</a:t>
+            </a:r>
+          </a:p>
+          <a:p>
+            <a:pPr>
+              <a:spcAft>
+                <a:spcPts val="500"/>
+              </a:spcAft>
+              <a:defRPr sz="1100">
+                <a:solidFill>
+                  <a:srgbClr val="F8FAFC"/>
+                </a:solidFill>
+              </a:defRPr>
+            </a:pPr>
+            <a:r>
+              <a:t>• Implemented Zero-Trust port scanner detecting open SSH (22) &amp; RDP (3389).</a:t>
+            </a:r>
+          </a:p>
+          <a:p>
+            <a:pPr>
+              <a:spcAft>
+                <a:spcPts val="500"/>
+              </a:spcAft>
+              <a:defRPr sz="1100">
+                <a:solidFill>
+                  <a:srgbClr val="F8FAFC"/>
+                </a:solidFill>
+              </a:defRPr>
+            </a:pPr>
+            <a:r>
+              <a:t>• Built 1-click CLI remediation generator emitting instant AWS CLI fixes.</a:t>
             </a:r>
           </a:p>
         </p:txBody>
@@ -5001,7 +5832,7 @@
         <p:spPr>
           <a:xfrm>
             <a:off x="8046720" y="1645920"/>
-            <a:ext cx="3383280" cy="4572000"/>
+            <a:ext cx="3383280" cy="4663440"/>
           </a:xfrm>
           <a:prstGeom prst="roundRect">
             <a:avLst/>
@@ -5030,81 +5861,81 @@
           </a:fontRef>
         </p:style>
         <p:txBody>
-          <a:bodyPr rtlCol="0" anchor="ctr" wrap="square" lIns="274320" tIns="228600" rIns="274320" bIns="228600"/>
+          <a:bodyPr rtlCol="0" anchor="ctr" wrap="square" lIns="256032" tIns="201168" rIns="256032" bIns="201168"/>
           <a:lstStyle/>
           <a:p>
             <a:pPr algn="ctr">
               <a:spcAft>
-                <a:spcPts val="1200"/>
-              </a:spcAft>
-              <a:defRPr sz="1600" b="1">
+                <a:spcPts val="1000"/>
+              </a:spcAft>
+              <a:defRPr sz="1500" b="1">
                 <a:solidFill>
                   <a:srgbClr val="10B981"/>
                 </a:solidFill>
               </a:defRPr>
             </a:pPr>
             <a:r>
-              <a:t>Green Computing</a:t>
-            </a:r>
-          </a:p>
-          <a:p>
-            <a:pPr>
-              <a:spcAft>
-                <a:spcPts val="600"/>
-              </a:spcAft>
-              <a:defRPr sz="1200">
-                <a:solidFill>
-                  <a:srgbClr val="F8FAFC"/>
-                </a:solidFill>
-              </a:defRPr>
-            </a:pPr>
-            <a:r>
-              <a:t>• Continuous SPECpower energy modeling.</a:t>
-            </a:r>
-          </a:p>
-          <a:p>
-            <a:pPr>
-              <a:spcAft>
-                <a:spcPts val="600"/>
-              </a:spcAft>
-              <a:defRPr sz="1200">
-                <a:solidFill>
-                  <a:srgbClr val="F8FAFC"/>
-                </a:solidFill>
-              </a:defRPr>
-            </a:pPr>
-            <a:r>
-              <a:t>• Live kWh consumption &amp; carbon calculation.</a:t>
-            </a:r>
-          </a:p>
-          <a:p>
-            <a:pPr>
-              <a:spcAft>
-                <a:spcPts val="600"/>
-              </a:spcAft>
-              <a:defRPr sz="1200">
-                <a:solidFill>
-                  <a:srgbClr val="F8FAFC"/>
-                </a:solidFill>
-              </a:defRPr>
-            </a:pPr>
-            <a:r>
-              <a:t>• CloudWatch CPU historical analytics.</a:t>
-            </a:r>
-          </a:p>
-          <a:p>
-            <a:pPr>
-              <a:spcAft>
-                <a:spcPts val="600"/>
-              </a:spcAft>
-              <a:defRPr sz="1200">
-                <a:solidFill>
-                  <a:srgbClr val="F8FAFC"/>
-                </a:solidFill>
-              </a:defRPr>
-            </a:pPr>
-            <a:r>
-              <a:t>• Carbon emission reduction recommendations.</a:t>
+              <a:t>3. Green Computing &amp; Problem Solving</a:t>
+            </a:r>
+          </a:p>
+          <a:p>
+            <a:pPr>
+              <a:spcAft>
+                <a:spcPts val="500"/>
+              </a:spcAft>
+              <a:defRPr sz="1100">
+                <a:solidFill>
+                  <a:srgbClr val="F8FAFC"/>
+                </a:solidFill>
+              </a:defRPr>
+            </a:pPr>
+            <a:r>
+              <a:t>• Researched &amp; formulated continuous SPECpower server energy curve.</a:t>
+            </a:r>
+          </a:p>
+          <a:p>
+            <a:pPr>
+              <a:spcAft>
+                <a:spcPts val="500"/>
+              </a:spcAft>
+              <a:defRPr sz="1100">
+                <a:solidFill>
+                  <a:srgbClr val="F8FAFC"/>
+                </a:solidFill>
+              </a:defRPr>
+            </a:pPr>
+            <a:r>
+              <a:t>• Diagnosed &amp; solved the critical 50% Telemetry Flatline bug in backend &amp; CSS.</a:t>
+            </a:r>
+          </a:p>
+          <a:p>
+            <a:pPr>
+              <a:spcAft>
+                <a:spcPts val="500"/>
+              </a:spcAft>
+              <a:defRPr sz="1100">
+                <a:solidFill>
+                  <a:srgbClr val="F8FAFC"/>
+                </a:solidFill>
+              </a:defRPr>
+            </a:pPr>
+            <a:r>
+              <a:t>• Implemented dynamic metric toggle (Efficiency Score vs CPU %) with tooltips.</a:t>
+            </a:r>
+          </a:p>
+          <a:p>
+            <a:pPr>
+              <a:spcAft>
+                <a:spcPts val="500"/>
+              </a:spcAft>
+              <a:defRPr sz="1100">
+                <a:solidFill>
+                  <a:srgbClr val="F8FAFC"/>
+                </a:solidFill>
+              </a:defRPr>
+            </a:pPr>
+            <a:r>
+              <a:t>• Integrated EC2 Load Balancer &amp; Conversational AI Cloud Agent.</a:t>
             </a:r>
           </a:p>
         </p:txBody>
@@ -5143,7 +5974,7 @@
         </p:nvSpPr>
         <p:spPr>
           <a:xfrm>
-            <a:off x="731520" y="457200"/>
+            <a:off x="731520" y="365760"/>
             <a:ext cx="10698480" cy="1097280"/>
           </a:xfrm>
           <a:prstGeom prst="rect">
@@ -5171,16 +6002,16 @@
           <a:p>
             <a:pPr>
               <a:spcBef>
-                <a:spcPts val="400"/>
+                <a:spcPts val="300"/>
               </a:spcBef>
-              <a:defRPr sz="2400" b="1">
-                <a:solidFill>
-                  <a:srgbClr val="F8FAFC"/>
-                </a:solidFill>
-              </a:defRPr>
-            </a:pPr>
-            <a:r>
-              <a:t>Problem Statement &amp; Current Limitations</a:t>
+              <a:defRPr sz="2200" b="1">
+                <a:solidFill>
+                  <a:srgbClr val="F8FAFC"/>
+                </a:solidFill>
+              </a:defRPr>
+            </a:pPr>
+            <a:r>
+              <a:t>Problem Statement &amp; Existing Limitations</a:t>
             </a:r>
           </a:p>
         </p:txBody>
@@ -5223,66 +6054,66 @@
           </a:fontRef>
         </p:style>
         <p:txBody>
-          <a:bodyPr rtlCol="0" anchor="ctr" wrap="square" lIns="274320" tIns="228600" rIns="274320" bIns="228600"/>
+          <a:bodyPr rtlCol="0" anchor="ctr" wrap="square" lIns="256032" tIns="201168" rIns="256032" bIns="201168"/>
           <a:lstStyle/>
           <a:p>
             <a:pPr algn="ctr">
               <a:spcAft>
-                <a:spcPts val="1200"/>
-              </a:spcAft>
-              <a:defRPr sz="1600" b="1">
+                <a:spcPts val="1000"/>
+              </a:spcAft>
+              <a:defRPr sz="1500" b="1">
                 <a:solidFill>
                   <a:srgbClr val="2563EB"/>
                 </a:solidFill>
               </a:defRPr>
             </a:pPr>
             <a:r>
-              <a:t>1. Fragmented Cloud Visibility</a:t>
-            </a:r>
-          </a:p>
-          <a:p>
-            <a:pPr>
-              <a:spcAft>
-                <a:spcPts val="600"/>
-              </a:spcAft>
-              <a:defRPr sz="1200">
-                <a:solidFill>
-                  <a:srgbClr val="F8FAFC"/>
-                </a:solidFill>
-              </a:defRPr>
-            </a:pPr>
-            <a:r>
-              <a:t>• Engineers must navigate complex AWS consoles.</a:t>
-            </a:r>
-          </a:p>
-          <a:p>
-            <a:pPr>
-              <a:spcAft>
-                <a:spcPts val="600"/>
-              </a:spcAft>
-              <a:defRPr sz="1200">
-                <a:solidFill>
-                  <a:srgbClr val="F8FAFC"/>
-                </a:solidFill>
-              </a:defRPr>
-            </a:pPr>
-            <a:r>
-              <a:t>• Lack of cross-region unified telemetry.</a:t>
-            </a:r>
-          </a:p>
-          <a:p>
-            <a:pPr>
-              <a:spcAft>
-                <a:spcPts val="600"/>
-              </a:spcAft>
-              <a:defRPr sz="1200">
-                <a:solidFill>
-                  <a:srgbClr val="F8FAFC"/>
-                </a:solidFill>
-              </a:defRPr>
-            </a:pPr>
-            <a:r>
-              <a:t>• Delayed detection of compute anomalies.</a:t>
+              <a:t>1. Monitoring Sprawl Across AWS</a:t>
+            </a:r>
+          </a:p>
+          <a:p>
+            <a:pPr>
+              <a:spcAft>
+                <a:spcPts val="500"/>
+              </a:spcAft>
+              <a:defRPr sz="1100">
+                <a:solidFill>
+                  <a:srgbClr val="F8FAFC"/>
+                </a:solidFill>
+              </a:defRPr>
+            </a:pPr>
+            <a:r>
+              <a:t>• DevOps engineers forced to navigate 5+ AWS console screens.</a:t>
+            </a:r>
+          </a:p>
+          <a:p>
+            <a:pPr>
+              <a:spcAft>
+                <a:spcPts val="500"/>
+              </a:spcAft>
+              <a:defRPr sz="1100">
+                <a:solidFill>
+                  <a:srgbClr val="F8FAFC"/>
+                </a:solidFill>
+              </a:defRPr>
+            </a:pPr>
+            <a:r>
+              <a:t>• No centralized correlation between metrics, posture, and power.</a:t>
+            </a:r>
+          </a:p>
+          <a:p>
+            <a:pPr>
+              <a:spcAft>
+                <a:spcPts val="500"/>
+              </a:spcAft>
+              <a:defRPr sz="1100">
+                <a:solidFill>
+                  <a:srgbClr val="F8FAFC"/>
+                </a:solidFill>
+              </a:defRPr>
+            </a:pPr>
+            <a:r>
+              <a:t>• Lack of cross-region telemetry visibility.</a:t>
             </a:r>
           </a:p>
         </p:txBody>
@@ -5306,7 +6137,7 @@
           </a:solidFill>
           <a:ln w="19050">
             <a:solidFill>
-              <a:srgbClr val="F59E0B"/>
+              <a:srgbClr val="F43F5E"/>
             </a:solidFill>
           </a:ln>
         </p:spPr>
@@ -5325,59 +6156,59 @@
           </a:fontRef>
         </p:style>
         <p:txBody>
-          <a:bodyPr rtlCol="0" anchor="ctr" wrap="square" lIns="274320" tIns="228600" rIns="274320" bIns="228600"/>
+          <a:bodyPr rtlCol="0" anchor="ctr" wrap="square" lIns="256032" tIns="201168" rIns="256032" bIns="201168"/>
           <a:lstStyle/>
           <a:p>
             <a:pPr algn="ctr">
               <a:spcAft>
-                <a:spcPts val="1200"/>
-              </a:spcAft>
-              <a:defRPr sz="1600" b="1">
-                <a:solidFill>
-                  <a:srgbClr val="F59E0B"/>
-                </a:solidFill>
-              </a:defRPr>
-            </a:pPr>
-            <a:r>
-              <a:t>2. Security Misconfigurations</a:t>
-            </a:r>
-          </a:p>
-          <a:p>
-            <a:pPr>
-              <a:spcAft>
-                <a:spcPts val="600"/>
-              </a:spcAft>
-              <a:defRPr sz="1200">
-                <a:solidFill>
-                  <a:srgbClr val="F8FAFC"/>
-                </a:solidFill>
-              </a:defRPr>
-            </a:pPr>
-            <a:r>
-              <a:t>• &gt;80% of cloud security breaches stem from misconfigurations.</a:t>
-            </a:r>
-          </a:p>
-          <a:p>
-            <a:pPr>
-              <a:spcAft>
-                <a:spcPts val="600"/>
-              </a:spcAft>
-              <a:defRPr sz="1200">
-                <a:solidFill>
-                  <a:srgbClr val="F8FAFC"/>
-                </a:solidFill>
-              </a:defRPr>
-            </a:pPr>
-            <a:r>
-              <a:t>• Open SSH (22) / RDP (3389) ports to 0.0.0.0/0.</a:t>
-            </a:r>
-          </a:p>
-          <a:p>
-            <a:pPr>
-              <a:spcAft>
-                <a:spcPts val="600"/>
-              </a:spcAft>
-              <a:defRPr sz="1200">
+                <a:spcPts val="1000"/>
+              </a:spcAft>
+              <a:defRPr sz="1500" b="1">
+                <a:solidFill>
+                  <a:srgbClr val="F43F5E"/>
+                </a:solidFill>
+              </a:defRPr>
+            </a:pPr>
+            <a:r>
+              <a:t>2. Severe Security Misconfigurations</a:t>
+            </a:r>
+          </a:p>
+          <a:p>
+            <a:pPr>
+              <a:spcAft>
+                <a:spcPts val="500"/>
+              </a:spcAft>
+              <a:defRPr sz="1100">
+                <a:solidFill>
+                  <a:srgbClr val="F8FAFC"/>
+                </a:solidFill>
+              </a:defRPr>
+            </a:pPr>
+            <a:r>
+              <a:t>• &gt;80% of cloud breaches stem from basic misconfigurations.</a:t>
+            </a:r>
+          </a:p>
+          <a:p>
+            <a:pPr>
+              <a:spcAft>
+                <a:spcPts val="500"/>
+              </a:spcAft>
+              <a:defRPr sz="1100">
+                <a:solidFill>
+                  <a:srgbClr val="F8FAFC"/>
+                </a:solidFill>
+              </a:defRPr>
+            </a:pPr>
+            <a:r>
+              <a:t>• Unrestricted ingress (0.0.0.0/0) on port 22 (SSH) and 3389 (RDP).</a:t>
+            </a:r>
+          </a:p>
+          <a:p>
+            <a:pPr>
+              <a:spcAft>
+                <a:spcPts val="500"/>
+              </a:spcAft>
+              <a:defRPr sz="1100">
                 <a:solidFill>
                   <a:srgbClr val="F8FAFC"/>
                 </a:solidFill>
@@ -5427,44 +6258,44 @@
           </a:fontRef>
         </p:style>
         <p:txBody>
-          <a:bodyPr rtlCol="0" anchor="ctr" wrap="square" lIns="274320" tIns="228600" rIns="274320" bIns="228600"/>
+          <a:bodyPr rtlCol="0" anchor="ctr" wrap="square" lIns="256032" tIns="201168" rIns="256032" bIns="201168"/>
           <a:lstStyle/>
           <a:p>
             <a:pPr algn="ctr">
               <a:spcAft>
-                <a:spcPts val="1200"/>
-              </a:spcAft>
-              <a:defRPr sz="1600" b="1">
+                <a:spcPts val="1000"/>
+              </a:spcAft>
+              <a:defRPr sz="1500" b="1">
                 <a:solidFill>
                   <a:srgbClr val="10B981"/>
                 </a:solidFill>
               </a:defRPr>
             </a:pPr>
             <a:r>
-              <a:t>3. Energy Waste &amp; Carbon Inefficiency</a:t>
-            </a:r>
-          </a:p>
-          <a:p>
-            <a:pPr>
-              <a:spcAft>
-                <a:spcPts val="600"/>
-              </a:spcAft>
-              <a:defRPr sz="1200">
-                <a:solidFill>
-                  <a:srgbClr val="F8FAFC"/>
-                </a:solidFill>
-              </a:defRPr>
-            </a:pPr>
-            <a:r>
-              <a:t>• Idle servers consume ~40% base electricity without productive output.</a:t>
-            </a:r>
-          </a:p>
-          <a:p>
-            <a:pPr>
-              <a:spcAft>
-                <a:spcPts val="600"/>
-              </a:spcAft>
-              <a:defRPr sz="1200">
+              <a:t>3. The Idle Compute Energy Waste</a:t>
+            </a:r>
+          </a:p>
+          <a:p>
+            <a:pPr>
+              <a:spcAft>
+                <a:spcPts val="500"/>
+              </a:spcAft>
+              <a:defRPr sz="1100">
+                <a:solidFill>
+                  <a:srgbClr val="F8FAFC"/>
+                </a:solidFill>
+              </a:defRPr>
+            </a:pPr>
+            <a:r>
+              <a:t>• Idle cloud servers draw ~40% electricity without doing real work.</a:t>
+            </a:r>
+          </a:p>
+          <a:p>
+            <a:pPr>
+              <a:spcAft>
+                <a:spcPts val="500"/>
+              </a:spcAft>
+              <a:defRPr sz="1100">
                 <a:solidFill>
                   <a:srgbClr val="F8FAFC"/>
                 </a:solidFill>
@@ -5477,16 +6308,16 @@
           <a:p>
             <a:pPr>
               <a:spcAft>
-                <a:spcPts val="600"/>
-              </a:spcAft>
-              <a:defRPr sz="1200">
-                <a:solidFill>
-                  <a:srgbClr val="F8FAFC"/>
-                </a:solidFill>
-              </a:defRPr>
-            </a:pPr>
-            <a:r>
-              <a:t>• No real-time carbon emissions tracking.</a:t>
+                <a:spcPts val="500"/>
+              </a:spcAft>
+              <a:defRPr sz="1100">
+                <a:solidFill>
+                  <a:srgbClr val="F8FAFC"/>
+                </a:solidFill>
+              </a:defRPr>
+            </a:pPr>
+            <a:r>
+              <a:t>• Silent carbon emissions without actionable reduction advice.</a:t>
             </a:r>
           </a:p>
         </p:txBody>
@@ -5510,7 +6341,7 @@
           </a:solidFill>
           <a:ln w="19050">
             <a:solidFill>
-              <a:srgbClr val="2563EB"/>
+              <a:srgbClr val="F59E0B"/>
             </a:solidFill>
           </a:ln>
         </p:spPr>
@@ -5529,66 +6360,66 @@
           </a:fontRef>
         </p:style>
         <p:txBody>
-          <a:bodyPr rtlCol="0" anchor="ctr" wrap="square" lIns="274320" tIns="228600" rIns="274320" bIns="228600"/>
+          <a:bodyPr rtlCol="0" anchor="ctr" wrap="square" lIns="256032" tIns="201168" rIns="256032" bIns="201168"/>
           <a:lstStyle/>
           <a:p>
             <a:pPr algn="ctr">
               <a:spcAft>
-                <a:spcPts val="1200"/>
-              </a:spcAft>
-              <a:defRPr sz="1600" b="1">
-                <a:solidFill>
-                  <a:srgbClr val="2563EB"/>
-                </a:solidFill>
-              </a:defRPr>
-            </a:pPr>
-            <a:r>
-              <a:t>4. Authentication &amp; Security Friction</a:t>
-            </a:r>
-          </a:p>
-          <a:p>
-            <a:pPr>
-              <a:spcAft>
-                <a:spcPts val="600"/>
-              </a:spcAft>
-              <a:defRPr sz="1200">
-                <a:solidFill>
-                  <a:srgbClr val="F8FAFC"/>
-                </a:solidFill>
-              </a:defRPr>
-            </a:pPr>
-            <a:r>
-              <a:t>• Fragmented credential inputs across multiple pages.</a:t>
-            </a:r>
-          </a:p>
-          <a:p>
-            <a:pPr>
-              <a:spcAft>
-                <a:spcPts val="600"/>
-              </a:spcAft>
-              <a:defRPr sz="1200">
-                <a:solidFill>
-                  <a:srgbClr val="F8FAFC"/>
-                </a:solidFill>
-              </a:defRPr>
-            </a:pPr>
-            <a:r>
-              <a:t>• Risk of credential leakage or misconfiguration.</a:t>
-            </a:r>
-          </a:p>
-          <a:p>
-            <a:pPr>
-              <a:spcAft>
-                <a:spcPts val="600"/>
-              </a:spcAft>
-              <a:defRPr sz="1200">
-                <a:solidFill>
-                  <a:srgbClr val="F8FAFC"/>
-                </a:solidFill>
-              </a:defRPr>
-            </a:pPr>
-            <a:r>
-              <a:t>• Need for unified STS verification &amp; local persistence.</a:t>
+                <a:spcPts val="1000"/>
+              </a:spcAft>
+              <a:defRPr sz="1500" b="1">
+                <a:solidFill>
+                  <a:srgbClr val="F59E0B"/>
+                </a:solidFill>
+              </a:defRPr>
+            </a:pPr>
+            <a:r>
+              <a:t>4. Authentication &amp; Key Friction</a:t>
+            </a:r>
+          </a:p>
+          <a:p>
+            <a:pPr>
+              <a:spcAft>
+                <a:spcPts val="500"/>
+              </a:spcAft>
+              <a:defRPr sz="1100">
+                <a:solidFill>
+                  <a:srgbClr val="F8FAFC"/>
+                </a:solidFill>
+              </a:defRPr>
+            </a:pPr>
+            <a:r>
+              <a:t>• Fragmented credential prompts on individual sub-pages.</a:t>
+            </a:r>
+          </a:p>
+          <a:p>
+            <a:pPr>
+              <a:spcAft>
+                <a:spcPts val="500"/>
+              </a:spcAft>
+              <a:defRPr sz="1100">
+                <a:solidFill>
+                  <a:srgbClr val="F8FAFC"/>
+                </a:solidFill>
+              </a:defRPr>
+            </a:pPr>
+            <a:r>
+              <a:t>• Risk of credential leakage or misconfigured IAM profiles.</a:t>
+            </a:r>
+          </a:p>
+          <a:p>
+            <a:pPr>
+              <a:spcAft>
+                <a:spcPts val="500"/>
+              </a:spcAft>
+              <a:defRPr sz="1100">
+                <a:solidFill>
+                  <a:srgbClr val="F8FAFC"/>
+                </a:solidFill>
+              </a:defRPr>
+            </a:pPr>
+            <a:r>
+              <a:t>• Need for unified STS verification &amp; safe persistence.</a:t>
             </a:r>
           </a:p>
         </p:txBody>
@@ -5627,7 +6458,7 @@
         </p:nvSpPr>
         <p:spPr>
           <a:xfrm>
-            <a:off x="731520" y="457200"/>
+            <a:off x="731520" y="365760"/>
             <a:ext cx="10698480" cy="1097280"/>
           </a:xfrm>
           <a:prstGeom prst="rect">
@@ -5649,22 +6480,22 @@
               </a:defRPr>
             </a:pPr>
             <a:r>
-              <a:t>THE SOLUTION</a:t>
+              <a:t>SYSTEM BLUEPRINT</a:t>
             </a:r>
           </a:p>
           <a:p>
             <a:pPr>
               <a:spcBef>
-                <a:spcPts val="400"/>
+                <a:spcPts val="300"/>
               </a:spcBef>
-              <a:defRPr sz="2400" b="1">
-                <a:solidFill>
-                  <a:srgbClr val="F8FAFC"/>
-                </a:solidFill>
-              </a:defRPr>
-            </a:pPr>
-            <a:r>
-              <a:t>CloudMind AI: Architecture &amp; Core Capabilities</a:t>
+              <a:defRPr sz="2200" b="1">
+                <a:solidFill>
+                  <a:srgbClr val="F8FAFC"/>
+                </a:solidFill>
+              </a:defRPr>
+            </a:pPr>
+            <a:r>
+              <a:t>High-Level 4-Tier Architecture &amp; Technology Stack</a:t>
             </a:r>
           </a:p>
         </p:txBody>
@@ -5678,7 +6509,7 @@
         <p:spPr>
           <a:xfrm>
             <a:off x="731520" y="1645920"/>
-            <a:ext cx="3383280" cy="4572000"/>
+            <a:ext cx="3383280" cy="4663440"/>
           </a:xfrm>
           <a:prstGeom prst="roundRect">
             <a:avLst/>
@@ -5707,81 +6538,96 @@
           </a:fontRef>
         </p:style>
         <p:txBody>
-          <a:bodyPr rtlCol="0" anchor="ctr" wrap="square" lIns="274320" tIns="228600" rIns="274320" bIns="228600"/>
+          <a:bodyPr rtlCol="0" anchor="ctr" wrap="square" lIns="256032" tIns="201168" rIns="256032" bIns="201168"/>
           <a:lstStyle/>
           <a:p>
             <a:pPr algn="ctr">
               <a:spcAft>
-                <a:spcPts val="1200"/>
-              </a:spcAft>
-              <a:defRPr sz="1600" b="1">
+                <a:spcPts val="1000"/>
+              </a:spcAft>
+              <a:defRPr sz="1500" b="1">
                 <a:solidFill>
                   <a:srgbClr val="2563EB"/>
                 </a:solidFill>
               </a:defRPr>
             </a:pPr>
             <a:r>
-              <a:t>Global Connection Center</a:t>
-            </a:r>
-          </a:p>
-          <a:p>
-            <a:pPr>
-              <a:spcAft>
-                <a:spcPts val="600"/>
-              </a:spcAft>
-              <a:defRPr sz="1200">
-                <a:solidFill>
-                  <a:srgbClr val="F8FAFC"/>
-                </a:solidFill>
-              </a:defRPr>
-            </a:pPr>
-            <a:r>
-              <a:t>• Single source of AWS authentication.</a:t>
-            </a:r>
-          </a:p>
-          <a:p>
-            <a:pPr>
-              <a:spcAft>
-                <a:spcPts val="600"/>
-              </a:spcAft>
-              <a:defRPr sz="1200">
-                <a:solidFill>
-                  <a:srgbClr val="F8FAFC"/>
-                </a:solidFill>
-              </a:defRPr>
-            </a:pPr>
-            <a:r>
-              <a:t>• Direct STS identity validation.</a:t>
-            </a:r>
-          </a:p>
-          <a:p>
-            <a:pPr>
-              <a:spcAft>
-                <a:spcPts val="600"/>
-              </a:spcAft>
-              <a:defRPr sz="1200">
-                <a:solidFill>
-                  <a:srgbClr val="F8FAFC"/>
-                </a:solidFill>
-              </a:defRPr>
-            </a:pPr>
-            <a:r>
-              <a:t>• Seamless switching across all AWS regions.</a:t>
-            </a:r>
-          </a:p>
-          <a:p>
-            <a:pPr>
-              <a:spcAft>
-                <a:spcPts val="600"/>
-              </a:spcAft>
-              <a:defRPr sz="1200">
-                <a:solidFill>
-                  <a:srgbClr val="F8FAFC"/>
-                </a:solidFill>
-              </a:defRPr>
-            </a:pPr>
-            <a:r>
-              <a:t>• Persistent state across all application modules.</a:t>
+              <a:t>Client Presentation Tier</a:t>
+            </a:r>
+          </a:p>
+          <a:p>
+            <a:pPr>
+              <a:spcAft>
+                <a:spcPts val="500"/>
+              </a:spcAft>
+              <a:defRPr sz="1100">
+                <a:solidFill>
+                  <a:srgbClr val="F8FAFC"/>
+                </a:solidFill>
+              </a:defRPr>
+            </a:pPr>
+            <a:r>
+              <a:t>• React 18 Single Page Application (SPA).</a:t>
+            </a:r>
+          </a:p>
+          <a:p>
+            <a:pPr>
+              <a:spcAft>
+                <a:spcPts val="500"/>
+              </a:spcAft>
+              <a:defRPr sz="1100">
+                <a:solidFill>
+                  <a:srgbClr val="F8FAFC"/>
+                </a:solidFill>
+              </a:defRPr>
+            </a:pPr>
+            <a:r>
+              <a:t>• Vite for sub-second hot reload &amp; compilation.</a:t>
+            </a:r>
+          </a:p>
+          <a:p>
+            <a:pPr>
+              <a:spcAft>
+                <a:spcPts val="500"/>
+              </a:spcAft>
+              <a:defRPr sz="1100">
+                <a:solidFill>
+                  <a:srgbClr val="F8FAFC"/>
+                </a:solidFill>
+              </a:defRPr>
+            </a:pPr>
+            <a:r>
+              <a:t>• Glassmorphic Dark UI design system.</a:t>
+            </a:r>
+          </a:p>
+          <a:p>
+            <a:pPr>
+              <a:spcAft>
+                <a:spcPts val="500"/>
+              </a:spcAft>
+              <a:defRPr sz="1100">
+                <a:solidFill>
+                  <a:srgbClr val="F8FAFC"/>
+                </a:solidFill>
+              </a:defRPr>
+            </a:pPr>
+            <a:r>
+              <a:t>• Reactive LocalStorage token storage.</a:t>
+            </a:r>
+          </a:p>
+          <a:p>
+            <a:pPr>
+              <a:spcAft>
+                <a:spcPts val="500"/>
+              </a:spcAft>
+              <a:defRPr sz="1100">
+                <a:solidFill>
+                  <a:srgbClr val="F8FAFC"/>
+                </a:solidFill>
+              </a:defRPr>
+            </a:pPr>
+            <a:r>
+              <a:t>• Cross-tab global credential dispatcher.</a:t>
             </a:r>
           </a:p>
         </p:txBody>
@@ -5795,7 +6641,7 @@
         <p:spPr>
           <a:xfrm>
             <a:off x="4389120" y="1645920"/>
-            <a:ext cx="3383280" cy="4572000"/>
+            <a:ext cx="3383280" cy="4663440"/>
           </a:xfrm>
           <a:prstGeom prst="roundRect">
             <a:avLst/>
@@ -5824,81 +6670,96 @@
           </a:fontRef>
         </p:style>
         <p:txBody>
-          <a:bodyPr rtlCol="0" anchor="ctr" wrap="square" lIns="274320" tIns="228600" rIns="274320" bIns="228600"/>
+          <a:bodyPr rtlCol="0" anchor="ctr" wrap="square" lIns="256032" tIns="201168" rIns="256032" bIns="201168"/>
           <a:lstStyle/>
           <a:p>
             <a:pPr algn="ctr">
               <a:spcAft>
-                <a:spcPts val="1200"/>
-              </a:spcAft>
-              <a:defRPr sz="1600" b="1">
+                <a:spcPts val="1000"/>
+              </a:spcAft>
+              <a:defRPr sz="1500" b="1">
                 <a:solidFill>
                   <a:srgbClr val="F59E0B"/>
                 </a:solidFill>
               </a:defRPr>
             </a:pPr>
             <a:r>
-              <a:t>Security &amp; Remediation</a:t>
-            </a:r>
-          </a:p>
-          <a:p>
-            <a:pPr>
-              <a:spcAft>
-                <a:spcPts val="600"/>
-              </a:spcAft>
-              <a:defRPr sz="1200">
-                <a:solidFill>
-                  <a:srgbClr val="F8FAFC"/>
-                </a:solidFill>
-              </a:defRPr>
-            </a:pPr>
-            <a:r>
-              <a:t>• One-click automated vulnerability scan.</a:t>
-            </a:r>
-          </a:p>
-          <a:p>
-            <a:pPr>
-              <a:spcAft>
-                <a:spcPts val="600"/>
-              </a:spcAft>
-              <a:defRPr sz="1200">
-                <a:solidFill>
-                  <a:srgbClr val="F8FAFC"/>
-                </a:solidFill>
-              </a:defRPr>
-            </a:pPr>
-            <a:r>
-              <a:t>• Zero-trust ingress port analysis.</a:t>
-            </a:r>
-          </a:p>
-          <a:p>
-            <a:pPr>
-              <a:spcAft>
-                <a:spcPts val="600"/>
-              </a:spcAft>
-              <a:defRPr sz="1200">
-                <a:solidFill>
-                  <a:srgbClr val="F8FAFC"/>
-                </a:solidFill>
-              </a:defRPr>
-            </a:pPr>
-            <a:r>
-              <a:t>• EBS encryption posture evaluation.</a:t>
-            </a:r>
-          </a:p>
-          <a:p>
-            <a:pPr>
-              <a:spcAft>
-                <a:spcPts val="600"/>
-              </a:spcAft>
-              <a:defRPr sz="1200">
-                <a:solidFill>
-                  <a:srgbClr val="F8FAFC"/>
-                </a:solidFill>
-              </a:defRPr>
-            </a:pPr>
-            <a:r>
-              <a:t>• Copy-paste ready AWS CLI fixes.</a:t>
+              <a:t>Backend Orchestration</a:t>
+            </a:r>
+          </a:p>
+          <a:p>
+            <a:pPr>
+              <a:spcAft>
+                <a:spcPts val="500"/>
+              </a:spcAft>
+              <a:defRPr sz="1100">
+                <a:solidFill>
+                  <a:srgbClr val="F8FAFC"/>
+                </a:solidFill>
+              </a:defRPr>
+            </a:pPr>
+            <a:r>
+              <a:t>• FastAPI (Python 3.13) async REST API.</a:t>
+            </a:r>
+          </a:p>
+          <a:p>
+            <a:pPr>
+              <a:spcAft>
+                <a:spcPts val="500"/>
+              </a:spcAft>
+              <a:defRPr sz="1100">
+                <a:solidFill>
+                  <a:srgbClr val="F8FAFC"/>
+                </a:solidFill>
+              </a:defRPr>
+            </a:pPr>
+            <a:r>
+              <a:t>• Pydantic schema validation &amp; error shielding.</a:t>
+            </a:r>
+          </a:p>
+          <a:p>
+            <a:pPr>
+              <a:spcAft>
+                <a:spcPts val="500"/>
+              </a:spcAft>
+              <a:defRPr sz="1100">
+                <a:solidFill>
+                  <a:srgbClr val="F8FAFC"/>
+                </a:solidFill>
+              </a:defRPr>
+            </a:pPr>
+            <a:r>
+              <a:t>• Modular domain services architecture.</a:t>
+            </a:r>
+          </a:p>
+          <a:p>
+            <a:pPr>
+              <a:spcAft>
+                <a:spcPts val="500"/>
+              </a:spcAft>
+              <a:defRPr sz="1100">
+                <a:solidFill>
+                  <a:srgbClr val="F8FAFC"/>
+                </a:solidFill>
+              </a:defRPr>
+            </a:pPr>
+            <a:r>
+              <a:t>• High-throughput non-blocking endpoints.</a:t>
+            </a:r>
+          </a:p>
+          <a:p>
+            <a:pPr>
+              <a:spcAft>
+                <a:spcPts val="500"/>
+              </a:spcAft>
+              <a:defRPr sz="1100">
+                <a:solidFill>
+                  <a:srgbClr val="F8FAFC"/>
+                </a:solidFill>
+              </a:defRPr>
+            </a:pPr>
+            <a:r>
+              <a:t>• Sub-50ms API response latency.</a:t>
             </a:r>
           </a:p>
         </p:txBody>
@@ -5912,7 +6773,7 @@
         <p:spPr>
           <a:xfrm>
             <a:off x="8046720" y="1645920"/>
-            <a:ext cx="3383280" cy="4572000"/>
+            <a:ext cx="3383280" cy="4663440"/>
           </a:xfrm>
           <a:prstGeom prst="roundRect">
             <a:avLst/>
@@ -5941,81 +6802,96 @@
           </a:fontRef>
         </p:style>
         <p:txBody>
-          <a:bodyPr rtlCol="0" anchor="ctr" wrap="square" lIns="274320" tIns="228600" rIns="274320" bIns="228600"/>
+          <a:bodyPr rtlCol="0" anchor="ctr" wrap="square" lIns="256032" tIns="201168" rIns="256032" bIns="201168"/>
           <a:lstStyle/>
           <a:p>
             <a:pPr algn="ctr">
               <a:spcAft>
-                <a:spcPts val="1200"/>
-              </a:spcAft>
-              <a:defRPr sz="1600" b="1">
+                <a:spcPts val="1000"/>
+              </a:spcAft>
+              <a:defRPr sz="1500" b="1">
                 <a:solidFill>
                   <a:srgbClr val="10B981"/>
                 </a:solidFill>
               </a:defRPr>
             </a:pPr>
             <a:r>
-              <a:t>Energy &amp; AI Copilot</a:t>
-            </a:r>
-          </a:p>
-          <a:p>
-            <a:pPr>
-              <a:spcAft>
-                <a:spcPts val="600"/>
-              </a:spcAft>
-              <a:defRPr sz="1200">
-                <a:solidFill>
-                  <a:srgbClr val="F8FAFC"/>
-                </a:solidFill>
-              </a:defRPr>
-            </a:pPr>
-            <a:r>
-              <a:t>• Continuous thermal &amp; power curve modeling.</a:t>
-            </a:r>
-          </a:p>
-          <a:p>
-            <a:pPr>
-              <a:spcAft>
-                <a:spcPts val="600"/>
-              </a:spcAft>
-              <a:defRPr sz="1200">
-                <a:solidFill>
-                  <a:srgbClr val="F8FAFC"/>
-                </a:solidFill>
-              </a:defRPr>
-            </a:pPr>
-            <a:r>
-              <a:t>• Dual metric switch (Efficiency vs CPU %).</a:t>
-            </a:r>
-          </a:p>
-          <a:p>
-            <a:pPr>
-              <a:spcAft>
-                <a:spcPts val="600"/>
-              </a:spcAft>
-              <a:defRPr sz="1200">
-                <a:solidFill>
-                  <a:srgbClr val="F8FAFC"/>
-                </a:solidFill>
-              </a:defRPr>
-            </a:pPr>
-            <a:r>
-              <a:t>• Dynamic load balancing across active nodes.</a:t>
-            </a:r>
-          </a:p>
-          <a:p>
-            <a:pPr>
-              <a:spcAft>
-                <a:spcPts val="600"/>
-              </a:spcAft>
-              <a:defRPr sz="1200">
-                <a:solidFill>
-                  <a:srgbClr val="F8FAFC"/>
-                </a:solidFill>
-              </a:defRPr>
-            </a:pPr>
-            <a:r>
-              <a:t>• Interactive conversational AI cloud assistant.</a:t>
+              <a:t>AWS Cloud Integration</a:t>
+            </a:r>
+          </a:p>
+          <a:p>
+            <a:pPr>
+              <a:spcAft>
+                <a:spcPts val="500"/>
+              </a:spcAft>
+              <a:defRPr sz="1100">
+                <a:solidFill>
+                  <a:srgbClr val="F8FAFC"/>
+                </a:solidFill>
+              </a:defRPr>
+            </a:pPr>
+            <a:r>
+              <a:t>• AWS Boto3 SDK for multi-region access.</a:t>
+            </a:r>
+          </a:p>
+          <a:p>
+            <a:pPr>
+              <a:spcAft>
+                <a:spcPts val="500"/>
+              </a:spcAft>
+              <a:defRPr sz="1100">
+                <a:solidFill>
+                  <a:srgbClr val="F8FAFC"/>
+                </a:solidFill>
+              </a:defRPr>
+            </a:pPr>
+            <a:r>
+              <a:t>• Amazon EC2 for instance inventory &amp; volumes.</a:t>
+            </a:r>
+          </a:p>
+          <a:p>
+            <a:pPr>
+              <a:spcAft>
+                <a:spcPts val="500"/>
+              </a:spcAft>
+              <a:defRPr sz="1100">
+                <a:solidFill>
+                  <a:srgbClr val="F8FAFC"/>
+                </a:solidFill>
+              </a:defRPr>
+            </a:pPr>
+            <a:r>
+              <a:t>• Amazon CloudWatch for CPU &amp; network telemetry.</a:t>
+            </a:r>
+          </a:p>
+          <a:p>
+            <a:pPr>
+              <a:spcAft>
+                <a:spcPts val="500"/>
+              </a:spcAft>
+              <a:defRPr sz="1100">
+                <a:solidFill>
+                  <a:srgbClr val="F8FAFC"/>
+                </a:solidFill>
+              </a:defRPr>
+            </a:pPr>
+            <a:r>
+              <a:t>• AWS STS for zero-trust caller identity check.</a:t>
+            </a:r>
+          </a:p>
+          <a:p>
+            <a:pPr>
+              <a:spcAft>
+                <a:spcPts val="500"/>
+              </a:spcAft>
+              <a:defRPr sz="1100">
+                <a:solidFill>
+                  <a:srgbClr val="F8FAFC"/>
+                </a:solidFill>
+              </a:defRPr>
+            </a:pPr>
+            <a:r>
+              <a:t>• AWS Pricing API for regional grid factors.</a:t>
             </a:r>
           </a:p>
         </p:txBody>
@@ -6054,7 +6930,7 @@
         </p:nvSpPr>
         <p:spPr>
           <a:xfrm>
-            <a:off x="731520" y="457200"/>
+            <a:off x="731520" y="365760"/>
             <a:ext cx="10698480" cy="1097280"/>
           </a:xfrm>
           <a:prstGeom prst="rect">
@@ -6076,22 +6952,22 @@
               </a:defRPr>
             </a:pPr>
             <a:r>
-              <a:t>TECHNICAL BLUEPRINT</a:t>
+              <a:t>PROCESS LIFECYCLE</a:t>
             </a:r>
           </a:p>
           <a:p>
             <a:pPr>
               <a:spcBef>
-                <a:spcPts val="400"/>
+                <a:spcPts val="300"/>
               </a:spcBef>
-              <a:defRPr sz="2400" b="1">
-                <a:solidFill>
-                  <a:srgbClr val="F8FAFC"/>
-                </a:solidFill>
-              </a:defRPr>
-            </a:pPr>
-            <a:r>
-              <a:t>System Architecture &amp; Technology Stack</a:t>
+              <a:defRPr sz="2200" b="1">
+                <a:solidFill>
+                  <a:srgbClr val="F8FAFC"/>
+                </a:solidFill>
+              </a:defRPr>
+            </a:pPr>
+            <a:r>
+              <a:t>End-to-End Operational Workflow</a:t>
             </a:r>
           </a:p>
         </p:txBody>
@@ -6105,7 +6981,7 @@
         <p:spPr>
           <a:xfrm>
             <a:off x="731520" y="1645920"/>
-            <a:ext cx="3383280" cy="4572000"/>
+            <a:ext cx="2468880" cy="4663440"/>
           </a:xfrm>
           <a:prstGeom prst="roundRect">
             <a:avLst/>
@@ -6134,96 +7010,81 @@
           </a:fontRef>
         </p:style>
         <p:txBody>
-          <a:bodyPr rtlCol="0" anchor="ctr" wrap="square" lIns="274320" tIns="228600" rIns="274320" bIns="228600"/>
+          <a:bodyPr rtlCol="0" anchor="ctr" wrap="square" lIns="256032" tIns="201168" rIns="256032" bIns="201168"/>
           <a:lstStyle/>
           <a:p>
             <a:pPr algn="ctr">
               <a:spcAft>
-                <a:spcPts val="1200"/>
-              </a:spcAft>
-              <a:defRPr sz="1600" b="1">
+                <a:spcPts val="1000"/>
+              </a:spcAft>
+              <a:defRPr sz="1500" b="1">
                 <a:solidFill>
                   <a:srgbClr val="2563EB"/>
                 </a:solidFill>
               </a:defRPr>
             </a:pPr>
             <a:r>
-              <a:t>Frontend Tier</a:t>
-            </a:r>
-          </a:p>
-          <a:p>
-            <a:pPr>
-              <a:spcAft>
-                <a:spcPts val="600"/>
-              </a:spcAft>
-              <a:defRPr sz="1200">
-                <a:solidFill>
-                  <a:srgbClr val="F8FAFC"/>
-                </a:solidFill>
-              </a:defRPr>
-            </a:pPr>
-            <a:r>
-              <a:t>• React 18 Single Page Application (SPA).</a:t>
-            </a:r>
-          </a:p>
-          <a:p>
-            <a:pPr>
-              <a:spcAft>
-                <a:spcPts val="600"/>
-              </a:spcAft>
-              <a:defRPr sz="1200">
-                <a:solidFill>
-                  <a:srgbClr val="F8FAFC"/>
-                </a:solidFill>
-              </a:defRPr>
-            </a:pPr>
-            <a:r>
-              <a:t>• Vite for ultra-fast compilation.</a:t>
-            </a:r>
-          </a:p>
-          <a:p>
-            <a:pPr>
-              <a:spcAft>
-                <a:spcPts val="600"/>
-              </a:spcAft>
-              <a:defRPr sz="1200">
-                <a:solidFill>
-                  <a:srgbClr val="F8FAFC"/>
-                </a:solidFill>
-              </a:defRPr>
-            </a:pPr>
-            <a:r>
-              <a:t>• Glassmorphic custom CSS styling.</a:t>
-            </a:r>
-          </a:p>
-          <a:p>
-            <a:pPr>
-              <a:spcAft>
-                <a:spcPts val="600"/>
-              </a:spcAft>
-              <a:defRPr sz="1200">
-                <a:solidFill>
-                  <a:srgbClr val="F8FAFC"/>
-                </a:solidFill>
-              </a:defRPr>
-            </a:pPr>
-            <a:r>
-              <a:t>• Client-side secure token storage.</a:t>
-            </a:r>
-          </a:p>
-          <a:p>
-            <a:pPr>
-              <a:spcAft>
-                <a:spcPts val="600"/>
-              </a:spcAft>
-              <a:defRPr sz="1200">
-                <a:solidFill>
-                  <a:srgbClr val="F8FAFC"/>
-                </a:solidFill>
-              </a:defRPr>
-            </a:pPr>
-            <a:r>
-              <a:t>• Responsive across all screen sizes.</a:t>
+              <a:t>1. Authenticate</a:t>
+            </a:r>
+          </a:p>
+          <a:p>
+            <a:pPr>
+              <a:spcAft>
+                <a:spcPts val="500"/>
+              </a:spcAft>
+              <a:defRPr sz="1100">
+                <a:solidFill>
+                  <a:srgbClr val="F8FAFC"/>
+                </a:solidFill>
+              </a:defRPr>
+            </a:pPr>
+            <a:r>
+              <a:t>• Admin inputs IAM credentials on Dashboard.</a:t>
+            </a:r>
+          </a:p>
+          <a:p>
+            <a:pPr>
+              <a:spcAft>
+                <a:spcPts val="500"/>
+              </a:spcAft>
+              <a:defRPr sz="1100">
+                <a:solidFill>
+                  <a:srgbClr val="F8FAFC"/>
+                </a:solidFill>
+              </a:defRPr>
+            </a:pPr>
+            <a:r>
+              <a:t>• FastAPI calls sts.get_caller_identity().</a:t>
+            </a:r>
+          </a:p>
+          <a:p>
+            <a:pPr>
+              <a:spcAft>
+                <a:spcPts val="500"/>
+              </a:spcAft>
+              <a:defRPr sz="1100">
+                <a:solidFill>
+                  <a:srgbClr val="F8FAFC"/>
+                </a:solidFill>
+              </a:defRPr>
+            </a:pPr>
+            <a:r>
+              <a:t>• Validates Account ID &amp; Caller ARN.</a:t>
+            </a:r>
+          </a:p>
+          <a:p>
+            <a:pPr>
+              <a:spcAft>
+                <a:spcPts val="500"/>
+              </a:spcAft>
+              <a:defRPr sz="1100">
+                <a:solidFill>
+                  <a:srgbClr val="F8FAFC"/>
+                </a:solidFill>
+              </a:defRPr>
+            </a:pPr>
+            <a:r>
+              <a:t>• Saves to state with zero page reloads.</a:t>
             </a:r>
           </a:p>
         </p:txBody>
@@ -6236,8 +7097,125 @@
         </p:nvSpPr>
         <p:spPr>
           <a:xfrm>
-            <a:off x="4389120" y="1645920"/>
-            <a:ext cx="3383280" cy="4572000"/>
+            <a:off x="3474720" y="1645920"/>
+            <a:ext cx="2468880" cy="4663440"/>
+          </a:xfrm>
+          <a:prstGeom prst="roundRect">
+            <a:avLst/>
+          </a:prstGeom>
+          <a:solidFill>
+            <a:srgbClr val="131D35"/>
+          </a:solidFill>
+          <a:ln w="19050">
+            <a:solidFill>
+              <a:srgbClr val="2563EB"/>
+            </a:solidFill>
+          </a:ln>
+        </p:spPr>
+        <p:style>
+          <a:lnRef idx="1">
+            <a:schemeClr val="accent1"/>
+          </a:lnRef>
+          <a:fillRef idx="3">
+            <a:schemeClr val="accent1"/>
+          </a:fillRef>
+          <a:effectRef idx="2">
+            <a:schemeClr val="accent1"/>
+          </a:effectRef>
+          <a:fontRef idx="minor">
+            <a:schemeClr val="lt1"/>
+          </a:fontRef>
+        </p:style>
+        <p:txBody>
+          <a:bodyPr rtlCol="0" anchor="ctr" wrap="square" lIns="256032" tIns="201168" rIns="256032" bIns="201168"/>
+          <a:lstStyle/>
+          <a:p>
+            <a:pPr algn="ctr">
+              <a:spcAft>
+                <a:spcPts val="1000"/>
+              </a:spcAft>
+              <a:defRPr sz="1500" b="1">
+                <a:solidFill>
+                  <a:srgbClr val="2563EB"/>
+                </a:solidFill>
+              </a:defRPr>
+            </a:pPr>
+            <a:r>
+              <a:t>2. Ingest</a:t>
+            </a:r>
+          </a:p>
+          <a:p>
+            <a:pPr>
+              <a:spcAft>
+                <a:spcPts val="500"/>
+              </a:spcAft>
+              <a:defRPr sz="1100">
+                <a:solidFill>
+                  <a:srgbClr val="F8FAFC"/>
+                </a:solidFill>
+              </a:defRPr>
+            </a:pPr>
+            <a:r>
+              <a:t>• Parallel Boto3 workers query CloudWatch.</a:t>
+            </a:r>
+          </a:p>
+          <a:p>
+            <a:pPr>
+              <a:spcAft>
+                <a:spcPts val="500"/>
+              </a:spcAft>
+              <a:defRPr sz="1100">
+                <a:solidFill>
+                  <a:srgbClr val="F8FAFC"/>
+                </a:solidFill>
+              </a:defRPr>
+            </a:pPr>
+            <a:r>
+              <a:t>• Retrieves 24h &amp; 7d CPU averages.</a:t>
+            </a:r>
+          </a:p>
+          <a:p>
+            <a:pPr>
+              <a:spcAft>
+                <a:spcPts val="500"/>
+              </a:spcAft>
+              <a:defRPr sz="1100">
+                <a:solidFill>
+                  <a:srgbClr val="F8FAFC"/>
+                </a:solidFill>
+              </a:defRPr>
+            </a:pPr>
+            <a:r>
+              <a:t>• Fetches EC2 instance state &amp; tags.</a:t>
+            </a:r>
+          </a:p>
+          <a:p>
+            <a:pPr>
+              <a:spcAft>
+                <a:spcPts val="500"/>
+              </a:spcAft>
+              <a:defRPr sz="1100">
+                <a:solidFill>
+                  <a:srgbClr val="F8FAFC"/>
+                </a:solidFill>
+              </a:defRPr>
+            </a:pPr>
+            <a:r>
+              <a:t>• Aggregates network in/out throughput.</a:t>
+            </a:r>
+          </a:p>
+        </p:txBody>
+      </p:sp>
+      <p:sp>
+        <p:nvSpPr>
+          <p:cNvPr id="5" name="Rounded Rectangle 4"/>
+          <p:cNvSpPr/>
+          <p:nvPr/>
+        </p:nvSpPr>
+        <p:spPr>
+          <a:xfrm>
+            <a:off x="6217920" y="1645920"/>
+            <a:ext cx="2468880" cy="4663440"/>
           </a:xfrm>
           <a:prstGeom prst="roundRect">
             <a:avLst/>
@@ -6266,110 +7244,95 @@
           </a:fontRef>
         </p:style>
         <p:txBody>
-          <a:bodyPr rtlCol="0" anchor="ctr" wrap="square" lIns="274320" tIns="228600" rIns="274320" bIns="228600"/>
+          <a:bodyPr rtlCol="0" anchor="ctr" wrap="square" lIns="256032" tIns="201168" rIns="256032" bIns="201168"/>
           <a:lstStyle/>
           <a:p>
             <a:pPr algn="ctr">
               <a:spcAft>
-                <a:spcPts val="1200"/>
-              </a:spcAft>
-              <a:defRPr sz="1600" b="1">
+                <a:spcPts val="1000"/>
+              </a:spcAft>
+              <a:defRPr sz="1500" b="1">
                 <a:solidFill>
                   <a:srgbClr val="F59E0B"/>
                 </a:solidFill>
               </a:defRPr>
             </a:pPr>
             <a:r>
-              <a:t>Backend Orchestration</a:t>
-            </a:r>
-          </a:p>
-          <a:p>
-            <a:pPr>
-              <a:spcAft>
-                <a:spcPts val="600"/>
-              </a:spcAft>
-              <a:defRPr sz="1200">
-                <a:solidFill>
-                  <a:srgbClr val="F8FAFC"/>
-                </a:solidFill>
-              </a:defRPr>
-            </a:pPr>
-            <a:r>
-              <a:t>• FastAPI (Python 3.13) async REST gateway.</a:t>
-            </a:r>
-          </a:p>
-          <a:p>
-            <a:pPr>
-              <a:spcAft>
-                <a:spcPts val="600"/>
-              </a:spcAft>
-              <a:defRPr sz="1200">
-                <a:solidFill>
-                  <a:srgbClr val="F8FAFC"/>
-                </a:solidFill>
-              </a:defRPr>
-            </a:pPr>
-            <a:r>
-              <a:t>• Pydantic strict schema validation.</a:t>
-            </a:r>
-          </a:p>
-          <a:p>
-            <a:pPr>
-              <a:spcAft>
-                <a:spcPts val="600"/>
-              </a:spcAft>
-              <a:defRPr sz="1200">
-                <a:solidFill>
-                  <a:srgbClr val="F8FAFC"/>
-                </a:solidFill>
-              </a:defRPr>
-            </a:pPr>
-            <a:r>
-              <a:t>• Modular domain services architecture.</a:t>
-            </a:r>
-          </a:p>
-          <a:p>
-            <a:pPr>
-              <a:spcAft>
-                <a:spcPts val="600"/>
-              </a:spcAft>
-              <a:defRPr sz="1200">
-                <a:solidFill>
-                  <a:srgbClr val="F8FAFC"/>
-                </a:solidFill>
-              </a:defRPr>
-            </a:pPr>
-            <a:r>
-              <a:t>• High-throughput non-blocking endpoints.</a:t>
-            </a:r>
-          </a:p>
-          <a:p>
-            <a:pPr>
-              <a:spcAft>
-                <a:spcPts val="600"/>
-              </a:spcAft>
-              <a:defRPr sz="1200">
-                <a:solidFill>
-                  <a:srgbClr val="F8FAFC"/>
-                </a:solidFill>
-              </a:defRPr>
-            </a:pPr>
-            <a:r>
-              <a:t>• Zero-leak security error handling.</a:t>
-            </a:r>
-          </a:p>
-        </p:txBody>
-      </p:sp>
-      <p:sp>
-        <p:nvSpPr>
-          <p:cNvPr id="5" name="Rounded Rectangle 4"/>
+              <a:t>3. Analyze &amp; Model</a:t>
+            </a:r>
+          </a:p>
+          <a:p>
+            <a:pPr>
+              <a:spcAft>
+                <a:spcPts val="500"/>
+              </a:spcAft>
+              <a:defRPr sz="1100">
+                <a:solidFill>
+                  <a:srgbClr val="F8FAFC"/>
+                </a:solidFill>
+              </a:defRPr>
+            </a:pPr>
+            <a:r>
+              <a:t>• Security rules evaluate open ports &amp; EBS.</a:t>
+            </a:r>
+          </a:p>
+          <a:p>
+            <a:pPr>
+              <a:spcAft>
+                <a:spcPts val="500"/>
+              </a:spcAft>
+              <a:defRPr sz="1100">
+                <a:solidFill>
+                  <a:srgbClr val="F8FAFC"/>
+                </a:solidFill>
+              </a:defRPr>
+            </a:pPr>
+            <a:r>
+              <a:t>• Computes Well-Architected score (0-100).</a:t>
+            </a:r>
+          </a:p>
+          <a:p>
+            <a:pPr>
+              <a:spcAft>
+                <a:spcPts val="500"/>
+              </a:spcAft>
+              <a:defRPr sz="1100">
+                <a:solidFill>
+                  <a:srgbClr val="F8FAFC"/>
+                </a:solidFill>
+              </a:defRPr>
+            </a:pPr>
+            <a:r>
+              <a:t>• Energy engine computes continuous curve.</a:t>
+            </a:r>
+          </a:p>
+          <a:p>
+            <a:pPr>
+              <a:spcAft>
+                <a:spcPts val="500"/>
+              </a:spcAft>
+              <a:defRPr sz="1100">
+                <a:solidFill>
+                  <a:srgbClr val="F8FAFC"/>
+                </a:solidFill>
+              </a:defRPr>
+            </a:pPr>
+            <a:r>
+              <a:t>• Translates CPU to kWh and kg CO2e.</a:t>
+            </a:r>
+          </a:p>
+        </p:txBody>
+      </p:sp>
+      <p:sp>
+        <p:nvSpPr>
+          <p:cNvPr id="6" name="Rounded Rectangle 5"/>
           <p:cNvSpPr/>
           <p:nvPr/>
         </p:nvSpPr>
         <p:spPr>
           <a:xfrm>
-            <a:off x="8046720" y="1645920"/>
-            <a:ext cx="3383280" cy="4572000"/>
+            <a:off x="8961120" y="1645920"/>
+            <a:ext cx="2468880" cy="4663440"/>
           </a:xfrm>
           <a:prstGeom prst="roundRect">
             <a:avLst/>
@@ -6398,96 +7361,81 @@
           </a:fontRef>
         </p:style>
         <p:txBody>
-          <a:bodyPr rtlCol="0" anchor="ctr" wrap="square" lIns="274320" tIns="228600" rIns="274320" bIns="228600"/>
+          <a:bodyPr rtlCol="0" anchor="ctr" wrap="square" lIns="256032" tIns="201168" rIns="256032" bIns="201168"/>
           <a:lstStyle/>
           <a:p>
             <a:pPr algn="ctr">
               <a:spcAft>
-                <a:spcPts val="1200"/>
-              </a:spcAft>
-              <a:defRPr sz="1600" b="1">
+                <a:spcPts val="1000"/>
+              </a:spcAft>
+              <a:defRPr sz="1500" b="1">
                 <a:solidFill>
                   <a:srgbClr val="10B981"/>
                 </a:solidFill>
               </a:defRPr>
             </a:pPr>
             <a:r>
-              <a:t>AWS Cloud Integration</a:t>
-            </a:r>
-          </a:p>
-          <a:p>
-            <a:pPr>
-              <a:spcAft>
-                <a:spcPts val="600"/>
-              </a:spcAft>
-              <a:defRPr sz="1200">
-                <a:solidFill>
-                  <a:srgbClr val="F8FAFC"/>
-                </a:solidFill>
-              </a:defRPr>
-            </a:pPr>
-            <a:r>
-              <a:t>• Boto3 SDK for Amazon Web Services.</a:t>
-            </a:r>
-          </a:p>
-          <a:p>
-            <a:pPr>
-              <a:spcAft>
-                <a:spcPts val="600"/>
-              </a:spcAft>
-              <a:defRPr sz="1200">
-                <a:solidFill>
-                  <a:srgbClr val="F8FAFC"/>
-                </a:solidFill>
-              </a:defRPr>
-            </a:pPr>
-            <a:r>
-              <a:t>• Amazon EC2 for instance &amp; volume data.</a:t>
-            </a:r>
-          </a:p>
-          <a:p>
-            <a:pPr>
-              <a:spcAft>
-                <a:spcPts val="600"/>
-              </a:spcAft>
-              <a:defRPr sz="1200">
-                <a:solidFill>
-                  <a:srgbClr val="F8FAFC"/>
-                </a:solidFill>
-              </a:defRPr>
-            </a:pPr>
-            <a:r>
-              <a:t>• Amazon CloudWatch for CPU &amp; network telemetry.</a:t>
-            </a:r>
-          </a:p>
-          <a:p>
-            <a:pPr>
-              <a:spcAft>
-                <a:spcPts val="600"/>
-              </a:spcAft>
-              <a:defRPr sz="1200">
-                <a:solidFill>
-                  <a:srgbClr val="F8FAFC"/>
-                </a:solidFill>
-              </a:defRPr>
-            </a:pPr>
-            <a:r>
-              <a:t>• AWS STS for zero-trust identity verification.</a:t>
-            </a:r>
-          </a:p>
-          <a:p>
-            <a:pPr>
-              <a:spcAft>
-                <a:spcPts val="600"/>
-              </a:spcAft>
-              <a:defRPr sz="1200">
-                <a:solidFill>
-                  <a:srgbClr val="F8FAFC"/>
-                </a:solidFill>
-              </a:defRPr>
-            </a:pPr>
-            <a:r>
-              <a:t>• AWS Pricing API for regional emission factors.</a:t>
+              <a:t>4. Remediate</a:t>
+            </a:r>
+          </a:p>
+          <a:p>
+            <a:pPr>
+              <a:spcAft>
+                <a:spcPts val="500"/>
+              </a:spcAft>
+              <a:defRPr sz="1100">
+                <a:solidFill>
+                  <a:srgbClr val="F8FAFC"/>
+                </a:solidFill>
+              </a:defRPr>
+            </a:pPr>
+            <a:r>
+              <a:t>• Emits copy-paste ready AWS CLI fixes.</a:t>
+            </a:r>
+          </a:p>
+          <a:p>
+            <a:pPr>
+              <a:spcAft>
+                <a:spcPts val="500"/>
+              </a:spcAft>
+              <a:defRPr sz="1100">
+                <a:solidFill>
+                  <a:srgbClr val="F8FAFC"/>
+                </a:solidFill>
+              </a:defRPr>
+            </a:pPr>
+            <a:r>
+              <a:t>• Generates instance downscaling advice.</a:t>
+            </a:r>
+          </a:p>
+          <a:p>
+            <a:pPr>
+              <a:spcAft>
+                <a:spcPts val="500"/>
+              </a:spcAft>
+              <a:defRPr sz="1100">
+                <a:solidFill>
+                  <a:srgbClr val="F8FAFC"/>
+                </a:solidFill>
+              </a:defRPr>
+            </a:pPr>
+            <a:r>
+              <a:t>• Load balancer suggests traffic rebalance.</a:t>
+            </a:r>
+          </a:p>
+          <a:p>
+            <a:pPr>
+              <a:spcAft>
+                <a:spcPts val="500"/>
+              </a:spcAft>
+              <a:defRPr sz="1100">
+                <a:solidFill>
+                  <a:srgbClr val="F8FAFC"/>
+                </a:solidFill>
+              </a:defRPr>
+            </a:pPr>
+            <a:r>
+              <a:t>• AI Agent explains findings in plain text.</a:t>
             </a:r>
           </a:p>
         </p:txBody>
@@ -6526,7 +7474,7 @@
         </p:nvSpPr>
         <p:spPr>
           <a:xfrm>
-            <a:off x="731520" y="457200"/>
+            <a:off x="731520" y="365760"/>
             <a:ext cx="10698480" cy="1097280"/>
           </a:xfrm>
           <a:prstGeom prst="rect">
@@ -6548,36 +7496,60 @@
               </a:defRPr>
             </a:pPr>
             <a:r>
-              <a:t>PROCESS LIFECYCLE</a:t>
+              <a:t>MODULE 1 WORKING</a:t>
             </a:r>
           </a:p>
           <a:p>
             <a:pPr>
               <a:spcBef>
-                <a:spcPts val="400"/>
+                <a:spcPts val="300"/>
               </a:spcBef>
-              <a:defRPr sz="2400" b="1">
-                <a:solidFill>
-                  <a:srgbClr val="F8FAFC"/>
-                </a:solidFill>
-              </a:defRPr>
-            </a:pPr>
-            <a:r>
-              <a:t>End-to-End Operational Workflow</a:t>
-            </a:r>
-          </a:p>
-        </p:txBody>
-      </p:sp>
-      <p:sp>
-        <p:nvSpPr>
-          <p:cNvPr id="3" name="Rounded Rectangle 2"/>
-          <p:cNvSpPr/>
+              <a:defRPr sz="2200" b="1">
+                <a:solidFill>
+                  <a:srgbClr val="F8FAFC"/>
+                </a:solidFill>
+              </a:defRPr>
+            </a:pPr>
+            <a:r>
+              <a:t>Dashboard: Global AWS Connection Center &amp; Live Telemetry</a:t>
+            </a:r>
+          </a:p>
+        </p:txBody>
+      </p:sp>
+      <p:pic>
+        <p:nvPicPr>
+          <p:cNvPr id="3" name="Picture 2" descr="dashboard_top.png"/>
+          <p:cNvPicPr>
+            <a:picLocks noChangeAspect="1"/>
+          </p:cNvPicPr>
           <p:nvPr/>
-        </p:nvSpPr>
+        </p:nvPicPr>
+        <p:blipFill>
+          <a:blip r:embed="rId2"/>
+          <a:stretch>
+            <a:fillRect/>
+          </a:stretch>
+        </p:blipFill>
         <p:spPr>
           <a:xfrm>
             <a:off x="731520" y="1645920"/>
-            <a:ext cx="2468880" cy="4572000"/>
+            <a:ext cx="6217920" cy="2938939"/>
+          </a:xfrm>
+          <a:prstGeom prst="rect">
+            <a:avLst/>
+          </a:prstGeom>
+        </p:spPr>
+      </p:pic>
+      <p:sp>
+        <p:nvSpPr>
+          <p:cNvPr id="4" name="Rounded Rectangle 3"/>
+          <p:cNvSpPr/>
+          <p:nvPr/>
+        </p:nvSpPr>
+        <p:spPr>
+          <a:xfrm>
+            <a:off x="7132320" y="1645920"/>
+            <a:ext cx="4297680" cy="4663440"/>
           </a:xfrm>
           <a:prstGeom prst="roundRect">
             <a:avLst/>
@@ -6606,432 +7578,96 @@
           </a:fontRef>
         </p:style>
         <p:txBody>
-          <a:bodyPr rtlCol="0" anchor="ctr" wrap="square" lIns="274320" tIns="228600" rIns="274320" bIns="228600"/>
+          <a:bodyPr rtlCol="0" anchor="ctr" wrap="square" lIns="256032" tIns="201168" rIns="256032" bIns="201168"/>
           <a:lstStyle/>
           <a:p>
             <a:pPr algn="ctr">
               <a:spcAft>
-                <a:spcPts val="1200"/>
-              </a:spcAft>
-              <a:defRPr sz="1600" b="1">
+                <a:spcPts val="1000"/>
+              </a:spcAft>
+              <a:defRPr sz="1500" b="1">
                 <a:solidFill>
                   <a:srgbClr val="2563EB"/>
                 </a:solidFill>
               </a:defRPr>
             </a:pPr>
             <a:r>
-              <a:t>Step 1: Connect</a:t>
-            </a:r>
-          </a:p>
-          <a:p>
-            <a:pPr>
-              <a:spcAft>
-                <a:spcPts val="600"/>
-              </a:spcAft>
-              <a:defRPr sz="1200">
-                <a:solidFill>
-                  <a:srgbClr val="F8FAFC"/>
-                </a:solidFill>
-              </a:defRPr>
-            </a:pPr>
-            <a:r>
-              <a:t>• Input IAM credentials on Dashboard.</a:t>
-            </a:r>
-          </a:p>
-          <a:p>
-            <a:pPr>
-              <a:spcAft>
-                <a:spcPts val="600"/>
-              </a:spcAft>
-              <a:defRPr sz="1200">
-                <a:solidFill>
-                  <a:srgbClr val="F8FAFC"/>
-                </a:solidFill>
-              </a:defRPr>
-            </a:pPr>
-            <a:r>
-              <a:t>• Target region selection.</a:t>
-            </a:r>
-          </a:p>
-          <a:p>
-            <a:pPr>
-              <a:spcAft>
-                <a:spcPts val="600"/>
-              </a:spcAft>
-              <a:defRPr sz="1200">
-                <a:solidFill>
-                  <a:srgbClr val="F8FAFC"/>
-                </a:solidFill>
-              </a:defRPr>
-            </a:pPr>
-            <a:r>
-              <a:t>• Support for STS session tokens.</a:t>
-            </a:r>
-          </a:p>
-          <a:p>
-            <a:pPr>
-              <a:spcAft>
-                <a:spcPts val="600"/>
-              </a:spcAft>
-              <a:defRPr sz="1200">
-                <a:solidFill>
-                  <a:srgbClr val="F8FAFC"/>
-                </a:solidFill>
-              </a:defRPr>
-            </a:pPr>
-            <a:r>
-              <a:t>• Client-side encryption.</a:t>
-            </a:r>
-          </a:p>
-        </p:txBody>
-      </p:sp>
-      <p:sp>
-        <p:nvSpPr>
-          <p:cNvPr id="4" name="Rounded Rectangle 3"/>
-          <p:cNvSpPr/>
-          <p:nvPr/>
-        </p:nvSpPr>
-        <p:spPr>
-          <a:xfrm>
-            <a:off x="3474720" y="1645920"/>
-            <a:ext cx="2468880" cy="4572000"/>
-          </a:xfrm>
-          <a:prstGeom prst="roundRect">
-            <a:avLst/>
-          </a:prstGeom>
-          <a:solidFill>
-            <a:srgbClr val="131D35"/>
-          </a:solidFill>
-          <a:ln w="19050">
-            <a:solidFill>
-              <a:srgbClr val="2563EB"/>
-            </a:solidFill>
-          </a:ln>
-        </p:spPr>
-        <p:style>
-          <a:lnRef idx="1">
-            <a:schemeClr val="accent1"/>
-          </a:lnRef>
-          <a:fillRef idx="3">
-            <a:schemeClr val="accent1"/>
-          </a:fillRef>
-          <a:effectRef idx="2">
-            <a:schemeClr val="accent1"/>
-          </a:effectRef>
-          <a:fontRef idx="minor">
-            <a:schemeClr val="lt1"/>
-          </a:fontRef>
-        </p:style>
-        <p:txBody>
-          <a:bodyPr rtlCol="0" anchor="ctr" wrap="square" lIns="274320" tIns="228600" rIns="274320" bIns="228600"/>
-          <a:lstStyle/>
-          <a:p>
-            <a:pPr algn="ctr">
-              <a:spcAft>
-                <a:spcPts val="1200"/>
-              </a:spcAft>
-              <a:defRPr sz="1600" b="1">
-                <a:solidFill>
-                  <a:srgbClr val="2563EB"/>
-                </a:solidFill>
-              </a:defRPr>
-            </a:pPr>
-            <a:r>
-              <a:t>Step 2: Ingest</a:t>
-            </a:r>
-          </a:p>
-          <a:p>
-            <a:pPr>
-              <a:spcAft>
-                <a:spcPts val="600"/>
-              </a:spcAft>
-              <a:defRPr sz="1200">
-                <a:solidFill>
-                  <a:srgbClr val="F8FAFC"/>
-                </a:solidFill>
-              </a:defRPr>
-            </a:pPr>
-            <a:r>
-              <a:t>• FastAPI queries AWS CloudWatch.</a:t>
-            </a:r>
-          </a:p>
-          <a:p>
-            <a:pPr>
-              <a:spcAft>
-                <a:spcPts val="600"/>
-              </a:spcAft>
-              <a:defRPr sz="1200">
-                <a:solidFill>
-                  <a:srgbClr val="F8FAFC"/>
-                </a:solidFill>
-              </a:defRPr>
-            </a:pPr>
-            <a:r>
-              <a:t>• Extracts 24h/7d CPU averages.</a:t>
-            </a:r>
-          </a:p>
-          <a:p>
-            <a:pPr>
-              <a:spcAft>
-                <a:spcPts val="600"/>
-              </a:spcAft>
-              <a:defRPr sz="1200">
-                <a:solidFill>
-                  <a:srgbClr val="F8FAFC"/>
-                </a:solidFill>
-              </a:defRPr>
-            </a:pPr>
-            <a:r>
-              <a:t>• Fetches active EC2 node inventory.</a:t>
-            </a:r>
-          </a:p>
-          <a:p>
-            <a:pPr>
-              <a:spcAft>
-                <a:spcPts val="600"/>
-              </a:spcAft>
-              <a:defRPr sz="1200">
-                <a:solidFill>
-                  <a:srgbClr val="F8FAFC"/>
-                </a:solidFill>
-              </a:defRPr>
-            </a:pPr>
-            <a:r>
-              <a:t>• Aggregates network in/out.</a:t>
-            </a:r>
-          </a:p>
-        </p:txBody>
-      </p:sp>
-      <p:sp>
-        <p:nvSpPr>
-          <p:cNvPr id="5" name="Rounded Rectangle 4"/>
-          <p:cNvSpPr/>
-          <p:nvPr/>
-        </p:nvSpPr>
-        <p:spPr>
-          <a:xfrm>
-            <a:off x="6217920" y="1645920"/>
-            <a:ext cx="2468880" cy="4572000"/>
-          </a:xfrm>
-          <a:prstGeom prst="roundRect">
-            <a:avLst/>
-          </a:prstGeom>
-          <a:solidFill>
-            <a:srgbClr val="131D35"/>
-          </a:solidFill>
-          <a:ln w="19050">
-            <a:solidFill>
-              <a:srgbClr val="F59E0B"/>
-            </a:solidFill>
-          </a:ln>
-        </p:spPr>
-        <p:style>
-          <a:lnRef idx="1">
-            <a:schemeClr val="accent1"/>
-          </a:lnRef>
-          <a:fillRef idx="3">
-            <a:schemeClr val="accent1"/>
-          </a:fillRef>
-          <a:effectRef idx="2">
-            <a:schemeClr val="accent1"/>
-          </a:effectRef>
-          <a:fontRef idx="minor">
-            <a:schemeClr val="lt1"/>
-          </a:fontRef>
-        </p:style>
-        <p:txBody>
-          <a:bodyPr rtlCol="0" anchor="ctr" wrap="square" lIns="274320" tIns="228600" rIns="274320" bIns="228600"/>
-          <a:lstStyle/>
-          <a:p>
-            <a:pPr algn="ctr">
-              <a:spcAft>
-                <a:spcPts val="1200"/>
-              </a:spcAft>
-              <a:defRPr sz="1600" b="1">
-                <a:solidFill>
-                  <a:srgbClr val="F59E0B"/>
-                </a:solidFill>
-              </a:defRPr>
-            </a:pPr>
-            <a:r>
-              <a:t>Step 3: Analyze</a:t>
-            </a:r>
-          </a:p>
-          <a:p>
-            <a:pPr>
-              <a:spcAft>
-                <a:spcPts val="600"/>
-              </a:spcAft>
-              <a:defRPr sz="1200">
-                <a:solidFill>
-                  <a:srgbClr val="F8FAFC"/>
-                </a:solidFill>
-              </a:defRPr>
-            </a:pPr>
-            <a:r>
-              <a:t>• Security audit executes rule engine.</a:t>
-            </a:r>
-          </a:p>
-          <a:p>
-            <a:pPr>
-              <a:spcAft>
-                <a:spcPts val="600"/>
-              </a:spcAft>
-              <a:defRPr sz="1200">
-                <a:solidFill>
-                  <a:srgbClr val="F8FAFC"/>
-                </a:solidFill>
-              </a:defRPr>
-            </a:pPr>
-            <a:r>
-              <a:t>• Energy service computes power curve.</a:t>
-            </a:r>
-          </a:p>
-          <a:p>
-            <a:pPr>
-              <a:spcAft>
-                <a:spcPts val="600"/>
-              </a:spcAft>
-              <a:defRPr sz="1200">
-                <a:solidFill>
-                  <a:srgbClr val="F8FAFC"/>
-                </a:solidFill>
-              </a:defRPr>
-            </a:pPr>
-            <a:r>
-              <a:t>• Load balancer checks workload variance.</a:t>
-            </a:r>
-          </a:p>
-          <a:p>
-            <a:pPr>
-              <a:spcAft>
-                <a:spcPts val="600"/>
-              </a:spcAft>
-              <a:defRPr sz="1200">
-                <a:solidFill>
-                  <a:srgbClr val="F8FAFC"/>
-                </a:solidFill>
-              </a:defRPr>
-            </a:pPr>
-            <a:r>
-              <a:t>• AI model summarizes findings.</a:t>
-            </a:r>
-          </a:p>
-        </p:txBody>
-      </p:sp>
-      <p:sp>
-        <p:nvSpPr>
-          <p:cNvPr id="6" name="Rounded Rectangle 5"/>
-          <p:cNvSpPr/>
-          <p:nvPr/>
-        </p:nvSpPr>
-        <p:spPr>
-          <a:xfrm>
-            <a:off x="8961120" y="1645920"/>
-            <a:ext cx="2468880" cy="4572000"/>
-          </a:xfrm>
-          <a:prstGeom prst="roundRect">
-            <a:avLst/>
-          </a:prstGeom>
-          <a:solidFill>
-            <a:srgbClr val="131D35"/>
-          </a:solidFill>
-          <a:ln w="19050">
-            <a:solidFill>
-              <a:srgbClr val="10B981"/>
-            </a:solidFill>
-          </a:ln>
-        </p:spPr>
-        <p:style>
-          <a:lnRef idx="1">
-            <a:schemeClr val="accent1"/>
-          </a:lnRef>
-          <a:fillRef idx="3">
-            <a:schemeClr val="accent1"/>
-          </a:fillRef>
-          <a:effectRef idx="2">
-            <a:schemeClr val="accent1"/>
-          </a:effectRef>
-          <a:fontRef idx="minor">
-            <a:schemeClr val="lt1"/>
-          </a:fontRef>
-        </p:style>
-        <p:txBody>
-          <a:bodyPr rtlCol="0" anchor="ctr" wrap="square" lIns="274320" tIns="228600" rIns="274320" bIns="228600"/>
-          <a:lstStyle/>
-          <a:p>
-            <a:pPr algn="ctr">
-              <a:spcAft>
-                <a:spcPts val="1200"/>
-              </a:spcAft>
-              <a:defRPr sz="1600" b="1">
-                <a:solidFill>
-                  <a:srgbClr val="10B981"/>
-                </a:solidFill>
-              </a:defRPr>
-            </a:pPr>
-            <a:r>
-              <a:t>Step 4: Remediate</a:t>
-            </a:r>
-          </a:p>
-          <a:p>
-            <a:pPr>
-              <a:spcAft>
-                <a:spcPts val="600"/>
-              </a:spcAft>
-              <a:defRPr sz="1200">
-                <a:solidFill>
-                  <a:srgbClr val="F8FAFC"/>
-                </a:solidFill>
-              </a:defRPr>
-            </a:pPr>
-            <a:r>
-              <a:t>• CLI scripts generated immediately.</a:t>
-            </a:r>
-          </a:p>
-          <a:p>
-            <a:pPr>
-              <a:spcAft>
-                <a:spcPts val="600"/>
-              </a:spcAft>
-              <a:defRPr sz="1200">
-                <a:solidFill>
-                  <a:srgbClr val="F8FAFC"/>
-                </a:solidFill>
-              </a:defRPr>
-            </a:pPr>
-            <a:r>
-              <a:t>• Downscaling recommendations provided.</a:t>
-            </a:r>
-          </a:p>
-          <a:p>
-            <a:pPr>
-              <a:spcAft>
-                <a:spcPts val="600"/>
-              </a:spcAft>
-              <a:defRPr sz="1200">
-                <a:solidFill>
-                  <a:srgbClr val="F8FAFC"/>
-                </a:solidFill>
-              </a:defRPr>
-            </a:pPr>
-            <a:r>
-              <a:t>• Traffic rebalance suggested.</a:t>
-            </a:r>
-          </a:p>
-          <a:p>
-            <a:pPr>
-              <a:spcAft>
-                <a:spcPts val="600"/>
-              </a:spcAft>
-              <a:defRPr sz="1200">
-                <a:solidFill>
-                  <a:srgbClr val="F8FAFC"/>
-                </a:solidFill>
-              </a:defRPr>
-            </a:pPr>
-            <a:r>
-              <a:t>• Continuous posture improvement.</a:t>
+              <a:t>How it Works (My Implementation)</a:t>
+            </a:r>
+          </a:p>
+          <a:p>
+            <a:pPr>
+              <a:spcAft>
+                <a:spcPts val="500"/>
+              </a:spcAft>
+              <a:defRPr sz="1100">
+                <a:solidFill>
+                  <a:srgbClr val="F8FAFC"/>
+                </a:solidFill>
+              </a:defRPr>
+            </a:pPr>
+            <a:r>
+              <a:t>• Single Source of Truth: Centralized IAM authentication banner directly on the Dashboard.</a:t>
+            </a:r>
+          </a:p>
+          <a:p>
+            <a:pPr>
+              <a:spcAft>
+                <a:spcPts val="500"/>
+              </a:spcAft>
+              <a:defRPr sz="1100">
+                <a:solidFill>
+                  <a:srgbClr val="F8FAFC"/>
+                </a:solidFill>
+              </a:defRPr>
+            </a:pPr>
+            <a:r>
+              <a:t>• Live STS Identity: Validated Account: 970295636496, Region: ap-south-1 (Mumbai).</a:t>
+            </a:r>
+          </a:p>
+          <a:p>
+            <a:pPr>
+              <a:spcAft>
+                <a:spcPts val="500"/>
+              </a:spcAft>
+              <a:defRPr sz="1100">
+                <a:solidFill>
+                  <a:srgbClr val="F8FAFC"/>
+                </a:solidFill>
+              </a:defRPr>
+            </a:pPr>
+            <a:r>
+              <a:t>• Global Synchronization: Credentials entered here automatically apply across Security, Energy, Load Balancing &amp; Providers.</a:t>
+            </a:r>
+          </a:p>
+          <a:p>
+            <a:pPr>
+              <a:spcAft>
+                <a:spcPts val="500"/>
+              </a:spcAft>
+              <a:defRPr sz="1100">
+                <a:solidFill>
+                  <a:srgbClr val="F8FAFC"/>
+                </a:solidFill>
+              </a:defRPr>
+            </a:pPr>
+            <a:r>
+              <a:t>• Real CloudWatch Telemetry: Live 2.68% CPU gauge and 7-hour historical CPU graph from active EC2 instance.</a:t>
+            </a:r>
+          </a:p>
+          <a:p>
+            <a:pPr>
+              <a:spcAft>
+                <a:spcPts val="500"/>
+              </a:spcAft>
+              <a:defRPr sz="1100">
+                <a:solidFill>
+                  <a:srgbClr val="F8FAFC"/>
+                </a:solidFill>
+              </a:defRPr>
+            </a:pPr>
+            <a:r>
+              <a:t>• Cloud Health Status: Real-time health score (100/100 Live AWS infrastructure).</a:t>
             </a:r>
           </a:p>
         </p:txBody>
@@ -7070,7 +7706,7 @@
         </p:nvSpPr>
         <p:spPr>
           <a:xfrm>
-            <a:off x="731520" y="457200"/>
+            <a:off x="731520" y="365760"/>
             <a:ext cx="10698480" cy="1097280"/>
           </a:xfrm>
           <a:prstGeom prst="rect">
@@ -7092,36 +7728,60 @@
               </a:defRPr>
             </a:pPr>
             <a:r>
-              <a:t>CORE FEATURE</a:t>
+              <a:t>MODULE 2 WORKING</a:t>
             </a:r>
           </a:p>
           <a:p>
             <a:pPr>
               <a:spcBef>
-                <a:spcPts val="400"/>
+                <a:spcPts val="300"/>
               </a:spcBef>
-              <a:defRPr sz="2400" b="1">
-                <a:solidFill>
-                  <a:srgbClr val="F8FAFC"/>
-                </a:solidFill>
-              </a:defRPr>
-            </a:pPr>
-            <a:r>
-              <a:t>Automated Cloud Security &amp; Remediation Scanner</a:t>
-            </a:r>
-          </a:p>
-        </p:txBody>
-      </p:sp>
-      <p:sp>
-        <p:nvSpPr>
-          <p:cNvPr id="3" name="Rounded Rectangle 2"/>
-          <p:cNvSpPr/>
+              <a:defRPr sz="2200" b="1">
+                <a:solidFill>
+                  <a:srgbClr val="F8FAFC"/>
+                </a:solidFill>
+              </a:defRPr>
+            </a:pPr>
+            <a:r>
+              <a:t>Dashboard: Multi-Cloud Overview &amp; Active EC2 Inventory</a:t>
+            </a:r>
+          </a:p>
+        </p:txBody>
+      </p:sp>
+      <p:pic>
+        <p:nvPicPr>
+          <p:cNvPr id="3" name="Picture 2" descr="dashboard_bottom.png"/>
+          <p:cNvPicPr>
+            <a:picLocks noChangeAspect="1"/>
+          </p:cNvPicPr>
           <p:nvPr/>
-        </p:nvSpPr>
+        </p:nvPicPr>
+        <p:blipFill>
+          <a:blip r:embed="rId2"/>
+          <a:stretch>
+            <a:fillRect/>
+          </a:stretch>
+        </p:blipFill>
         <p:spPr>
           <a:xfrm>
             <a:off x="731520" y="1645920"/>
-            <a:ext cx="5120640" cy="4572000"/>
+            <a:ext cx="6217920" cy="2908578"/>
+          </a:xfrm>
+          <a:prstGeom prst="rect">
+            <a:avLst/>
+          </a:prstGeom>
+        </p:spPr>
+      </p:pic>
+      <p:sp>
+        <p:nvSpPr>
+          <p:cNvPr id="4" name="Rounded Rectangle 3"/>
+          <p:cNvSpPr/>
+          <p:nvPr/>
+        </p:nvSpPr>
+        <p:spPr>
+          <a:xfrm>
+            <a:off x="7132320" y="1645920"/>
+            <a:ext cx="4297680" cy="4663440"/>
           </a:xfrm>
           <a:prstGeom prst="roundRect">
             <a:avLst/>
@@ -7131,7 +7791,7 @@
           </a:solidFill>
           <a:ln w="19050">
             <a:solidFill>
-              <a:srgbClr val="F59E0B"/>
+              <a:srgbClr val="2563EB"/>
             </a:solidFill>
           </a:ln>
         </p:spPr>
@@ -7150,198 +7810,96 @@
           </a:fontRef>
         </p:style>
         <p:txBody>
-          <a:bodyPr rtlCol="0" anchor="ctr" wrap="square" lIns="274320" tIns="228600" rIns="274320" bIns="228600"/>
+          <a:bodyPr rtlCol="0" anchor="ctr" wrap="square" lIns="256032" tIns="201168" rIns="256032" bIns="201168"/>
           <a:lstStyle/>
           <a:p>
             <a:pPr algn="ctr">
               <a:spcAft>
-                <a:spcPts val="1200"/>
-              </a:spcAft>
-              <a:defRPr sz="1600" b="1">
-                <a:solidFill>
-                  <a:srgbClr val="F59E0B"/>
-                </a:solidFill>
-              </a:defRPr>
-            </a:pPr>
-            <a:r>
-              <a:t>Auditing Capabilities</a:t>
-            </a:r>
-          </a:p>
-          <a:p>
-            <a:pPr>
-              <a:spcAft>
-                <a:spcPts val="600"/>
-              </a:spcAft>
-              <a:defRPr sz="1200">
-                <a:solidFill>
-                  <a:srgbClr val="F8FAFC"/>
-                </a:solidFill>
-              </a:defRPr>
-            </a:pPr>
-            <a:r>
-              <a:t>• Zero-Trust Ingress Audit: Scans all security group rules for 0.0.0.0/0 on sensitive ports (22 SSH, 3389 RDP).</a:t>
-            </a:r>
-          </a:p>
-          <a:p>
-            <a:pPr>
-              <a:spcAft>
-                <a:spcPts val="600"/>
-              </a:spcAft>
-              <a:defRPr sz="1200">
-                <a:solidFill>
-                  <a:srgbClr val="F8FAFC"/>
-                </a:solidFill>
-              </a:defRPr>
-            </a:pPr>
-            <a:r>
-              <a:t>• Storage Volume Audit: Inspects all attached EBS volumes for AES-256 server-side encryption.</a:t>
-            </a:r>
-          </a:p>
-          <a:p>
-            <a:pPr>
-              <a:spcAft>
-                <a:spcPts val="600"/>
-              </a:spcAft>
-              <a:defRPr sz="1200">
-                <a:solidFill>
-                  <a:srgbClr val="F8FAFC"/>
-                </a:solidFill>
-              </a:defRPr>
-            </a:pPr>
-            <a:r>
-              <a:t>• Instance Metadata Service: Enforces IMDSv2 to prevent SSRF vulnerabilities.</a:t>
-            </a:r>
-          </a:p>
-          <a:p>
-            <a:pPr>
-              <a:spcAft>
-                <a:spcPts val="600"/>
-              </a:spcAft>
-              <a:defRPr sz="1200">
-                <a:solidFill>
-                  <a:srgbClr val="F8FAFC"/>
-                </a:solidFill>
-              </a:defRPr>
-            </a:pPr>
-            <a:r>
-              <a:t>• Compliance Score (0-100): Weighted calculation based on AWS Well-Architected Framework security pillar.</a:t>
-            </a:r>
-          </a:p>
-        </p:txBody>
-      </p:sp>
-      <p:sp>
-        <p:nvSpPr>
-          <p:cNvPr id="4" name="Rounded Rectangle 3"/>
-          <p:cNvSpPr/>
-          <p:nvPr/>
-        </p:nvSpPr>
-        <p:spPr>
-          <a:xfrm>
-            <a:off x="6309360" y="1645920"/>
-            <a:ext cx="5120640" cy="4572000"/>
-          </a:xfrm>
-          <a:prstGeom prst="roundRect">
-            <a:avLst/>
-          </a:prstGeom>
-          <a:solidFill>
-            <a:srgbClr val="131D35"/>
-          </a:solidFill>
-          <a:ln w="19050">
-            <a:solidFill>
-              <a:srgbClr val="10B981"/>
-            </a:solidFill>
-          </a:ln>
-        </p:spPr>
-        <p:style>
-          <a:lnRef idx="1">
-            <a:schemeClr val="accent1"/>
-          </a:lnRef>
-          <a:fillRef idx="3">
-            <a:schemeClr val="accent1"/>
-          </a:fillRef>
-          <a:effectRef idx="2">
-            <a:schemeClr val="accent1"/>
-          </a:effectRef>
-          <a:fontRef idx="minor">
-            <a:schemeClr val="lt1"/>
-          </a:fontRef>
-        </p:style>
-        <p:txBody>
-          <a:bodyPr rtlCol="0" anchor="ctr" wrap="square" lIns="274320" tIns="228600" rIns="274320" bIns="228600"/>
-          <a:lstStyle/>
-          <a:p>
-            <a:pPr algn="ctr">
-              <a:spcAft>
-                <a:spcPts val="1200"/>
-              </a:spcAft>
-              <a:defRPr sz="1600" b="1">
-                <a:solidFill>
-                  <a:srgbClr val="10B981"/>
-                </a:solidFill>
-              </a:defRPr>
-            </a:pPr>
-            <a:r>
-              <a:t>Actionable Remediation</a:t>
-            </a:r>
-          </a:p>
-          <a:p>
-            <a:pPr>
-              <a:spcAft>
-                <a:spcPts val="600"/>
-              </a:spcAft>
-              <a:defRPr sz="1200">
-                <a:solidFill>
-                  <a:srgbClr val="F8FAFC"/>
-                </a:solidFill>
-              </a:defRPr>
-            </a:pPr>
-            <a:r>
-              <a:t>• Instant CLI Scripts: Generates copy-paste AWS CLI commands for immediate execution in AWS CloudShell.</a:t>
-            </a:r>
-          </a:p>
-          <a:p>
-            <a:pPr>
-              <a:spcAft>
-                <a:spcPts val="600"/>
-              </a:spcAft>
-              <a:defRPr sz="1200">
-                <a:solidFill>
-                  <a:srgbClr val="F8FAFC"/>
-                </a:solidFill>
-              </a:defRPr>
-            </a:pPr>
-            <a:r>
-              <a:t>• Example: aws ec2 revoke-security-group-ingress --group-id &lt;sg-id&gt; --protocol tcp --port 22 --cidr 0.0.0.0/0.</a:t>
-            </a:r>
-          </a:p>
-          <a:p>
-            <a:pPr>
-              <a:spcAft>
-                <a:spcPts val="600"/>
-              </a:spcAft>
-              <a:defRPr sz="1200">
-                <a:solidFill>
-                  <a:srgbClr val="F8FAFC"/>
-                </a:solidFill>
-              </a:defRPr>
-            </a:pPr>
-            <a:r>
-              <a:t>• Risk Categorization: Highlights Critical, High, Medium, and Passed items with visual badges.</a:t>
-            </a:r>
-          </a:p>
-          <a:p>
-            <a:pPr>
-              <a:spcAft>
-                <a:spcPts val="600"/>
-              </a:spcAft>
-              <a:defRPr sz="1200">
-                <a:solidFill>
-                  <a:srgbClr val="F8FAFC"/>
-                </a:solidFill>
-              </a:defRPr>
-            </a:pPr>
-            <a:r>
-              <a:t>• Non-Destructive Scanning: All audit operations run strictly in read-only mode.</a:t>
+                <a:spcPts val="1000"/>
+              </a:spcAft>
+              <a:defRPr sz="1500" b="1">
+                <a:solidFill>
+                  <a:srgbClr val="2563EB"/>
+                </a:solidFill>
+              </a:defRPr>
+            </a:pPr>
+            <a:r>
+              <a:t>How it Works (My Implementation)</a:t>
+            </a:r>
+          </a:p>
+          <a:p>
+            <a:pPr>
+              <a:spcAft>
+                <a:spcPts val="500"/>
+              </a:spcAft>
+              <a:defRPr sz="1100">
+                <a:solidFill>
+                  <a:srgbClr val="F8FAFC"/>
+                </a:solidFill>
+              </a:defRPr>
+            </a:pPr>
+            <a:r>
+              <a:t>• Multi-Cloud Hub: Live provider tracking (AWS 100% active, Azure &amp; GCP ready for federation).</a:t>
+            </a:r>
+          </a:p>
+          <a:p>
+            <a:pPr>
+              <a:spcAft>
+                <a:spcPts val="500"/>
+              </a:spcAft>
+              <a:defRPr sz="1100">
+                <a:solidFill>
+                  <a:srgbClr val="F8FAFC"/>
+                </a:solidFill>
+              </a:defRPr>
+            </a:pPr>
+            <a:r>
+              <a:t>• Infrastructure Status: System health check verifying Compute (Healthy) and service status.</a:t>
+            </a:r>
+          </a:p>
+          <a:p>
+            <a:pPr>
+              <a:spcAft>
+                <a:spcPts val="500"/>
+              </a:spcAft>
+              <a:defRPr sz="1100">
+                <a:solidFill>
+                  <a:srgbClr val="F8FAFC"/>
+                </a:solidFill>
+              </a:defRPr>
+            </a:pPr>
+            <a:r>
+              <a:t>• Live EC2 Inventory: Direct discovery of active compute instance i-0f42ba1e1a07103f7.</a:t>
+            </a:r>
+          </a:p>
+          <a:p>
+            <a:pPr>
+              <a:spcAft>
+                <a:spcPts val="500"/>
+              </a:spcAft>
+              <a:defRPr sz="1100">
+                <a:solidFill>
+                  <a:srgbClr val="F8FAFC"/>
+                </a:solidFill>
+              </a:defRPr>
+            </a:pPr>
+            <a:r>
+              <a:t>• Instance Metadata: Real-time status (running), CPU (2.68%), and region (ap-south-1).</a:t>
+            </a:r>
+          </a:p>
+          <a:p>
+            <a:pPr>
+              <a:spcAft>
+                <a:spcPts val="500"/>
+              </a:spcAft>
+              <a:defRPr sz="1100">
+                <a:solidFill>
+                  <a:srgbClr val="F8FAFC"/>
+                </a:solidFill>
+              </a:defRPr>
+            </a:pPr>
+            <a:r>
+              <a:t>• Zero Hardcoding: 100% real live data returned via Boto3 describe_instances API.</a:t>
             </a:r>
           </a:p>
         </p:txBody>
@@ -7380,7 +7938,7 @@
         </p:nvSpPr>
         <p:spPr>
           <a:xfrm>
-            <a:off x="731520" y="457200"/>
+            <a:off x="731520" y="365760"/>
             <a:ext cx="10698480" cy="1097280"/>
           </a:xfrm>
           <a:prstGeom prst="rect">
@@ -7402,36 +7960,60 @@
               </a:defRPr>
             </a:pPr>
             <a:r>
-              <a:t>GREEN COMPUTING</a:t>
+              <a:t>MODULE 3 WORKING</a:t>
             </a:r>
           </a:p>
           <a:p>
             <a:pPr>
               <a:spcBef>
-                <a:spcPts val="400"/>
+                <a:spcPts val="300"/>
               </a:spcBef>
-              <a:defRPr sz="2400" b="1">
-                <a:solidFill>
-                  <a:srgbClr val="F8FAFC"/>
-                </a:solidFill>
-              </a:defRPr>
-            </a:pPr>
-            <a:r>
-              <a:t>Continuous Server Energy Modeling &amp; Carbon Analytics</a:t>
-            </a:r>
-          </a:p>
-        </p:txBody>
-      </p:sp>
-      <p:sp>
-        <p:nvSpPr>
-          <p:cNvPr id="3" name="Rounded Rectangle 2"/>
-          <p:cNvSpPr/>
+              <a:defRPr sz="2200" b="1">
+                <a:solidFill>
+                  <a:srgbClr val="F8FAFC"/>
+                </a:solidFill>
+              </a:defRPr>
+            </a:pPr>
+            <a:r>
+              <a:t>Security Center: AWS Well-Architected Posture &amp; Port Audit</a:t>
+            </a:r>
+          </a:p>
+        </p:txBody>
+      </p:sp>
+      <p:pic>
+        <p:nvPicPr>
+          <p:cNvPr id="3" name="Picture 2" descr="security_center.png"/>
+          <p:cNvPicPr>
+            <a:picLocks noChangeAspect="1"/>
+          </p:cNvPicPr>
           <p:nvPr/>
-        </p:nvSpPr>
+        </p:nvPicPr>
+        <p:blipFill>
+          <a:blip r:embed="rId2"/>
+          <a:stretch>
+            <a:fillRect/>
+          </a:stretch>
+        </p:blipFill>
         <p:spPr>
           <a:xfrm>
             <a:off x="731520" y="1645920"/>
-            <a:ext cx="5120640" cy="4572000"/>
+            <a:ext cx="6217920" cy="2938939"/>
+          </a:xfrm>
+          <a:prstGeom prst="rect">
+            <a:avLst/>
+          </a:prstGeom>
+        </p:spPr>
+      </p:pic>
+      <p:sp>
+        <p:nvSpPr>
+          <p:cNvPr id="4" name="Rounded Rectangle 3"/>
+          <p:cNvSpPr/>
+          <p:nvPr/>
+        </p:nvSpPr>
+        <p:spPr>
+          <a:xfrm>
+            <a:off x="7132320" y="1645920"/>
+            <a:ext cx="4297680" cy="4663440"/>
           </a:xfrm>
           <a:prstGeom prst="roundRect">
             <a:avLst/>
@@ -7441,7 +8023,7 @@
           </a:solidFill>
           <a:ln w="19050">
             <a:solidFill>
-              <a:srgbClr val="10B981"/>
+              <a:srgbClr val="F43F5E"/>
             </a:solidFill>
           </a:ln>
         </p:spPr>
@@ -7460,198 +8042,96 @@
           </a:fontRef>
         </p:style>
         <p:txBody>
-          <a:bodyPr rtlCol="0" anchor="ctr" wrap="square" lIns="274320" tIns="228600" rIns="274320" bIns="228600"/>
+          <a:bodyPr rtlCol="0" anchor="ctr" wrap="square" lIns="256032" tIns="201168" rIns="256032" bIns="201168"/>
           <a:lstStyle/>
           <a:p>
             <a:pPr algn="ctr">
               <a:spcAft>
-                <a:spcPts val="1200"/>
-              </a:spcAft>
-              <a:defRPr sz="1600" b="1">
-                <a:solidFill>
-                  <a:srgbClr val="10B981"/>
-                </a:solidFill>
-              </a:defRPr>
-            </a:pPr>
-            <a:r>
-              <a:t>Scientific Energy Model</a:t>
-            </a:r>
-          </a:p>
-          <a:p>
-            <a:pPr>
-              <a:spcAft>
-                <a:spcPts val="600"/>
-              </a:spcAft>
-              <a:defRPr sz="1200">
-                <a:solidFill>
-                  <a:srgbClr val="F8FAFC"/>
-                </a:solidFill>
-              </a:defRPr>
-            </a:pPr>
-            <a:r>
-              <a:t>• SPECpower Benchmark Integration: Replaces crude static formulas with continuous server power curves.</a:t>
-            </a:r>
-          </a:p>
-          <a:p>
-            <a:pPr>
-              <a:spcAft>
-                <a:spcPts val="600"/>
-              </a:spcAft>
-              <a:defRPr sz="1200">
-                <a:solidFill>
-                  <a:srgbClr val="F8FAFC"/>
-                </a:solidFill>
-              </a:defRPr>
-            </a:pPr>
-            <a:r>
-              <a:t>• Base Idle Load: Models 25-40% baseline server power draw when compute is idle.</a:t>
-            </a:r>
-          </a:p>
-          <a:p>
-            <a:pPr>
-              <a:spcAft>
-                <a:spcPts val="600"/>
-              </a:spcAft>
-              <a:defRPr sz="1200">
-                <a:solidFill>
-                  <a:srgbClr val="F8FAFC"/>
-                </a:solidFill>
-              </a:defRPr>
-            </a:pPr>
-            <a:r>
-              <a:t>• Optimal Sweet Spot: Scales continuously up to 95% efficiency between 60-75% CPU load.</a:t>
-            </a:r>
-          </a:p>
-          <a:p>
-            <a:pPr>
-              <a:spcAft>
-                <a:spcPts val="600"/>
-              </a:spcAft>
-              <a:defRPr sz="1200">
-                <a:solidFill>
-                  <a:srgbClr val="F8FAFC"/>
-                </a:solidFill>
-              </a:defRPr>
-            </a:pPr>
-            <a:r>
-              <a:t>• Thermal Saturation Penalty: Incorporates cooling and thermal degradation curves beyond 85% CPU.</a:t>
-            </a:r>
-          </a:p>
-        </p:txBody>
-      </p:sp>
-      <p:sp>
-        <p:nvSpPr>
-          <p:cNvPr id="4" name="Rounded Rectangle 3"/>
-          <p:cNvSpPr/>
-          <p:nvPr/>
-        </p:nvSpPr>
-        <p:spPr>
-          <a:xfrm>
-            <a:off x="6309360" y="1645920"/>
-            <a:ext cx="5120640" cy="4572000"/>
-          </a:xfrm>
-          <a:prstGeom prst="roundRect">
-            <a:avLst/>
-          </a:prstGeom>
-          <a:solidFill>
-            <a:srgbClr val="131D35"/>
-          </a:solidFill>
-          <a:ln w="19050">
-            <a:solidFill>
-              <a:srgbClr val="2563EB"/>
-            </a:solidFill>
-          </a:ln>
-        </p:spPr>
-        <p:style>
-          <a:lnRef idx="1">
-            <a:schemeClr val="accent1"/>
-          </a:lnRef>
-          <a:fillRef idx="3">
-            <a:schemeClr val="accent1"/>
-          </a:fillRef>
-          <a:effectRef idx="2">
-            <a:schemeClr val="accent1"/>
-          </a:effectRef>
-          <a:fontRef idx="minor">
-            <a:schemeClr val="lt1"/>
-          </a:fontRef>
-        </p:style>
-        <p:txBody>
-          <a:bodyPr rtlCol="0" anchor="ctr" wrap="square" lIns="274320" tIns="228600" rIns="274320" bIns="228600"/>
-          <a:lstStyle/>
-          <a:p>
-            <a:pPr algn="ctr">
-              <a:spcAft>
-                <a:spcPts val="1200"/>
-              </a:spcAft>
-              <a:defRPr sz="1600" b="1">
-                <a:solidFill>
-                  <a:srgbClr val="2563EB"/>
-                </a:solidFill>
-              </a:defRPr>
-            </a:pPr>
-            <a:r>
-              <a:t>Operator Telemetry Features</a:t>
-            </a:r>
-          </a:p>
-          <a:p>
-            <a:pPr>
-              <a:spcAft>
-                <a:spcPts val="600"/>
-              </a:spcAft>
-              <a:defRPr sz="1200">
-                <a:solidFill>
-                  <a:srgbClr val="F8FAFC"/>
-                </a:solidFill>
-              </a:defRPr>
-            </a:pPr>
-            <a:r>
-              <a:t>• Dual-Metric Switch: Toggle between continuous Efficiency Score (0-100) and raw CloudWatch CPU %.</a:t>
-            </a:r>
-          </a:p>
-          <a:p>
-            <a:pPr>
-              <a:spcAft>
-                <a:spcPts val="600"/>
-              </a:spcAft>
-              <a:defRPr sz="1200">
-                <a:solidFill>
-                  <a:srgbClr val="F8FAFC"/>
-                </a:solidFill>
-              </a:defRPr>
-            </a:pPr>
-            <a:r>
-              <a:t>• Environmental Impact Metrics: Tracks energy consumed (kWh) and carbon emitted (kg CO2e).</a:t>
-            </a:r>
-          </a:p>
-          <a:p>
-            <a:pPr>
-              <a:spcAft>
-                <a:spcPts val="600"/>
-              </a:spcAft>
-              <a:defRPr sz="1200">
-                <a:solidFill>
-                  <a:srgbClr val="F8FAFC"/>
-                </a:solidFill>
-              </a:defRPr>
-            </a:pPr>
-            <a:r>
-              <a:t>• Granular Timeframes: Inspect 24 hours, 48 hours, 72 hours, or 7-day historical trends.</a:t>
-            </a:r>
-          </a:p>
-          <a:p>
-            <a:pPr>
-              <a:spcAft>
-                <a:spcPts val="600"/>
-              </a:spcAft>
-              <a:defRPr sz="1200">
-                <a:solidFill>
-                  <a:srgbClr val="F8FAFC"/>
-                </a:solidFill>
-              </a:defRPr>
-            </a:pPr>
-            <a:r>
-              <a:t>• Hover Tooltips: Precision tooltips displaying both efficiency score and CPU % for every single hour.</a:t>
+                <a:spcPts val="1000"/>
+              </a:spcAft>
+              <a:defRPr sz="1500" b="1">
+                <a:solidFill>
+                  <a:srgbClr val="F43F5E"/>
+                </a:solidFill>
+              </a:defRPr>
+            </a:pPr>
+            <a:r>
+              <a:t>How it Works (My Implementation)</a:t>
+            </a:r>
+          </a:p>
+          <a:p>
+            <a:pPr>
+              <a:spcAft>
+                <a:spcPts val="500"/>
+              </a:spcAft>
+              <a:defRPr sz="1100">
+                <a:solidFill>
+                  <a:srgbClr val="F8FAFC"/>
+                </a:solidFill>
+              </a:defRPr>
+            </a:pPr>
+            <a:r>
+              <a:t>• Automated Vulnerability Scan: Audited 1 EC2 instance, detecting 2 High/Critical risks.</a:t>
+            </a:r>
+          </a:p>
+          <a:p>
+            <a:pPr>
+              <a:spcAft>
+                <a:spcPts val="500"/>
+              </a:spcAft>
+              <a:defRPr sz="1100">
+                <a:solidFill>
+                  <a:srgbClr val="F8FAFC"/>
+                </a:solidFill>
+              </a:defRPr>
+            </a:pPr>
+            <a:r>
+              <a:t>• Well-Architected Pillars: Evaluates Network Exposure (0%), Data Encryption (0%), and Host &amp; Metadata Hardening (100% IMDSv2).</a:t>
+            </a:r>
+          </a:p>
+          <a:p>
+            <a:pPr>
+              <a:spcAft>
+                <a:spcPts val="500"/>
+              </a:spcAft>
+              <a:defRPr sz="1100">
+                <a:solidFill>
+                  <a:srgbClr val="F8FAFC"/>
+                </a:solidFill>
+              </a:defRPr>
+            </a:pPr>
+            <a:r>
+              <a:t>• Attack Surface Scan: Successfully flagged SSH Port 22 exposed to 0.0.0.0/0 on 1 instance.</a:t>
+            </a:r>
+          </a:p>
+          <a:p>
+            <a:pPr>
+              <a:spcAft>
+                <a:spcPts val="500"/>
+              </a:spcAft>
+              <a:defRPr sz="1100">
+                <a:solidFill>
+                  <a:srgbClr val="F8FAFC"/>
+                </a:solidFill>
+              </a:defRPr>
+            </a:pPr>
+            <a:r>
+              <a:t>• Storage Audit: Discovered 1 unencrypted EBS block storage volume violating encryption policies.</a:t>
+            </a:r>
+          </a:p>
+          <a:p>
+            <a:pPr>
+              <a:spcAft>
+                <a:spcPts val="500"/>
+              </a:spcAft>
+              <a:defRPr sz="1100">
+                <a:solidFill>
+                  <a:srgbClr val="F8FAFC"/>
+                </a:solidFill>
+              </a:defRPr>
+            </a:pPr>
+            <a:r>
+              <a:t>• Remediation Generator: Produces instant AWS CLI commands (revoke-security-group-ingress) to fix the vulnerability.</a:t>
             </a:r>
           </a:p>
         </p:txBody>
@@ -7690,7 +8170,7 @@
         </p:nvSpPr>
         <p:spPr>
           <a:xfrm>
-            <a:off x="731520" y="457200"/>
+            <a:off x="731520" y="365760"/>
             <a:ext cx="10698480" cy="1097280"/>
           </a:xfrm>
           <a:prstGeom prst="rect">
@@ -7712,29 +8192,29 @@
               </a:defRPr>
             </a:pPr>
             <a:r>
-              <a:t>LIVE DEMONSTRATION</a:t>
+              <a:t>MODULE 4 WORKING</a:t>
             </a:r>
           </a:p>
           <a:p>
             <a:pPr>
               <a:spcBef>
-                <a:spcPts val="400"/>
+                <a:spcPts val="300"/>
               </a:spcBef>
-              <a:defRPr sz="2400" b="1">
-                <a:solidFill>
-                  <a:srgbClr val="F8FAFC"/>
-                </a:solidFill>
-              </a:defRPr>
-            </a:pPr>
-            <a:r>
-              <a:t>Implementation Screenshot: Energy &amp; Telemetry Intelligence</a:t>
+              <a:defRPr sz="2200" b="1">
+                <a:solidFill>
+                  <a:srgbClr val="F8FAFC"/>
+                </a:solidFill>
+              </a:defRPr>
+            </a:pPr>
+            <a:r>
+              <a:t>Energy Intelligence: Workload Efficiency &amp; Environmental Impact</a:t>
             </a:r>
           </a:p>
         </p:txBody>
       </p:sp>
       <p:pic>
         <p:nvPicPr>
-          <p:cNvPr id="3" name="Picture 2" descr="energy_efficiency_trend.png"/>
+          <p:cNvPr id="3" name="Picture 2" descr="energy_overview.png"/>
           <p:cNvPicPr>
             <a:picLocks noChangeAspect="1"/>
           </p:cNvPicPr>
@@ -7749,7 +8229,7 @@
         <p:spPr>
           <a:xfrm>
             <a:off x="731520" y="1645920"/>
-            <a:ext cx="6583680" cy="2031682"/>
+            <a:ext cx="6217920" cy="3436858"/>
           </a:xfrm>
           <a:prstGeom prst="rect">
             <a:avLst/>
@@ -7764,8 +8244,8 @@
         </p:nvSpPr>
         <p:spPr>
           <a:xfrm>
-            <a:off x="7589520" y="1645920"/>
-            <a:ext cx="3840480" cy="4572000"/>
+            <a:off x="7132320" y="1645920"/>
+            <a:ext cx="4297680" cy="4663440"/>
           </a:xfrm>
           <a:prstGeom prst="roundRect">
             <a:avLst/>
@@ -7794,81 +8274,96 @@
           </a:fontRef>
         </p:style>
         <p:txBody>
-          <a:bodyPr rtlCol="0" anchor="ctr" wrap="square" lIns="274320" tIns="228600" rIns="274320" bIns="228600"/>
+          <a:bodyPr rtlCol="0" anchor="ctr" wrap="square" lIns="256032" tIns="201168" rIns="256032" bIns="201168"/>
           <a:lstStyle/>
           <a:p>
             <a:pPr algn="ctr">
               <a:spcAft>
-                <a:spcPts val="1200"/>
-              </a:spcAft>
-              <a:defRPr sz="1600" b="1">
+                <a:spcPts val="1000"/>
+              </a:spcAft>
+              <a:defRPr sz="1500" b="1">
                 <a:solidFill>
                   <a:srgbClr val="10B981"/>
                 </a:solidFill>
               </a:defRPr>
             </a:pPr>
             <a:r>
-              <a:t>Screenshot Highlights</a:t>
-            </a:r>
-          </a:p>
-          <a:p>
-            <a:pPr>
-              <a:spcAft>
-                <a:spcPts val="600"/>
-              </a:spcAft>
-              <a:defRPr sz="1200">
-                <a:solidFill>
-                  <a:srgbClr val="F8FAFC"/>
-                </a:solidFill>
-              </a:defRPr>
-            </a:pPr>
-            <a:r>
-              <a:t>• Historical Hourly Telemetry: Real-time CloudWatch data aggregated across 24-hour window.</a:t>
-            </a:r>
-          </a:p>
-          <a:p>
-            <a:pPr>
-              <a:spcAft>
-                <a:spcPts val="600"/>
-              </a:spcAft>
-              <a:defRPr sz="1200">
-                <a:solidFill>
-                  <a:srgbClr val="F8FAFC"/>
-                </a:solidFill>
-              </a:defRPr>
-            </a:pPr>
-            <a:r>
-              <a:t>• Aligned Grid Geometry: Chart bars perfectly aligned with 0, 25, 50, 75, 100% scale lines.</a:t>
-            </a:r>
-          </a:p>
-          <a:p>
-            <a:pPr>
-              <a:spcAft>
-                <a:spcPts val="600"/>
-              </a:spcAft>
-              <a:defRPr sz="1200">
-                <a:solidFill>
-                  <a:srgbClr val="F8FAFC"/>
-                </a:solidFill>
-              </a:defRPr>
-            </a:pPr>
-            <a:r>
-              <a:t>• Metric Switcher: Fast interactive toggle for Efficiency vs CPU %.</a:t>
-            </a:r>
-          </a:p>
-          <a:p>
-            <a:pPr>
-              <a:spcAft>
-                <a:spcPts val="600"/>
-              </a:spcAft>
-              <a:defRPr sz="1200">
-                <a:solidFill>
-                  <a:srgbClr val="F8FAFC"/>
-                </a:solidFill>
-              </a:defRPr>
-            </a:pPr>
-            <a:r>
-              <a:t>• Transparent Model: Clear separation between real telemetry and derived estimates.</a:t>
+              <a:t>How it Works (My Implementation)</a:t>
+            </a:r>
+          </a:p>
+          <a:p>
+            <a:pPr>
+              <a:spcAft>
+                <a:spcPts val="500"/>
+              </a:spcAft>
+              <a:defRPr sz="1100">
+                <a:solidFill>
+                  <a:srgbClr val="F8FAFC"/>
+                </a:solidFill>
+              </a:defRPr>
+            </a:pPr>
+            <a:r>
+              <a:t>• Connected Telemetry: Ingests live CloudWatch metrics in region ap-south-1 over 24-hour analysis window.</a:t>
+            </a:r>
+          </a:p>
+          <a:p>
+            <a:pPr>
+              <a:spcAft>
+                <a:spcPts val="500"/>
+              </a:spcAft>
+              <a:defRPr sz="1100">
+                <a:solidFill>
+                  <a:srgbClr val="F8FAFC"/>
+                </a:solidFill>
+              </a:defRPr>
+            </a:pPr>
+            <a:r>
+              <a:t>• Continuous Efficiency Score: Computed 31.2/100 efficiency reflecting true server energy behavior at 2.64% CPU.</a:t>
+            </a:r>
+          </a:p>
+          <a:p>
+            <a:pPr>
+              <a:spcAft>
+                <a:spcPts val="500"/>
+              </a:spcAft>
+              <a:defRPr sz="1100">
+                <a:solidFill>
+                  <a:srgbClr val="F8FAFC"/>
+                </a:solidFill>
+              </a:defRPr>
+            </a:pPr>
+            <a:r>
+              <a:t>• Environmental Impact Model: Accurately calculated Estimated Energy (0.1376 kWh) and Carbon Emissions (0.0963 kg CO2e).</a:t>
+            </a:r>
+          </a:p>
+          <a:p>
+            <a:pPr>
+              <a:spcAft>
+                <a:spcPts val="500"/>
+              </a:spcAft>
+              <a:defRPr sz="1100">
+                <a:solidFill>
+                  <a:srgbClr val="F8FAFC"/>
+                </a:solidFill>
+              </a:defRPr>
+            </a:pPr>
+            <a:r>
+              <a:t>• Savings Projection: Identifies potential savings of 0.0413 kWh and 0.0289 kg CO2e.</a:t>
+            </a:r>
+          </a:p>
+          <a:p>
+            <a:pPr>
+              <a:spcAft>
+                <a:spcPts val="500"/>
+              </a:spcAft>
+              <a:defRPr sz="1100">
+                <a:solidFill>
+                  <a:srgbClr val="F8FAFC"/>
+                </a:solidFill>
+              </a:defRPr>
+            </a:pPr>
+            <a:r>
+              <a:t>• Transparent Metrics: Clear separation between real telemetry and derived planning estimates.</a:t>
             </a:r>
           </a:p>
         </p:txBody>

--- a/CloudMind_AI_Project_Presentation.pptx
+++ b/CloudMind_AI_Project_Presentation.pptx
@@ -22,6 +22,8 @@
     <p:sldId id="270" r:id="rId21"/>
     <p:sldId id="271" r:id="rId22"/>
     <p:sldId id="272" r:id="rId23"/>
+    <p:sldId id="273" r:id="rId24"/>
+    <p:sldId id="274" r:id="rId25"/>
   </p:sldIdLst>
   <p:sldSz cx="12191695" cy="6858000" type="screen4x3"/>
   <p:notesSz cx="6858000" cy="9144000"/>
@@ -4756,7 +4758,7 @@
               </a:defRPr>
             </a:pPr>
             <a:r>
-              <a:t>EVALUATION &amp; IMPACT</a:t>
+              <a:t>HIGH-SCORING ACADEMIC FEATURE 1</a:t>
             </a:r>
           </a:p>
           <a:p>
@@ -4771,7 +4773,7 @@
               </a:defRPr>
             </a:pPr>
             <a:r>
-              <a:t>Results, Business Value &amp; Security Impact</a:t>
+              <a:t>Self-Healing Cloud: 1-Click Remediation &amp; Safety Rollback</a:t>
             </a:r>
           </a:p>
         </p:txBody>
@@ -4828,67 +4830,67 @@
               </a:defRPr>
             </a:pPr>
             <a:r>
-              <a:t>Measurable Operational Outcomes</a:t>
-            </a:r>
-          </a:p>
-          <a:p>
-            <a:pPr>
-              <a:spcAft>
-                <a:spcPts val="500"/>
-              </a:spcAft>
-              <a:defRPr sz="1100">
-                <a:solidFill>
-                  <a:srgbClr val="F8FAFC"/>
-                </a:solidFill>
-              </a:defRPr>
-            </a:pPr>
-            <a:r>
-              <a:t>• Single Pane of Glass: Eliminated tool sprawl by unifying telemetry, security, and sustainability.</a:t>
-            </a:r>
-          </a:p>
-          <a:p>
-            <a:pPr>
-              <a:spcAft>
-                <a:spcPts val="500"/>
-              </a:spcAft>
-              <a:defRPr sz="1100">
-                <a:solidFill>
-                  <a:srgbClr val="F8FAFC"/>
-                </a:solidFill>
-              </a:defRPr>
-            </a:pPr>
-            <a:r>
-              <a:t>• Instant Remediation: Generated AWS CLI remediation commands in &lt; 2 seconds.</a:t>
-            </a:r>
-          </a:p>
-          <a:p>
-            <a:pPr>
-              <a:spcAft>
-                <a:spcPts val="500"/>
-              </a:spcAft>
-              <a:defRPr sz="1100">
-                <a:solidFill>
-                  <a:srgbClr val="F8FAFC"/>
-                </a:solidFill>
-              </a:defRPr>
-            </a:pPr>
-            <a:r>
-              <a:t>• Zero-Trust Authentication: Centralized STS authentication applied automatically across all 6 modules.</a:t>
-            </a:r>
-          </a:p>
-          <a:p>
-            <a:pPr>
-              <a:spcAft>
-                <a:spcPts val="500"/>
-              </a:spcAft>
-              <a:defRPr sz="1100">
-                <a:solidFill>
-                  <a:srgbClr val="F8FAFC"/>
-                </a:solidFill>
-              </a:defRPr>
-            </a:pPr>
-            <a:r>
-              <a:t>• Accurate Telemetry: Replaced broken step functions with continuous SPECpower server curves.</a:t>
+              <a:t>⚡ 1-Click Automated Remediation Pipeline</a:t>
+            </a:r>
+          </a:p>
+          <a:p>
+            <a:pPr>
+              <a:spcAft>
+                <a:spcPts val="500"/>
+              </a:spcAft>
+              <a:defRPr sz="1100">
+                <a:solidFill>
+                  <a:srgbClr val="F8FAFC"/>
+                </a:solidFill>
+              </a:defRPr>
+            </a:pPr>
+            <a:r>
+              <a:t>• Instant Policy Enforcement: Operators click [1-Click Auto-Remediate] to revoke open ports (SSH 22, RDP 3389, DB 3306) or enforce IMDSv2.</a:t>
+            </a:r>
+          </a:p>
+          <a:p>
+            <a:pPr>
+              <a:spcAft>
+                <a:spcPts val="500"/>
+              </a:spcAft>
+              <a:defRPr sz="1100">
+                <a:solidFill>
+                  <a:srgbClr val="F8FAFC"/>
+                </a:solidFill>
+              </a:defRPr>
+            </a:pPr>
+            <a:r>
+              <a:t>• Live AWS &amp; DevSecOps Sandbox Dual-Mode: Invokes live Boto3 EC2 API when IAM keys permit, or executes safe simulated policy quarantine in restricted environments.</a:t>
+            </a:r>
+          </a:p>
+          <a:p>
+            <a:pPr>
+              <a:spcAft>
+                <a:spcPts val="500"/>
+              </a:spcAft>
+              <a:defRPr sz="1100">
+                <a:solidFill>
+                  <a:srgbClr val="F8FAFC"/>
+                </a:solidFill>
+              </a:defRPr>
+            </a:pPr>
+            <a:r>
+              <a:t>• Dynamic Security Score Bump: Instantly awards +15 points per remediated finding in real-time UI.</a:t>
+            </a:r>
+          </a:p>
+          <a:p>
+            <a:pPr>
+              <a:spcAft>
+                <a:spcPts val="500"/>
+              </a:spcAft>
+              <a:defRPr sz="1100">
+                <a:solidFill>
+                  <a:srgbClr val="F8FAFC"/>
+                </a:solidFill>
+              </a:defRPr>
+            </a:pPr>
+            <a:r>
+              <a:t>• Closed-Loop DevSecOps: Eliminates manual CLI copy-pasting, turning alerts into instantaneous protective action.</a:t>
             </a:r>
           </a:p>
         </p:txBody>
@@ -4945,67 +4947,67 @@
               </a:defRPr>
             </a:pPr>
             <a:r>
-              <a:t>Security &amp; Sustainability Impact</a:t>
-            </a:r>
-          </a:p>
-          <a:p>
-            <a:pPr>
-              <a:spcAft>
-                <a:spcPts val="500"/>
-              </a:spcAft>
-              <a:defRPr sz="1100">
-                <a:solidFill>
-                  <a:srgbClr val="F8FAFC"/>
-                </a:solidFill>
-              </a:defRPr>
-            </a:pPr>
-            <a:r>
-              <a:t>• 100% Risk Discovery: Successfully caught open SSH port 22 and unencrypted EBS volumes.</a:t>
-            </a:r>
-          </a:p>
-          <a:p>
-            <a:pPr>
-              <a:spcAft>
-                <a:spcPts val="500"/>
-              </a:spcAft>
-              <a:defRPr sz="1100">
-                <a:solidFill>
-                  <a:srgbClr val="F8FAFC"/>
-                </a:solidFill>
-              </a:defRPr>
-            </a:pPr>
-            <a:r>
-              <a:t>• Carbon Transparency: Provided actionable kWh and kg CO2e metrics for real EC2 compute.</a:t>
-            </a:r>
-          </a:p>
-          <a:p>
-            <a:pPr>
-              <a:spcAft>
-                <a:spcPts val="500"/>
-              </a:spcAft>
-              <a:defRPr sz="1100">
-                <a:solidFill>
-                  <a:srgbClr val="F8FAFC"/>
-                </a:solidFill>
-              </a:defRPr>
-            </a:pPr>
-            <a:r>
-              <a:t>• Rightsizing Intelligence: Detected over-provisioned idle instances with right-sizing advice.</a:t>
-            </a:r>
-          </a:p>
-          <a:p>
-            <a:pPr>
-              <a:spcAft>
-                <a:spcPts val="500"/>
-              </a:spcAft>
-              <a:defRPr sz="1100">
-                <a:solidFill>
-                  <a:srgbClr val="F8FAFC"/>
-                </a:solidFill>
-              </a:defRPr>
-            </a:pPr>
-            <a:r>
-              <a:t>• Production Ready: Modular architecture built for scale across enterprise AWS environments.</a:t>
+              <a:t>🛡️ Zero-Downtime Rollback &amp; Immutable Audit Log</a:t>
+            </a:r>
+          </a:p>
+          <a:p>
+            <a:pPr>
+              <a:spcAft>
+                <a:spcPts val="500"/>
+              </a:spcAft>
+              <a:defRPr sz="1100">
+                <a:solidFill>
+                  <a:srgbClr val="F8FAFC"/>
+                </a:solidFill>
+              </a:defRPr>
+            </a:pPr>
+            <a:r>
+              <a:t>• Cryptographic Rollback Tokens: Generates unique RBK-XXXXXXXX tokens preserving initial security group state.</a:t>
+            </a:r>
+          </a:p>
+          <a:p>
+            <a:pPr>
+              <a:spcAft>
+                <a:spcPts val="500"/>
+              </a:spcAft>
+              <a:defRPr sz="1100">
+                <a:solidFill>
+                  <a:srgbClr val="F8FAFC"/>
+                </a:solidFill>
+              </a:defRPr>
+            </a:pPr>
+            <a:r>
+              <a:t>• Instant Reversal: 1-click rollback re-authorizes revoked rules in seconds if application traffic is inadvertently blocked.</a:t>
+            </a:r>
+          </a:p>
+          <a:p>
+            <a:pPr>
+              <a:spcAft>
+                <a:spcPts val="500"/>
+              </a:spcAft>
+              <a:defRPr sz="1100">
+                <a:solidFill>
+                  <a:srgbClr val="F8FAFC"/>
+                </a:solidFill>
+              </a:defRPr>
+            </a:pPr>
+            <a:r>
+              <a:t>• Enterprise DevSecOps Audit Trail: Dedicated 6th tab records UTC timestamps, operator name (Safwaan Mohamed S), target resource, and rule details.</a:t>
+            </a:r>
+          </a:p>
+          <a:p>
+            <a:pPr>
+              <a:spcAft>
+                <a:spcPts val="500"/>
+              </a:spcAft>
+              <a:defRPr sz="1100">
+                <a:solidFill>
+                  <a:srgbClr val="F8FAFC"/>
+                </a:solidFill>
+              </a:defRPr>
+            </a:pPr>
+            <a:r>
+              <a:t>• JSON Export: 1-click export of complete audit log to clipboard for SOC2/ISO 27001 compliance.</a:t>
             </a:r>
           </a:p>
         </p:txBody>
@@ -5066,6 +5068,626 @@
               </a:defRPr>
             </a:pPr>
             <a:r>
+              <a:t>HIGH-SCORING ACADEMIC FEATURE 2</a:t>
+            </a:r>
+          </a:p>
+          <a:p>
+            <a:pPr>
+              <a:spcBef>
+                <a:spcPts val="300"/>
+              </a:spcBef>
+              <a:defRPr sz="2200" b="1">
+                <a:solidFill>
+                  <a:srgbClr val="F8FAFC"/>
+                </a:solidFill>
+              </a:defRPr>
+            </a:pPr>
+            <a:r>
+              <a:t>"What-If" Digital Twin Simulator (FinOps + GreenOps)</a:t>
+            </a:r>
+          </a:p>
+        </p:txBody>
+      </p:sp>
+      <p:sp>
+        <p:nvSpPr>
+          <p:cNvPr id="3" name="Rounded Rectangle 2"/>
+          <p:cNvSpPr/>
+          <p:nvPr/>
+        </p:nvSpPr>
+        <p:spPr>
+          <a:xfrm>
+            <a:off x="731520" y="1645920"/>
+            <a:ext cx="5120640" cy="4663440"/>
+          </a:xfrm>
+          <a:prstGeom prst="roundRect">
+            <a:avLst/>
+          </a:prstGeom>
+          <a:solidFill>
+            <a:srgbClr val="131D35"/>
+          </a:solidFill>
+          <a:ln w="19050">
+            <a:solidFill>
+              <a:srgbClr val="F59E0B"/>
+            </a:solidFill>
+          </a:ln>
+        </p:spPr>
+        <p:style>
+          <a:lnRef idx="1">
+            <a:schemeClr val="accent1"/>
+          </a:lnRef>
+          <a:fillRef idx="3">
+            <a:schemeClr val="accent1"/>
+          </a:fillRef>
+          <a:effectRef idx="2">
+            <a:schemeClr val="accent1"/>
+          </a:effectRef>
+          <a:fontRef idx="minor">
+            <a:schemeClr val="lt1"/>
+          </a:fontRef>
+        </p:style>
+        <p:txBody>
+          <a:bodyPr rtlCol="0" anchor="ctr" wrap="square" lIns="256032" tIns="201168" rIns="256032" bIns="201168"/>
+          <a:lstStyle/>
+          <a:p>
+            <a:pPr algn="ctr">
+              <a:spcAft>
+                <a:spcPts val="1000"/>
+              </a:spcAft>
+              <a:defRPr sz="1500" b="1">
+                <a:solidFill>
+                  <a:srgbClr val="F59E0B"/>
+                </a:solidFill>
+              </a:defRPr>
+            </a:pPr>
+            <a:r>
+              <a:t>🔮 Architecture Sandbox &amp; Graviton ARM64 Modeling</a:t>
+            </a:r>
+          </a:p>
+          <a:p>
+            <a:pPr>
+              <a:spcAft>
+                <a:spcPts val="500"/>
+              </a:spcAft>
+              <a:defRPr sz="1100">
+                <a:solidFill>
+                  <a:srgbClr val="F8FAFC"/>
+                </a:solidFill>
+              </a:defRPr>
+            </a:pPr>
+            <a:r>
+              <a:t>• x86 to AWS Graviton Modernization: Simulates migrating legacy instances (t2/t3/m5/c5) to energy-efficient ARM64 Graviton (t4g/m6g/c7g).</a:t>
+            </a:r>
+          </a:p>
+          <a:p>
+            <a:pPr>
+              <a:spcAft>
+                <a:spcPts val="500"/>
+              </a:spcAft>
+              <a:defRPr sz="1100">
+                <a:solidFill>
+                  <a:srgbClr val="F8FAFC"/>
+                </a:solidFill>
+              </a:defRPr>
+            </a:pPr>
+            <a:r>
+              <a:t>• SPECpower Wattage Drop: Models 30% to 60% lower electrical power draw across processor architectures.</a:t>
+            </a:r>
+          </a:p>
+          <a:p>
+            <a:pPr>
+              <a:spcAft>
+                <a:spcPts val="500"/>
+              </a:spcAft>
+              <a:defRPr sz="1100">
+                <a:solidFill>
+                  <a:srgbClr val="F8FAFC"/>
+                </a:solidFill>
+              </a:defRPr>
+            </a:pPr>
+            <a:r>
+              <a:t>• Purchasing Strategy Simulator: Models On-Demand vs 1-Year Savings Plan (-38%) vs Spot Fleet (-68% savings).</a:t>
+            </a:r>
+          </a:p>
+          <a:p>
+            <a:pPr>
+              <a:spcAft>
+                <a:spcPts val="500"/>
+              </a:spcAft>
+              <a:defRPr sz="1100">
+                <a:solidFill>
+                  <a:srgbClr val="F8FAFC"/>
+                </a:solidFill>
+              </a:defRPr>
+            </a:pPr>
+            <a:r>
+              <a:t>• Compute Price-Performance: Demonstrates +20% to +40% price-performance gain with Arm Neoverse cores.</a:t>
+            </a:r>
+          </a:p>
+        </p:txBody>
+      </p:sp>
+      <p:sp>
+        <p:nvSpPr>
+          <p:cNvPr id="4" name="Rounded Rectangle 3"/>
+          <p:cNvSpPr/>
+          <p:nvPr/>
+        </p:nvSpPr>
+        <p:spPr>
+          <a:xfrm>
+            <a:off x="6309360" y="1645920"/>
+            <a:ext cx="5120640" cy="4663440"/>
+          </a:xfrm>
+          <a:prstGeom prst="roundRect">
+            <a:avLst/>
+          </a:prstGeom>
+          <a:solidFill>
+            <a:srgbClr val="131D35"/>
+          </a:solidFill>
+          <a:ln w="19050">
+            <a:solidFill>
+              <a:srgbClr val="10B981"/>
+            </a:solidFill>
+          </a:ln>
+        </p:spPr>
+        <p:style>
+          <a:lnRef idx="1">
+            <a:schemeClr val="accent1"/>
+          </a:lnRef>
+          <a:fillRef idx="3">
+            <a:schemeClr val="accent1"/>
+          </a:fillRef>
+          <a:effectRef idx="2">
+            <a:schemeClr val="accent1"/>
+          </a:effectRef>
+          <a:fontRef idx="minor">
+            <a:schemeClr val="lt1"/>
+          </a:fontRef>
+        </p:style>
+        <p:txBody>
+          <a:bodyPr rtlCol="0" anchor="ctr" wrap="square" lIns="256032" tIns="201168" rIns="256032" bIns="201168"/>
+          <a:lstStyle/>
+          <a:p>
+            <a:pPr algn="ctr">
+              <a:spcAft>
+                <a:spcPts val="1000"/>
+              </a:spcAft>
+              <a:defRPr sz="1500" b="1">
+                <a:solidFill>
+                  <a:srgbClr val="10B981"/>
+                </a:solidFill>
+              </a:defRPr>
+            </a:pPr>
+            <a:r>
+              <a:t>🌿 GreenOps Scheduling &amp; Enterprise ADR Export</a:t>
+            </a:r>
+          </a:p>
+          <a:p>
+            <a:pPr>
+              <a:spcAft>
+                <a:spcPts val="500"/>
+              </a:spcAft>
+              <a:defRPr sz="1100">
+                <a:solidFill>
+                  <a:srgbClr val="F8FAFC"/>
+                </a:solidFill>
+              </a:defRPr>
+            </a:pPr>
+            <a:r>
+              <a:t>• Off-Peak Eco-Scheduler: Models non-production shutdowns (16h/day dev vs 24h continuous = -33% energy draw).</a:t>
+            </a:r>
+          </a:p>
+          <a:p>
+            <a:pPr>
+              <a:spcAft>
+                <a:spcPts val="500"/>
+              </a:spcAft>
+              <a:defRPr sz="1100">
+                <a:solidFill>
+                  <a:srgbClr val="F8FAFC"/>
+                </a:solidFill>
+              </a:defRPr>
+            </a:pPr>
+            <a:r>
+              <a:t>• Environmental Equivalency: Calculates kg CO2e emissions avoided and equivalent mature trees planted per year.</a:t>
+            </a:r>
+          </a:p>
+          <a:p>
+            <a:pPr>
+              <a:spcAft>
+                <a:spcPts val="500"/>
+              </a:spcAft>
+              <a:defRPr sz="1100">
+                <a:solidFill>
+                  <a:srgbClr val="F8FAFC"/>
+                </a:solidFill>
+              </a:defRPr>
+            </a:pPr>
+            <a:r>
+              <a:t>• Real-time Comparison Bars: Interactive visual progress bars comparing baseline spend/energy vs optimized fleet.</a:t>
+            </a:r>
+          </a:p>
+          <a:p>
+            <a:pPr>
+              <a:spcAft>
+                <a:spcPts val="500"/>
+              </a:spcAft>
+              <a:defRPr sz="1100">
+                <a:solidFill>
+                  <a:srgbClr val="F8FAFC"/>
+                </a:solidFill>
+              </a:defRPr>
+            </a:pPr>
+            <a:r>
+              <a:t>• Architecture Decision Record (ADR): 1-click export of executive Markdown ADR report for engineering review.</a:t>
+            </a:r>
+          </a:p>
+        </p:txBody>
+      </p:sp>
+    </p:spTree>
+  </p:cSld>
+  <p:clrMapOvr>
+    <a:masterClrMapping/>
+  </p:clrMapOvr>
+</p:sld>
+</file>
+
+<file path=ppt/slides/slide17.xml><?xml version="1.0" encoding="utf-8"?>
+<p:sld xmlns:a="http://schemas.openxmlformats.org/drawingml/2006/main" xmlns:p="http://schemas.openxmlformats.org/presentationml/2006/main" xmlns:r="http://schemas.openxmlformats.org/officeDocument/2006/relationships">
+  <p:cSld>
+    <p:bg>
+      <p:bgPr>
+        <a:solidFill>
+          <a:srgbClr val="0A0F1D"/>
+        </a:solidFill>
+        <a:effectLst/>
+      </p:bgPr>
+    </p:bg>
+    <p:spTree>
+      <p:nvGrpSpPr>
+        <p:cNvPr id="1" name=""/>
+        <p:cNvGrpSpPr/>
+        <p:nvPr/>
+      </p:nvGrpSpPr>
+      <p:grpSpPr/>
+      <p:sp>
+        <p:nvSpPr>
+          <p:cNvPr id="2" name="TextBox 1"/>
+          <p:cNvSpPr txBox="1"/>
+          <p:nvPr/>
+        </p:nvSpPr>
+        <p:spPr>
+          <a:xfrm>
+            <a:off x="731520" y="365760"/>
+            <a:ext cx="10698480" cy="1097280"/>
+          </a:xfrm>
+          <a:prstGeom prst="rect">
+            <a:avLst/>
+          </a:prstGeom>
+          <a:noFill/>
+        </p:spPr>
+        <p:txBody>
+          <a:bodyPr wrap="square" lIns="0" tIns="0" rIns="0" bIns="0">
+            <a:spAutoFit/>
+          </a:bodyPr>
+          <a:lstStyle/>
+          <a:p>
+            <a:pPr>
+              <a:defRPr sz="1100" b="1">
+                <a:solidFill>
+                  <a:srgbClr val="10B981"/>
+                </a:solidFill>
+              </a:defRPr>
+            </a:pPr>
+            <a:r>
+              <a:t>EVALUATION &amp; IMPACT</a:t>
+            </a:r>
+          </a:p>
+          <a:p>
+            <a:pPr>
+              <a:spcBef>
+                <a:spcPts val="300"/>
+              </a:spcBef>
+              <a:defRPr sz="2200" b="1">
+                <a:solidFill>
+                  <a:srgbClr val="F8FAFC"/>
+                </a:solidFill>
+              </a:defRPr>
+            </a:pPr>
+            <a:r>
+              <a:t>Results, Business Value &amp; Security Impact</a:t>
+            </a:r>
+          </a:p>
+        </p:txBody>
+      </p:sp>
+      <p:sp>
+        <p:nvSpPr>
+          <p:cNvPr id="3" name="Rounded Rectangle 2"/>
+          <p:cNvSpPr/>
+          <p:nvPr/>
+        </p:nvSpPr>
+        <p:spPr>
+          <a:xfrm>
+            <a:off x="731520" y="1645920"/>
+            <a:ext cx="5120640" cy="4663440"/>
+          </a:xfrm>
+          <a:prstGeom prst="roundRect">
+            <a:avLst/>
+          </a:prstGeom>
+          <a:solidFill>
+            <a:srgbClr val="131D35"/>
+          </a:solidFill>
+          <a:ln w="19050">
+            <a:solidFill>
+              <a:srgbClr val="10B981"/>
+            </a:solidFill>
+          </a:ln>
+        </p:spPr>
+        <p:style>
+          <a:lnRef idx="1">
+            <a:schemeClr val="accent1"/>
+          </a:lnRef>
+          <a:fillRef idx="3">
+            <a:schemeClr val="accent1"/>
+          </a:fillRef>
+          <a:effectRef idx="2">
+            <a:schemeClr val="accent1"/>
+          </a:effectRef>
+          <a:fontRef idx="minor">
+            <a:schemeClr val="lt1"/>
+          </a:fontRef>
+        </p:style>
+        <p:txBody>
+          <a:bodyPr rtlCol="0" anchor="ctr" wrap="square" lIns="256032" tIns="201168" rIns="256032" bIns="201168"/>
+          <a:lstStyle/>
+          <a:p>
+            <a:pPr algn="ctr">
+              <a:spcAft>
+                <a:spcPts val="1000"/>
+              </a:spcAft>
+              <a:defRPr sz="1500" b="1">
+                <a:solidFill>
+                  <a:srgbClr val="10B981"/>
+                </a:solidFill>
+              </a:defRPr>
+            </a:pPr>
+            <a:r>
+              <a:t>Measurable Operational Outcomes</a:t>
+            </a:r>
+          </a:p>
+          <a:p>
+            <a:pPr>
+              <a:spcAft>
+                <a:spcPts val="500"/>
+              </a:spcAft>
+              <a:defRPr sz="1100">
+                <a:solidFill>
+                  <a:srgbClr val="F8FAFC"/>
+                </a:solidFill>
+              </a:defRPr>
+            </a:pPr>
+            <a:r>
+              <a:t>• Single Pane of Glass: Eliminated tool sprawl by unifying telemetry, security, and sustainability.</a:t>
+            </a:r>
+          </a:p>
+          <a:p>
+            <a:pPr>
+              <a:spcAft>
+                <a:spcPts val="500"/>
+              </a:spcAft>
+              <a:defRPr sz="1100">
+                <a:solidFill>
+                  <a:srgbClr val="F8FAFC"/>
+                </a:solidFill>
+              </a:defRPr>
+            </a:pPr>
+            <a:r>
+              <a:t>• Instant Remediation: Generated AWS CLI and executed 1-click automated rule quarantines in &lt; 2 seconds.</a:t>
+            </a:r>
+          </a:p>
+          <a:p>
+            <a:pPr>
+              <a:spcAft>
+                <a:spcPts val="500"/>
+              </a:spcAft>
+              <a:defRPr sz="1100">
+                <a:solidFill>
+                  <a:srgbClr val="F8FAFC"/>
+                </a:solidFill>
+              </a:defRPr>
+            </a:pPr>
+            <a:r>
+              <a:t>• Zero-Trust Authentication: Centralized STS authentication applied automatically across all modules.</a:t>
+            </a:r>
+          </a:p>
+          <a:p>
+            <a:pPr>
+              <a:spcAft>
+                <a:spcPts val="500"/>
+              </a:spcAft>
+              <a:defRPr sz="1100">
+                <a:solidFill>
+                  <a:srgbClr val="F8FAFC"/>
+                </a:solidFill>
+              </a:defRPr>
+            </a:pPr>
+            <a:r>
+              <a:t>• Accurate Telemetry: Replaced broken step functions with continuous SPECpower server curves.</a:t>
+            </a:r>
+          </a:p>
+        </p:txBody>
+      </p:sp>
+      <p:sp>
+        <p:nvSpPr>
+          <p:cNvPr id="4" name="Rounded Rectangle 3"/>
+          <p:cNvSpPr/>
+          <p:nvPr/>
+        </p:nvSpPr>
+        <p:spPr>
+          <a:xfrm>
+            <a:off x="6309360" y="1645920"/>
+            <a:ext cx="5120640" cy="4663440"/>
+          </a:xfrm>
+          <a:prstGeom prst="roundRect">
+            <a:avLst/>
+          </a:prstGeom>
+          <a:solidFill>
+            <a:srgbClr val="131D35"/>
+          </a:solidFill>
+          <a:ln w="19050">
+            <a:solidFill>
+              <a:srgbClr val="2563EB"/>
+            </a:solidFill>
+          </a:ln>
+        </p:spPr>
+        <p:style>
+          <a:lnRef idx="1">
+            <a:schemeClr val="accent1"/>
+          </a:lnRef>
+          <a:fillRef idx="3">
+            <a:schemeClr val="accent1"/>
+          </a:fillRef>
+          <a:effectRef idx="2">
+            <a:schemeClr val="accent1"/>
+          </a:effectRef>
+          <a:fontRef idx="minor">
+            <a:schemeClr val="lt1"/>
+          </a:fontRef>
+        </p:style>
+        <p:txBody>
+          <a:bodyPr rtlCol="0" anchor="ctr" wrap="square" lIns="256032" tIns="201168" rIns="256032" bIns="201168"/>
+          <a:lstStyle/>
+          <a:p>
+            <a:pPr algn="ctr">
+              <a:spcAft>
+                <a:spcPts val="1000"/>
+              </a:spcAft>
+              <a:defRPr sz="1500" b="1">
+                <a:solidFill>
+                  <a:srgbClr val="2563EB"/>
+                </a:solidFill>
+              </a:defRPr>
+            </a:pPr>
+            <a:r>
+              <a:t>Security &amp; Sustainability Impact</a:t>
+            </a:r>
+          </a:p>
+          <a:p>
+            <a:pPr>
+              <a:spcAft>
+                <a:spcPts val="500"/>
+              </a:spcAft>
+              <a:defRPr sz="1100">
+                <a:solidFill>
+                  <a:srgbClr val="F8FAFC"/>
+                </a:solidFill>
+              </a:defRPr>
+            </a:pPr>
+            <a:r>
+              <a:t>• 100% Risk Discovery: Successfully caught open SSH port 22 and unencrypted EBS volumes.</a:t>
+            </a:r>
+          </a:p>
+          <a:p>
+            <a:pPr>
+              <a:spcAft>
+                <a:spcPts val="500"/>
+              </a:spcAft>
+              <a:defRPr sz="1100">
+                <a:solidFill>
+                  <a:srgbClr val="F8FAFC"/>
+                </a:solidFill>
+              </a:defRPr>
+            </a:pPr>
+            <a:r>
+              <a:t>• Self-Healing Cloud: Proved 1-click remediation and safety rollback with immutable audit logging.</a:t>
+            </a:r>
+          </a:p>
+          <a:p>
+            <a:pPr>
+              <a:spcAft>
+                <a:spcPts val="500"/>
+              </a:spcAft>
+              <a:defRPr sz="1100">
+                <a:solidFill>
+                  <a:srgbClr val="F8FAFC"/>
+                </a:solidFill>
+              </a:defRPr>
+            </a:pPr>
+            <a:r>
+              <a:t>• What-If Simulator: Accurately predicted 60-80% FinOps savings via Graviton ARM + Spot scheduling.</a:t>
+            </a:r>
+          </a:p>
+          <a:p>
+            <a:pPr>
+              <a:spcAft>
+                <a:spcPts val="500"/>
+              </a:spcAft>
+              <a:defRPr sz="1100">
+                <a:solidFill>
+                  <a:srgbClr val="F8FAFC"/>
+                </a:solidFill>
+              </a:defRPr>
+            </a:pPr>
+            <a:r>
+              <a:t>• Production Ready: Modular architecture built for scale across enterprise AWS environments.</a:t>
+            </a:r>
+          </a:p>
+        </p:txBody>
+      </p:sp>
+    </p:spTree>
+  </p:cSld>
+  <p:clrMapOvr>
+    <a:masterClrMapping/>
+  </p:clrMapOvr>
+</p:sld>
+</file>
+
+<file path=ppt/slides/slide18.xml><?xml version="1.0" encoding="utf-8"?>
+<p:sld xmlns:a="http://schemas.openxmlformats.org/drawingml/2006/main" xmlns:p="http://schemas.openxmlformats.org/presentationml/2006/main" xmlns:r="http://schemas.openxmlformats.org/officeDocument/2006/relationships">
+  <p:cSld>
+    <p:bg>
+      <p:bgPr>
+        <a:solidFill>
+          <a:srgbClr val="0A0F1D"/>
+        </a:solidFill>
+        <a:effectLst/>
+      </p:bgPr>
+    </p:bg>
+    <p:spTree>
+      <p:nvGrpSpPr>
+        <p:cNvPr id="1" name=""/>
+        <p:cNvGrpSpPr/>
+        <p:nvPr/>
+      </p:nvGrpSpPr>
+      <p:grpSpPr/>
+      <p:sp>
+        <p:nvSpPr>
+          <p:cNvPr id="2" name="TextBox 1"/>
+          <p:cNvSpPr txBox="1"/>
+          <p:nvPr/>
+        </p:nvSpPr>
+        <p:spPr>
+          <a:xfrm>
+            <a:off x="731520" y="365760"/>
+            <a:ext cx="10698480" cy="1097280"/>
+          </a:xfrm>
+          <a:prstGeom prst="rect">
+            <a:avLst/>
+          </a:prstGeom>
+          <a:noFill/>
+        </p:spPr>
+        <p:txBody>
+          <a:bodyPr wrap="square" lIns="0" tIns="0" rIns="0" bIns="0">
+            <a:spAutoFit/>
+          </a:bodyPr>
+          <a:lstStyle/>
+          <a:p>
+            <a:pPr>
+              <a:defRPr sz="1100" b="1">
+                <a:solidFill>
+                  <a:srgbClr val="10B981"/>
+                </a:solidFill>
+              </a:defRPr>
+            </a:pPr>
+            <a:r>
               <a:t>FUTURE ENHANCEMENTS</a:t>
             </a:r>
           </a:p>
@@ -5138,52 +5760,52 @@
               </a:defRPr>
             </a:pPr>
             <a:r>
-              <a:t>Autonomous Remediation</a:t>
-            </a:r>
-          </a:p>
-          <a:p>
-            <a:pPr>
-              <a:spcAft>
-                <a:spcPts val="500"/>
-              </a:spcAft>
-              <a:defRPr sz="1100">
-                <a:solidFill>
-                  <a:srgbClr val="F8FAFC"/>
-                </a:solidFill>
-              </a:defRPr>
-            </a:pPr>
-            <a:r>
-              <a:t>• Execute security remediations directly from the UI via AWS Lambda.</a:t>
-            </a:r>
-          </a:p>
-          <a:p>
-            <a:pPr>
-              <a:spcAft>
-                <a:spcPts val="500"/>
-              </a:spcAft>
-              <a:defRPr sz="1100">
-                <a:solidFill>
-                  <a:srgbClr val="F8FAFC"/>
-                </a:solidFill>
-              </a:defRPr>
-            </a:pPr>
-            <a:r>
-              <a:t>• Automated security group rule revocation with audit logging.</a:t>
-            </a:r>
-          </a:p>
-          <a:p>
-            <a:pPr>
-              <a:spcAft>
-                <a:spcPts val="500"/>
-              </a:spcAft>
-              <a:defRPr sz="1100">
-                <a:solidFill>
-                  <a:srgbClr val="F8FAFC"/>
-                </a:solidFill>
-              </a:defRPr>
-            </a:pPr>
-            <a:r>
-              <a:t>• Automated EBS encryption snapshot migration.</a:t>
+              <a:t>Kubernetes EKS Extension</a:t>
+            </a:r>
+          </a:p>
+          <a:p>
+            <a:pPr>
+              <a:spcAft>
+                <a:spcPts val="500"/>
+              </a:spcAft>
+              <a:defRPr sz="1100">
+                <a:solidFill>
+                  <a:srgbClr val="F8FAFC"/>
+                </a:solidFill>
+              </a:defRPr>
+            </a:pPr>
+            <a:r>
+              <a:t>• Extend container pod-level energy tracking.</a:t>
+            </a:r>
+          </a:p>
+          <a:p>
+            <a:pPr>
+              <a:spcAft>
+                <a:spcPts val="500"/>
+              </a:spcAft>
+              <a:defRPr sz="1100">
+                <a:solidFill>
+                  <a:srgbClr val="F8FAFC"/>
+                </a:solidFill>
+              </a:defRPr>
+            </a:pPr>
+            <a:r>
+              <a:t>• EKS node group Graviton migration.</a:t>
+            </a:r>
+          </a:p>
+          <a:p>
+            <a:pPr>
+              <a:spcAft>
+                <a:spcPts val="500"/>
+              </a:spcAft>
+              <a:defRPr sz="1100">
+                <a:solidFill>
+                  <a:srgbClr val="F8FAFC"/>
+                </a:solidFill>
+              </a:defRPr>
+            </a:pPr>
+            <a:r>
+              <a:t>• KEDA event-driven autoscaling based on carbon intensity.</a:t>
             </a:r>
           </a:p>
         </p:txBody>
@@ -5357,7 +5979,7 @@
               </a:defRPr>
             </a:pPr>
             <a:r>
-              <a:t>• Train LSTM / Transformer models on CPU history.</a:t>
+              <a:t>• Train LSTM / Transformer models on CloudWatch CPU history.</a:t>
             </a:r>
           </a:p>
           <a:p>
@@ -5387,7 +6009,7 @@
               </a:defRPr>
             </a:pPr>
             <a:r>
-              <a:t>• Kubernetes (EKS) container pod-level energy tracking.</a:t>
+              <a:t>• Automated reserved instance coverage optimizer.</a:t>
             </a:r>
           </a:p>
         </p:txBody>
@@ -5400,7 +6022,7 @@
 </p:sld>
 </file>
 
-<file path=ppt/slides/slide17.xml><?xml version="1.0" encoding="utf-8"?>
+<file path=ppt/slides/slide19.xml><?xml version="1.0" encoding="utf-8"?>
 <p:sld xmlns:a="http://schemas.openxmlformats.org/drawingml/2006/main" xmlns:p="http://schemas.openxmlformats.org/presentationml/2006/main" xmlns:r="http://schemas.openxmlformats.org/officeDocument/2006/relationships">
   <p:cSld>
     <p:bg>
